--- a/paleomammals_ShortCourse_repaired.pptx
+++ b/paleomammals_ShortCourse_repaired.pptx
@@ -5,28 +5,27 @@
     <p:sldMasterId id="2147483648" r:id="rId1"/>
   </p:sldMasterIdLst>
   <p:notesMasterIdLst>
-    <p:notesMasterId r:id="rId21"/>
+    <p:notesMasterId r:id="rId20"/>
   </p:notesMasterIdLst>
   <p:sldIdLst>
     <p:sldId id="256" r:id="rId2"/>
-    <p:sldId id="257" r:id="rId3"/>
-    <p:sldId id="258" r:id="rId4"/>
-    <p:sldId id="259" r:id="rId5"/>
-    <p:sldId id="260" r:id="rId6"/>
-    <p:sldId id="261" r:id="rId7"/>
-    <p:sldId id="262" r:id="rId8"/>
-    <p:sldId id="263" r:id="rId9"/>
-    <p:sldId id="264" r:id="rId10"/>
-    <p:sldId id="265" r:id="rId11"/>
-    <p:sldId id="266" r:id="rId12"/>
-    <p:sldId id="267" r:id="rId13"/>
-    <p:sldId id="268" r:id="rId14"/>
-    <p:sldId id="269" r:id="rId15"/>
-    <p:sldId id="270" r:id="rId16"/>
-    <p:sldId id="271" r:id="rId17"/>
-    <p:sldId id="272" r:id="rId18"/>
+    <p:sldId id="275" r:id="rId3"/>
+    <p:sldId id="257" r:id="rId4"/>
+    <p:sldId id="258" r:id="rId5"/>
+    <p:sldId id="259" r:id="rId6"/>
+    <p:sldId id="260" r:id="rId7"/>
+    <p:sldId id="261" r:id="rId8"/>
+    <p:sldId id="268" r:id="rId9"/>
+    <p:sldId id="262" r:id="rId10"/>
+    <p:sldId id="263" r:id="rId11"/>
+    <p:sldId id="264" r:id="rId12"/>
+    <p:sldId id="265" r:id="rId13"/>
+    <p:sldId id="269" r:id="rId14"/>
+    <p:sldId id="270" r:id="rId15"/>
+    <p:sldId id="272" r:id="rId16"/>
+    <p:sldId id="266" r:id="rId17"/>
+    <p:sldId id="267" r:id="rId18"/>
     <p:sldId id="273" r:id="rId19"/>
-    <p:sldId id="274" r:id="rId20"/>
   </p:sldIdLst>
   <p:sldSz cx="12192000" cy="6858000"/>
   <p:notesSz cx="6858000" cy="9144000"/>
@@ -260,8 +259,11 @@
     </a:lvl9pPr>
   </p:defaultTextStyle>
   <p:extLst>
+    <p:ext uri="{EFAFB233-063F-42B5-8137-9DF3F51BA10A}">
+      <p15:sldGuideLst xmlns:p15="http://schemas.microsoft.com/office/powerpoint/2012/main"/>
+    </p:ext>
     <p:ext uri="GoogleSlidesCustomDataVersion2">
-      <go:slidesCustomData xmlns:go="http://customooxmlschemas.google.com/" xmlns:ahyp="http://schemas.microsoft.com/office/drawing/2018/hyperlinkcolor" xmlns:p15="http://schemas.microsoft.com/office/powerpoint/2012/main" xmlns:p14="http://schemas.microsoft.com/office/powerpoint/2010/main" xmlns:com="http://schemas.openxmlformats.org/drawingml/2006/compatibility" xmlns:pvml="urn:schemas-microsoft-com:office:powerpoint" xmlns:v="urn:schemas-microsoft-com:vml" xmlns:o="urn:schemas-microsoft-com:office:office" xmlns:dgm="http://schemas.openxmlformats.org/drawingml/2006/diagram" xmlns:c="http://schemas.openxmlformats.org/drawingml/2006/chart" xmlns:mv="urn:schemas-microsoft-com:mac:vml" xmlns:mc="http://schemas.openxmlformats.org/markup-compatibility/2006" xmlns="" r:id="rId24" roundtripDataSignature="AMtx7mgu/0aIV6cPmohlal0t70h4uK78cw=="/>
+      <go:slidesCustomData xmlns="" xmlns:mc="http://schemas.openxmlformats.org/markup-compatibility/2006" xmlns:mv="urn:schemas-microsoft-com:mac:vml" xmlns:c="http://schemas.openxmlformats.org/drawingml/2006/chart" xmlns:dgm="http://schemas.openxmlformats.org/drawingml/2006/diagram" xmlns:o="urn:schemas-microsoft-com:office:office" xmlns:v="urn:schemas-microsoft-com:vml" xmlns:pvml="urn:schemas-microsoft-com:office:powerpoint" xmlns:com="http://schemas.openxmlformats.org/drawingml/2006/compatibility" xmlns:p14="http://schemas.microsoft.com/office/powerpoint/2010/main" xmlns:p15="http://schemas.microsoft.com/office/powerpoint/2012/main" xmlns:ahyp="http://schemas.microsoft.com/office/drawing/2018/hyperlinkcolor" xmlns:go="http://customooxmlschemas.google.com/" r:id="rId24" roundtripDataSignature="AMtx7mgu/0aIV6cPmohlal0t70h4uK78cw=="/>
     </p:ext>
   </p:extLst>
 </p:presentation>
@@ -817,7 +819,7 @@
   <p:cSld>
     <p:spTree>
       <p:nvGrpSpPr>
-        <p:cNvPr id="1" name="Shape 165"/>
+        <p:cNvPr id="1" name="Shape 151"/>
         <p:cNvGrpSpPr/>
         <p:nvPr/>
       </p:nvGrpSpPr>
@@ -831,7 +833,7 @@
       </p:grpSpPr>
       <p:sp>
         <p:nvSpPr>
-          <p:cNvPr id="166" name="Google Shape;166;p10:notes"/>
+          <p:cNvPr id="152" name="Google Shape;152;p9:notes"/>
           <p:cNvSpPr txBox="1">
             <a:spLocks noGrp="1"/>
           </p:cNvSpPr>
@@ -869,7 +871,7 @@
       </p:sp>
       <p:sp>
         <p:nvSpPr>
-          <p:cNvPr id="167" name="Google Shape;167;p10:notes"/>
+          <p:cNvPr id="153" name="Google Shape;153;p9:notes"/>
           <p:cNvSpPr>
             <a:spLocks noGrp="1" noRot="1" noChangeAspect="1"/>
           </p:cNvSpPr>
@@ -879,8 +881,8 @@
         </p:nvSpPr>
         <p:spPr>
           <a:xfrm>
-            <a:off x="1143225" y="685800"/>
-            <a:ext cx="4572225" cy="3429000"/>
+            <a:off x="381000" y="685800"/>
+            <a:ext cx="6096000" cy="3429000"/>
           </a:xfrm>
           <a:custGeom>
             <a:avLst/>
@@ -921,7 +923,7 @@
   <p:cSld>
     <p:spTree>
       <p:nvGrpSpPr>
-        <p:cNvPr id="1" name="Shape 173"/>
+        <p:cNvPr id="1" name="Shape 165"/>
         <p:cNvGrpSpPr/>
         <p:nvPr/>
       </p:nvGrpSpPr>
@@ -935,7 +937,7 @@
       </p:grpSpPr>
       <p:sp>
         <p:nvSpPr>
-          <p:cNvPr id="174" name="Google Shape;174;p11:notes"/>
+          <p:cNvPr id="166" name="Google Shape;166;p10:notes"/>
           <p:cNvSpPr txBox="1">
             <a:spLocks noGrp="1"/>
           </p:cNvSpPr>
@@ -973,7 +975,7 @@
       </p:sp>
       <p:sp>
         <p:nvSpPr>
-          <p:cNvPr id="175" name="Google Shape;175;p11:notes"/>
+          <p:cNvPr id="167" name="Google Shape;167;p10:notes"/>
           <p:cNvSpPr>
             <a:spLocks noGrp="1" noRot="1" noChangeAspect="1"/>
           </p:cNvSpPr>
@@ -983,8 +985,8 @@
         </p:nvSpPr>
         <p:spPr>
           <a:xfrm>
-            <a:off x="1143225" y="685800"/>
-            <a:ext cx="4572225" cy="3429000"/>
+            <a:off x="381000" y="685800"/>
+            <a:ext cx="6096000" cy="3429000"/>
           </a:xfrm>
           <a:custGeom>
             <a:avLst/>
@@ -1025,7 +1027,7 @@
   <p:cSld>
     <p:spTree>
       <p:nvGrpSpPr>
-        <p:cNvPr id="1" name="Shape 179"/>
+        <p:cNvPr id="1" name="Shape 191"/>
         <p:cNvGrpSpPr/>
         <p:nvPr/>
       </p:nvGrpSpPr>
@@ -1039,7 +1041,7 @@
       </p:grpSpPr>
       <p:sp>
         <p:nvSpPr>
-          <p:cNvPr id="180" name="Google Shape;180;p12:notes"/>
+          <p:cNvPr id="192" name="Google Shape;192;p14:notes"/>
           <p:cNvSpPr txBox="1">
             <a:spLocks noGrp="1"/>
           </p:cNvSpPr>
@@ -1077,7 +1079,7 @@
       </p:sp>
       <p:sp>
         <p:nvSpPr>
-          <p:cNvPr id="181" name="Google Shape;181;p12:notes"/>
+          <p:cNvPr id="193" name="Google Shape;193;p14:notes"/>
           <p:cNvSpPr>
             <a:spLocks noGrp="1" noRot="1" noChangeAspect="1"/>
           </p:cNvSpPr>
@@ -1129,7 +1131,7 @@
   <p:cSld>
     <p:spTree>
       <p:nvGrpSpPr>
-        <p:cNvPr id="1" name="Shape 185"/>
+        <p:cNvPr id="1" name="Shape 201"/>
         <p:cNvGrpSpPr/>
         <p:nvPr/>
       </p:nvGrpSpPr>
@@ -1143,7 +1145,7 @@
       </p:grpSpPr>
       <p:sp>
         <p:nvSpPr>
-          <p:cNvPr id="186" name="Google Shape;186;p13:notes"/>
+          <p:cNvPr id="202" name="Google Shape;202;p15:notes"/>
           <p:cNvSpPr txBox="1">
             <a:spLocks noGrp="1"/>
           </p:cNvSpPr>
@@ -1181,7 +1183,7 @@
       </p:sp>
       <p:sp>
         <p:nvSpPr>
-          <p:cNvPr id="187" name="Google Shape;187;p13:notes"/>
+          <p:cNvPr id="203" name="Google Shape;203;p15:notes"/>
           <p:cNvSpPr>
             <a:spLocks noGrp="1" noRot="1" noChangeAspect="1"/>
           </p:cNvSpPr>
@@ -1191,8 +1193,8 @@
         </p:nvSpPr>
         <p:spPr>
           <a:xfrm>
-            <a:off x="1143225" y="685800"/>
-            <a:ext cx="4572225" cy="3429000"/>
+            <a:off x="381000" y="685800"/>
+            <a:ext cx="6096000" cy="3429000"/>
           </a:xfrm>
           <a:custGeom>
             <a:avLst/>
@@ -1233,7 +1235,7 @@
   <p:cSld>
     <p:spTree>
       <p:nvGrpSpPr>
-        <p:cNvPr id="1" name="Shape 191"/>
+        <p:cNvPr id="1" name="Shape 216"/>
         <p:cNvGrpSpPr/>
         <p:nvPr/>
       </p:nvGrpSpPr>
@@ -1247,7 +1249,7 @@
       </p:grpSpPr>
       <p:sp>
         <p:nvSpPr>
-          <p:cNvPr id="192" name="Google Shape;192;p14:notes"/>
+          <p:cNvPr id="217" name="Google Shape;217;p17:notes"/>
           <p:cNvSpPr txBox="1">
             <a:spLocks noGrp="1"/>
           </p:cNvSpPr>
@@ -1285,7 +1287,7 @@
       </p:sp>
       <p:sp>
         <p:nvSpPr>
-          <p:cNvPr id="193" name="Google Shape;193;p14:notes"/>
+          <p:cNvPr id="218" name="Google Shape;218;p17:notes"/>
           <p:cNvSpPr>
             <a:spLocks noGrp="1" noRot="1" noChangeAspect="1"/>
           </p:cNvSpPr>
@@ -1295,8 +1297,8 @@
         </p:nvSpPr>
         <p:spPr>
           <a:xfrm>
-            <a:off x="1143225" y="685800"/>
-            <a:ext cx="4572225" cy="3429000"/>
+            <a:off x="381000" y="685800"/>
+            <a:ext cx="6096000" cy="3429000"/>
           </a:xfrm>
           <a:custGeom>
             <a:avLst/>
@@ -1337,7 +1339,7 @@
   <p:cSld>
     <p:spTree>
       <p:nvGrpSpPr>
-        <p:cNvPr id="1" name="Shape 201"/>
+        <p:cNvPr id="1" name="Shape 173"/>
         <p:cNvGrpSpPr/>
         <p:nvPr/>
       </p:nvGrpSpPr>
@@ -1351,7 +1353,7 @@
       </p:grpSpPr>
       <p:sp>
         <p:nvSpPr>
-          <p:cNvPr id="202" name="Google Shape;202;p15:notes"/>
+          <p:cNvPr id="174" name="Google Shape;174;p11:notes"/>
           <p:cNvSpPr txBox="1">
             <a:spLocks noGrp="1"/>
           </p:cNvSpPr>
@@ -1389,7 +1391,7 @@
       </p:sp>
       <p:sp>
         <p:nvSpPr>
-          <p:cNvPr id="203" name="Google Shape;203;p15:notes"/>
+          <p:cNvPr id="175" name="Google Shape;175;p11:notes"/>
           <p:cNvSpPr>
             <a:spLocks noGrp="1" noRot="1" noChangeAspect="1"/>
           </p:cNvSpPr>
@@ -1399,8 +1401,8 @@
         </p:nvSpPr>
         <p:spPr>
           <a:xfrm>
-            <a:off x="1143225" y="685800"/>
-            <a:ext cx="4572225" cy="3429000"/>
+            <a:off x="381000" y="685800"/>
+            <a:ext cx="6096000" cy="3429000"/>
           </a:xfrm>
           <a:custGeom>
             <a:avLst/>
@@ -1441,7 +1443,7 @@
   <p:cSld>
     <p:spTree>
       <p:nvGrpSpPr>
-        <p:cNvPr id="1" name="Shape 211"/>
+        <p:cNvPr id="1" name="Shape 179"/>
         <p:cNvGrpSpPr/>
         <p:nvPr/>
       </p:nvGrpSpPr>
@@ -1455,7 +1457,7 @@
       </p:grpSpPr>
       <p:sp>
         <p:nvSpPr>
-          <p:cNvPr id="212" name="Google Shape;212;p16:notes"/>
+          <p:cNvPr id="180" name="Google Shape;180;p12:notes"/>
           <p:cNvSpPr txBox="1">
             <a:spLocks noGrp="1"/>
           </p:cNvSpPr>
@@ -1493,7 +1495,7 @@
       </p:sp>
       <p:sp>
         <p:nvSpPr>
-          <p:cNvPr id="213" name="Google Shape;213;p16:notes"/>
+          <p:cNvPr id="181" name="Google Shape;181;p12:notes"/>
           <p:cNvSpPr>
             <a:spLocks noGrp="1" noRot="1" noChangeAspect="1"/>
           </p:cNvSpPr>
@@ -1503,8 +1505,8 @@
         </p:nvSpPr>
         <p:spPr>
           <a:xfrm>
-            <a:off x="1143225" y="685800"/>
-            <a:ext cx="4572225" cy="3429000"/>
+            <a:off x="381000" y="685800"/>
+            <a:ext cx="6096000" cy="3429000"/>
           </a:xfrm>
           <a:custGeom>
             <a:avLst/>
@@ -1545,110 +1547,6 @@
   <p:cSld>
     <p:spTree>
       <p:nvGrpSpPr>
-        <p:cNvPr id="1" name="Shape 216"/>
-        <p:cNvGrpSpPr/>
-        <p:nvPr/>
-      </p:nvGrpSpPr>
-      <p:grpSpPr>
-        <a:xfrm>
-          <a:off x="0" y="0"/>
-          <a:ext cx="0" cy="0"/>
-          <a:chOff x="0" y="0"/>
-          <a:chExt cx="0" cy="0"/>
-        </a:xfrm>
-      </p:grpSpPr>
-      <p:sp>
-        <p:nvSpPr>
-          <p:cNvPr id="217" name="Google Shape;217;p17:notes"/>
-          <p:cNvSpPr txBox="1">
-            <a:spLocks noGrp="1"/>
-          </p:cNvSpPr>
-          <p:nvPr>
-            <p:ph type="body" idx="1"/>
-          </p:nvPr>
-        </p:nvSpPr>
-        <p:spPr>
-          <a:xfrm>
-            <a:off x="685800" y="4343400"/>
-            <a:ext cx="5486400" cy="4114800"/>
-          </a:xfrm>
-          <a:prstGeom prst="rect">
-            <a:avLst/>
-          </a:prstGeom>
-        </p:spPr>
-        <p:txBody>
-          <a:bodyPr spcFirstLastPara="1" wrap="square" lIns="91425" tIns="91425" rIns="91425" bIns="91425" anchor="t" anchorCtr="0">
-            <a:noAutofit/>
-          </a:bodyPr>
-          <a:lstStyle/>
-          <a:p>
-            <a:pPr marL="0" lvl="0" indent="0" algn="l" rtl="0">
-              <a:spcBef>
-                <a:spcPts val="0"/>
-              </a:spcBef>
-              <a:spcAft>
-                <a:spcPts val="0"/>
-              </a:spcAft>
-              <a:buNone/>
-            </a:pPr>
-            <a:endParaRPr/>
-          </a:p>
-        </p:txBody>
-      </p:sp>
-      <p:sp>
-        <p:nvSpPr>
-          <p:cNvPr id="218" name="Google Shape;218;p17:notes"/>
-          <p:cNvSpPr>
-            <a:spLocks noGrp="1" noRot="1" noChangeAspect="1"/>
-          </p:cNvSpPr>
-          <p:nvPr>
-            <p:ph type="sldImg" idx="2"/>
-          </p:nvPr>
-        </p:nvSpPr>
-        <p:spPr>
-          <a:xfrm>
-            <a:off x="1143225" y="685800"/>
-            <a:ext cx="4572225" cy="3429000"/>
-          </a:xfrm>
-          <a:custGeom>
-            <a:avLst/>
-            <a:gdLst/>
-            <a:ahLst/>
-            <a:cxnLst/>
-            <a:rect l="l" t="t" r="r" b="b"/>
-            <a:pathLst>
-              <a:path w="120000" h="120000" extrusionOk="0">
-                <a:moveTo>
-                  <a:pt x="0" y="0"/>
-                </a:moveTo>
-                <a:lnTo>
-                  <a:pt x="120000" y="0"/>
-                </a:lnTo>
-                <a:lnTo>
-                  <a:pt x="120000" y="120000"/>
-                </a:lnTo>
-                <a:lnTo>
-                  <a:pt x="0" y="120000"/>
-                </a:lnTo>
-                <a:close/>
-              </a:path>
-            </a:pathLst>
-          </a:custGeom>
-        </p:spPr>
-      </p:sp>
-    </p:spTree>
-  </p:cSld>
-  <p:clrMapOvr>
-    <a:masterClrMapping/>
-  </p:clrMapOvr>
-</p:notes>
-</file>
-
-<file path=ppt/notesSlides/notesSlide18.xml><?xml version="1.0" encoding="utf-8"?>
-<p:notes xmlns:a="http://schemas.openxmlformats.org/drawingml/2006/main" xmlns:r="http://schemas.openxmlformats.org/officeDocument/2006/relationships" xmlns:p="http://schemas.openxmlformats.org/presentationml/2006/main" showMasterSp="0" showMasterPhAnim="0">
-  <p:cSld>
-    <p:spTree>
-      <p:nvGrpSpPr>
         <p:cNvPr id="1" name="Shape 223"/>
         <p:cNvGrpSpPr/>
         <p:nvPr/>
@@ -1711,112 +1609,8 @@
         </p:nvSpPr>
         <p:spPr>
           <a:xfrm>
-            <a:off x="1143225" y="685800"/>
-            <a:ext cx="4572225" cy="3429000"/>
-          </a:xfrm>
-          <a:custGeom>
-            <a:avLst/>
-            <a:gdLst/>
-            <a:ahLst/>
-            <a:cxnLst/>
-            <a:rect l="l" t="t" r="r" b="b"/>
-            <a:pathLst>
-              <a:path w="120000" h="120000" extrusionOk="0">
-                <a:moveTo>
-                  <a:pt x="0" y="0"/>
-                </a:moveTo>
-                <a:lnTo>
-                  <a:pt x="120000" y="0"/>
-                </a:lnTo>
-                <a:lnTo>
-                  <a:pt x="120000" y="120000"/>
-                </a:lnTo>
-                <a:lnTo>
-                  <a:pt x="0" y="120000"/>
-                </a:lnTo>
-                <a:close/>
-              </a:path>
-            </a:pathLst>
-          </a:custGeom>
-        </p:spPr>
-      </p:sp>
-    </p:spTree>
-  </p:cSld>
-  <p:clrMapOvr>
-    <a:masterClrMapping/>
-  </p:clrMapOvr>
-</p:notes>
-</file>
-
-<file path=ppt/notesSlides/notesSlide19.xml><?xml version="1.0" encoding="utf-8"?>
-<p:notes xmlns:a="http://schemas.openxmlformats.org/drawingml/2006/main" xmlns:r="http://schemas.openxmlformats.org/officeDocument/2006/relationships" xmlns:p="http://schemas.openxmlformats.org/presentationml/2006/main" showMasterSp="0" showMasterPhAnim="0">
-  <p:cSld>
-    <p:spTree>
-      <p:nvGrpSpPr>
-        <p:cNvPr id="1" name="Shape 231"/>
-        <p:cNvGrpSpPr/>
-        <p:nvPr/>
-      </p:nvGrpSpPr>
-      <p:grpSpPr>
-        <a:xfrm>
-          <a:off x="0" y="0"/>
-          <a:ext cx="0" cy="0"/>
-          <a:chOff x="0" y="0"/>
-          <a:chExt cx="0" cy="0"/>
-        </a:xfrm>
-      </p:grpSpPr>
-      <p:sp>
-        <p:nvSpPr>
-          <p:cNvPr id="232" name="Google Shape;232;p19:notes"/>
-          <p:cNvSpPr txBox="1">
-            <a:spLocks noGrp="1"/>
-          </p:cNvSpPr>
-          <p:nvPr>
-            <p:ph type="body" idx="1"/>
-          </p:nvPr>
-        </p:nvSpPr>
-        <p:spPr>
-          <a:xfrm>
-            <a:off x="685800" y="4343400"/>
-            <a:ext cx="5486400" cy="4114800"/>
-          </a:xfrm>
-          <a:prstGeom prst="rect">
-            <a:avLst/>
-          </a:prstGeom>
-        </p:spPr>
-        <p:txBody>
-          <a:bodyPr spcFirstLastPara="1" wrap="square" lIns="91425" tIns="91425" rIns="91425" bIns="91425" anchor="t" anchorCtr="0">
-            <a:noAutofit/>
-          </a:bodyPr>
-          <a:lstStyle/>
-          <a:p>
-            <a:pPr marL="0" lvl="0" indent="0" algn="l" rtl="0">
-              <a:spcBef>
-                <a:spcPts val="0"/>
-              </a:spcBef>
-              <a:spcAft>
-                <a:spcPts val="0"/>
-              </a:spcAft>
-              <a:buNone/>
-            </a:pPr>
-            <a:endParaRPr/>
-          </a:p>
-        </p:txBody>
-      </p:sp>
-      <p:sp>
-        <p:nvSpPr>
-          <p:cNvPr id="233" name="Google Shape;233;p19:notes"/>
-          <p:cNvSpPr>
-            <a:spLocks noGrp="1" noRot="1" noChangeAspect="1"/>
-          </p:cNvSpPr>
-          <p:nvPr>
-            <p:ph type="sldImg" idx="2"/>
-          </p:nvPr>
-        </p:nvSpPr>
-        <p:spPr>
-          <a:xfrm>
-            <a:off x="1143225" y="685800"/>
-            <a:ext cx="4572225" cy="3429000"/>
+            <a:off x="381000" y="685800"/>
+            <a:ext cx="6096000" cy="3429000"/>
           </a:xfrm>
           <a:custGeom>
             <a:avLst/>
@@ -1919,8 +1713,8 @@
         </p:nvSpPr>
         <p:spPr>
           <a:xfrm>
-            <a:off x="1143225" y="685800"/>
-            <a:ext cx="4572225" cy="3429000"/>
+            <a:off x="381000" y="685800"/>
+            <a:ext cx="6096000" cy="3429000"/>
           </a:xfrm>
           <a:custGeom>
             <a:avLst/>
@@ -2023,8 +1817,8 @@
         </p:nvSpPr>
         <p:spPr>
           <a:xfrm>
-            <a:off x="1143225" y="685800"/>
-            <a:ext cx="4572225" cy="3429000"/>
+            <a:off x="381000" y="685800"/>
+            <a:ext cx="6096000" cy="3429000"/>
           </a:xfrm>
           <a:custGeom>
             <a:avLst/>
@@ -2127,8 +1921,8 @@
         </p:nvSpPr>
         <p:spPr>
           <a:xfrm>
-            <a:off x="1143225" y="685800"/>
-            <a:ext cx="4572225" cy="3429000"/>
+            <a:off x="381000" y="685800"/>
+            <a:ext cx="6096000" cy="3429000"/>
           </a:xfrm>
           <a:custGeom>
             <a:avLst/>
@@ -2206,6 +2000,248 @@
           </a:bodyPr>
           <a:lstStyle/>
           <a:p>
+            <a:pPr marL="158750" indent="0" fontAlgn="base">
+              <a:buNone/>
+            </a:pPr>
+            <a:r>
+              <a:rPr lang="en-US" sz="1100" b="0" i="0" u="none" strike="noStrike" cap="none" dirty="0">
+                <a:solidFill>
+                  <a:srgbClr val="000000"/>
+                </a:solidFill>
+                <a:effectLst/>
+                <a:latin typeface="Arial"/>
+                <a:ea typeface="Arial"/>
+                <a:cs typeface="Arial"/>
+                <a:sym typeface="Arial"/>
+              </a:rPr>
+              <a:t>mode(Data) gives you storage mode of the variable</a:t>
+            </a:r>
+          </a:p>
+          <a:p>
+            <a:pPr marL="158750" indent="0" fontAlgn="base">
+              <a:buNone/>
+            </a:pPr>
+            <a:endParaRPr lang="en-US" sz="1100" b="0" i="0" u="none" strike="noStrike" cap="none" dirty="0">
+              <a:solidFill>
+                <a:srgbClr val="000000"/>
+              </a:solidFill>
+              <a:effectLst/>
+              <a:latin typeface="Arial"/>
+              <a:ea typeface="Arial"/>
+              <a:cs typeface="Arial"/>
+              <a:sym typeface="Arial"/>
+            </a:endParaRPr>
+          </a:p>
+          <a:p>
+            <a:pPr marL="158750" indent="0" fontAlgn="base">
+              <a:buNone/>
+            </a:pPr>
+            <a:r>
+              <a:rPr lang="en-US" sz="1100" b="0" i="0" u="none" strike="noStrike" cap="none" dirty="0">
+                <a:solidFill>
+                  <a:srgbClr val="000000"/>
+                </a:solidFill>
+                <a:effectLst/>
+                <a:latin typeface="Arial"/>
+                <a:ea typeface="Arial"/>
+                <a:cs typeface="Arial"/>
+                <a:sym typeface="Arial"/>
+              </a:rPr>
+              <a:t>Need to define a function:</a:t>
+            </a:r>
+          </a:p>
+          <a:p>
+            <a:pPr marL="158750" indent="0" fontAlgn="base">
+              <a:buNone/>
+            </a:pPr>
+            <a:endParaRPr lang="en-US" sz="1100" b="0" i="0" u="none" strike="noStrike" cap="none" dirty="0">
+              <a:solidFill>
+                <a:srgbClr val="000000"/>
+              </a:solidFill>
+              <a:effectLst/>
+              <a:latin typeface="Arial"/>
+              <a:ea typeface="Arial"/>
+              <a:cs typeface="Arial"/>
+              <a:sym typeface="Arial"/>
+            </a:endParaRPr>
+          </a:p>
+          <a:p>
+            <a:pPr marL="158750" indent="0" fontAlgn="base">
+              <a:buNone/>
+            </a:pPr>
+            <a:r>
+              <a:rPr lang="en-US" sz="1100" b="0" i="0" u="none" strike="noStrike" cap="none" dirty="0">
+                <a:solidFill>
+                  <a:srgbClr val="000000"/>
+                </a:solidFill>
+                <a:effectLst/>
+                <a:latin typeface="Arial"/>
+                <a:ea typeface="Arial"/>
+                <a:cs typeface="Arial"/>
+                <a:sym typeface="Arial"/>
+              </a:rPr>
+              <a:t>Mode &lt;- function(x) {</a:t>
+            </a:r>
+          </a:p>
+          <a:p>
+            <a:pPr marL="158750" indent="0" fontAlgn="base">
+              <a:buNone/>
+            </a:pPr>
+            <a:r>
+              <a:rPr lang="en-US" sz="1100" b="0" i="0" u="none" strike="noStrike" cap="none" dirty="0">
+                <a:solidFill>
+                  <a:srgbClr val="000000"/>
+                </a:solidFill>
+                <a:effectLst/>
+                <a:latin typeface="Arial"/>
+                <a:ea typeface="Arial"/>
+                <a:cs typeface="Arial"/>
+                <a:sym typeface="Arial"/>
+              </a:rPr>
+              <a:t>  </a:t>
+            </a:r>
+            <a:r>
+              <a:rPr lang="en-US" sz="1100" b="0" i="0" u="none" strike="noStrike" cap="none" dirty="0" err="1">
+                <a:solidFill>
+                  <a:srgbClr val="000000"/>
+                </a:solidFill>
+                <a:effectLst/>
+                <a:latin typeface="Arial"/>
+                <a:ea typeface="Arial"/>
+                <a:cs typeface="Arial"/>
+                <a:sym typeface="Arial"/>
+              </a:rPr>
+              <a:t>ux</a:t>
+            </a:r>
+            <a:r>
+              <a:rPr lang="en-US" sz="1100" b="0" i="0" u="none" strike="noStrike" cap="none" dirty="0">
+                <a:solidFill>
+                  <a:srgbClr val="000000"/>
+                </a:solidFill>
+                <a:effectLst/>
+                <a:latin typeface="Arial"/>
+                <a:ea typeface="Arial"/>
+                <a:cs typeface="Arial"/>
+                <a:sym typeface="Arial"/>
+              </a:rPr>
+              <a:t> &lt;- unique(x)</a:t>
+            </a:r>
+          </a:p>
+          <a:p>
+            <a:pPr marL="158750" indent="0" fontAlgn="base">
+              <a:buNone/>
+            </a:pPr>
+            <a:r>
+              <a:rPr lang="en-US" sz="1100" b="0" i="0" u="none" strike="noStrike" cap="none" dirty="0">
+                <a:solidFill>
+                  <a:srgbClr val="000000"/>
+                </a:solidFill>
+                <a:effectLst/>
+                <a:latin typeface="Arial"/>
+                <a:ea typeface="Arial"/>
+                <a:cs typeface="Arial"/>
+                <a:sym typeface="Arial"/>
+              </a:rPr>
+              <a:t>  </a:t>
+            </a:r>
+            <a:r>
+              <a:rPr lang="en-US" sz="1100" b="0" i="0" u="none" strike="noStrike" cap="none" dirty="0" err="1">
+                <a:solidFill>
+                  <a:srgbClr val="000000"/>
+                </a:solidFill>
+                <a:effectLst/>
+                <a:latin typeface="Arial"/>
+                <a:ea typeface="Arial"/>
+                <a:cs typeface="Arial"/>
+                <a:sym typeface="Arial"/>
+              </a:rPr>
+              <a:t>ux</a:t>
+            </a:r>
+            <a:r>
+              <a:rPr lang="en-US" sz="1100" b="0" i="0" u="none" strike="noStrike" cap="none" dirty="0">
+                <a:solidFill>
+                  <a:srgbClr val="000000"/>
+                </a:solidFill>
+                <a:effectLst/>
+                <a:latin typeface="Arial"/>
+                <a:ea typeface="Arial"/>
+                <a:cs typeface="Arial"/>
+                <a:sym typeface="Arial"/>
+              </a:rPr>
+              <a:t>[</a:t>
+            </a:r>
+            <a:r>
+              <a:rPr lang="en-US" sz="1100" b="0" i="0" u="none" strike="noStrike" cap="none" dirty="0" err="1">
+                <a:solidFill>
+                  <a:srgbClr val="000000"/>
+                </a:solidFill>
+                <a:effectLst/>
+                <a:latin typeface="Arial"/>
+                <a:ea typeface="Arial"/>
+                <a:cs typeface="Arial"/>
+                <a:sym typeface="Arial"/>
+              </a:rPr>
+              <a:t>which.max</a:t>
+            </a:r>
+            <a:r>
+              <a:rPr lang="en-US" sz="1100" b="0" i="0" u="none" strike="noStrike" cap="none" dirty="0">
+                <a:solidFill>
+                  <a:srgbClr val="000000"/>
+                </a:solidFill>
+                <a:effectLst/>
+                <a:latin typeface="Arial"/>
+                <a:ea typeface="Arial"/>
+                <a:cs typeface="Arial"/>
+                <a:sym typeface="Arial"/>
+              </a:rPr>
+              <a:t>(tabulate(match(x, </a:t>
+            </a:r>
+            <a:r>
+              <a:rPr lang="en-US" sz="1100" b="0" i="0" u="none" strike="noStrike" cap="none" dirty="0" err="1">
+                <a:solidFill>
+                  <a:srgbClr val="000000"/>
+                </a:solidFill>
+                <a:effectLst/>
+                <a:latin typeface="Arial"/>
+                <a:ea typeface="Arial"/>
+                <a:cs typeface="Arial"/>
+                <a:sym typeface="Arial"/>
+              </a:rPr>
+              <a:t>ux</a:t>
+            </a:r>
+            <a:r>
+              <a:rPr lang="en-US" sz="1100" b="0" i="0" u="none" strike="noStrike" cap="none" dirty="0">
+                <a:solidFill>
+                  <a:srgbClr val="000000"/>
+                </a:solidFill>
+                <a:effectLst/>
+                <a:latin typeface="Arial"/>
+                <a:ea typeface="Arial"/>
+                <a:cs typeface="Arial"/>
+                <a:sym typeface="Arial"/>
+              </a:rPr>
+              <a:t>)))]</a:t>
+            </a:r>
+          </a:p>
+          <a:p>
+            <a:pPr marL="158750" indent="0" fontAlgn="base">
+              <a:buNone/>
+            </a:pPr>
+            <a:r>
+              <a:rPr lang="en-US" sz="1100" b="0" i="0" u="none" strike="noStrike" cap="none" dirty="0">
+                <a:solidFill>
+                  <a:srgbClr val="000000"/>
+                </a:solidFill>
+                <a:effectLst/>
+                <a:latin typeface="Arial"/>
+                <a:ea typeface="Arial"/>
+                <a:cs typeface="Arial"/>
+                <a:sym typeface="Arial"/>
+              </a:rPr>
+              <a:t>}</a:t>
+            </a:r>
+          </a:p>
+          <a:p>
             <a:pPr marL="0" lvl="0" indent="0" algn="l" rtl="0">
               <a:spcBef>
                 <a:spcPts val="0"/>
@@ -2215,7 +2251,7 @@
               </a:spcAft>
               <a:buNone/>
             </a:pPr>
-            <a:endParaRPr/>
+            <a:endParaRPr dirty="0"/>
           </a:p>
         </p:txBody>
       </p:sp>
@@ -2231,8 +2267,8 @@
         </p:nvSpPr>
         <p:spPr>
           <a:xfrm>
-            <a:off x="1143225" y="685800"/>
-            <a:ext cx="4572225" cy="3429000"/>
+            <a:off x="381000" y="685800"/>
+            <a:ext cx="6096000" cy="3429000"/>
           </a:xfrm>
           <a:custGeom>
             <a:avLst/>
@@ -2335,8 +2371,8 @@
         </p:nvSpPr>
         <p:spPr>
           <a:xfrm>
-            <a:off x="1143225" y="685800"/>
-            <a:ext cx="4572225" cy="3429000"/>
+            <a:off x="381000" y="685800"/>
+            <a:ext cx="6096000" cy="3429000"/>
           </a:xfrm>
           <a:custGeom>
             <a:avLst/>
@@ -2377,7 +2413,7 @@
   <p:cSld>
     <p:spTree>
       <p:nvGrpSpPr>
-        <p:cNvPr id="1" name="Shape 131"/>
+        <p:cNvPr id="1" name="Shape 185"/>
         <p:cNvGrpSpPr/>
         <p:nvPr/>
       </p:nvGrpSpPr>
@@ -2391,7 +2427,7 @@
       </p:grpSpPr>
       <p:sp>
         <p:nvSpPr>
-          <p:cNvPr id="132" name="Google Shape;132;p7:notes"/>
+          <p:cNvPr id="186" name="Google Shape;186;p13:notes"/>
           <p:cNvSpPr txBox="1">
             <a:spLocks noGrp="1"/>
           </p:cNvSpPr>
@@ -2429,7 +2465,7 @@
       </p:sp>
       <p:sp>
         <p:nvSpPr>
-          <p:cNvPr id="133" name="Google Shape;133;p7:notes"/>
+          <p:cNvPr id="187" name="Google Shape;187;p13:notes"/>
           <p:cNvSpPr>
             <a:spLocks noGrp="1" noRot="1" noChangeAspect="1"/>
           </p:cNvSpPr>
@@ -2439,8 +2475,8 @@
         </p:nvSpPr>
         <p:spPr>
           <a:xfrm>
-            <a:off x="1143225" y="685800"/>
-            <a:ext cx="4572225" cy="3429000"/>
+            <a:off x="381000" y="685800"/>
+            <a:ext cx="6096000" cy="3429000"/>
           </a:xfrm>
           <a:custGeom>
             <a:avLst/>
@@ -2481,7 +2517,7 @@
   <p:cSld>
     <p:spTree>
       <p:nvGrpSpPr>
-        <p:cNvPr id="1" name="Shape 137"/>
+        <p:cNvPr id="1" name="Shape 131"/>
         <p:cNvGrpSpPr/>
         <p:nvPr/>
       </p:nvGrpSpPr>
@@ -2495,7 +2531,7 @@
       </p:grpSpPr>
       <p:sp>
         <p:nvSpPr>
-          <p:cNvPr id="138" name="Google Shape;138;p8:notes"/>
+          <p:cNvPr id="132" name="Google Shape;132;p7:notes"/>
           <p:cNvSpPr txBox="1">
             <a:spLocks noGrp="1"/>
           </p:cNvSpPr>
@@ -2533,7 +2569,7 @@
       </p:sp>
       <p:sp>
         <p:nvSpPr>
-          <p:cNvPr id="139" name="Google Shape;139;p8:notes"/>
+          <p:cNvPr id="133" name="Google Shape;133;p7:notes"/>
           <p:cNvSpPr>
             <a:spLocks noGrp="1" noRot="1" noChangeAspect="1"/>
           </p:cNvSpPr>
@@ -2543,8 +2579,8 @@
         </p:nvSpPr>
         <p:spPr>
           <a:xfrm>
-            <a:off x="1143225" y="685800"/>
-            <a:ext cx="4572225" cy="3429000"/>
+            <a:off x="381000" y="685800"/>
+            <a:ext cx="6096000" cy="3429000"/>
           </a:xfrm>
           <a:custGeom>
             <a:avLst/>
@@ -2585,7 +2621,7 @@
   <p:cSld>
     <p:spTree>
       <p:nvGrpSpPr>
-        <p:cNvPr id="1" name="Shape 151"/>
+        <p:cNvPr id="1" name="Shape 137"/>
         <p:cNvGrpSpPr/>
         <p:nvPr/>
       </p:nvGrpSpPr>
@@ -2599,7 +2635,7 @@
       </p:grpSpPr>
       <p:sp>
         <p:nvSpPr>
-          <p:cNvPr id="152" name="Google Shape;152;p9:notes"/>
+          <p:cNvPr id="138" name="Google Shape;138;p8:notes"/>
           <p:cNvSpPr txBox="1">
             <a:spLocks noGrp="1"/>
           </p:cNvSpPr>
@@ -2637,7 +2673,7 @@
       </p:sp>
       <p:sp>
         <p:nvSpPr>
-          <p:cNvPr id="153" name="Google Shape;153;p9:notes"/>
+          <p:cNvPr id="139" name="Google Shape;139;p8:notes"/>
           <p:cNvSpPr>
             <a:spLocks noGrp="1" noRot="1" noChangeAspect="1"/>
           </p:cNvSpPr>
@@ -2647,8 +2683,8 @@
         </p:nvSpPr>
         <p:spPr>
           <a:xfrm>
-            <a:off x="1143225" y="685800"/>
-            <a:ext cx="4572225" cy="3429000"/>
+            <a:off x="381000" y="685800"/>
+            <a:ext cx="6096000" cy="3429000"/>
           </a:xfrm>
           <a:custGeom>
             <a:avLst/>
@@ -13070,6 +13106,1053 @@
   <p:cSld>
     <p:spTree>
       <p:nvGrpSpPr>
+        <p:cNvPr id="1" name="Shape 140"/>
+        <p:cNvGrpSpPr/>
+        <p:nvPr/>
+      </p:nvGrpSpPr>
+      <p:grpSpPr>
+        <a:xfrm>
+          <a:off x="0" y="0"/>
+          <a:ext cx="0" cy="0"/>
+          <a:chOff x="0" y="0"/>
+          <a:chExt cx="0" cy="0"/>
+        </a:xfrm>
+      </p:grpSpPr>
+      <p:pic>
+        <p:nvPicPr>
+          <p:cNvPr id="141" name="Google Shape;141;p8" descr="A map of the state with different colored dots  Description automatically generated"/>
+          <p:cNvPicPr preferRelativeResize="0"/>
+          <p:nvPr/>
+        </p:nvPicPr>
+        <p:blipFill rotWithShape="1">
+          <a:blip r:embed="rId3">
+            <a:alphaModFix/>
+          </a:blip>
+          <a:srcRect/>
+          <a:stretch/>
+        </p:blipFill>
+        <p:spPr>
+          <a:xfrm>
+            <a:off x="0" y="591385"/>
+            <a:ext cx="4254500" cy="4216400"/>
+          </a:xfrm>
+          <a:prstGeom prst="rect">
+            <a:avLst/>
+          </a:prstGeom>
+          <a:noFill/>
+          <a:ln>
+            <a:noFill/>
+          </a:ln>
+        </p:spPr>
+      </p:pic>
+      <p:sp>
+        <p:nvSpPr>
+          <p:cNvPr id="142" name="Google Shape;142;p8"/>
+          <p:cNvSpPr/>
+          <p:nvPr/>
+        </p:nvSpPr>
+        <p:spPr>
+          <a:xfrm>
+            <a:off x="4617244" y="1713747"/>
+            <a:ext cx="2957512" cy="985838"/>
+          </a:xfrm>
+          <a:prstGeom prst="rightArrow">
+            <a:avLst>
+              <a:gd name="adj1" fmla="val 50000"/>
+              <a:gd name="adj2" fmla="val 50000"/>
+            </a:avLst>
+          </a:prstGeom>
+          <a:solidFill>
+            <a:schemeClr val="accent1"/>
+          </a:solidFill>
+          <a:ln w="12700" cap="flat" cmpd="sng">
+            <a:solidFill>
+              <a:srgbClr val="1C3052"/>
+            </a:solidFill>
+            <a:prstDash val="solid"/>
+            <a:miter lim="800000"/>
+            <a:headEnd type="none" w="sm" len="sm"/>
+            <a:tailEnd type="none" w="sm" len="sm"/>
+          </a:ln>
+        </p:spPr>
+        <p:txBody>
+          <a:bodyPr spcFirstLastPara="1" wrap="square" lIns="91425" tIns="45700" rIns="91425" bIns="45700" anchor="ctr" anchorCtr="0">
+            <a:noAutofit/>
+          </a:bodyPr>
+          <a:lstStyle/>
+          <a:p>
+            <a:pPr marL="0" marR="0" lvl="0" indent="0" algn="ctr" rtl="0">
+              <a:spcBef>
+                <a:spcPts val="0"/>
+              </a:spcBef>
+              <a:spcAft>
+                <a:spcPts val="0"/>
+              </a:spcAft>
+              <a:buNone/>
+            </a:pPr>
+            <a:endParaRPr sz="1800">
+              <a:solidFill>
+                <a:schemeClr val="lt1"/>
+              </a:solidFill>
+              <a:latin typeface="Calibri"/>
+              <a:ea typeface="Calibri"/>
+              <a:cs typeface="Calibri"/>
+              <a:sym typeface="Calibri"/>
+            </a:endParaRPr>
+          </a:p>
+        </p:txBody>
+      </p:sp>
+      <p:pic>
+        <p:nvPicPr>
+          <p:cNvPr id="143" name="Google Shape;143;p8" descr="A graph of a spider web  Description automatically generated with medium confidence"/>
+          <p:cNvPicPr preferRelativeResize="0"/>
+          <p:nvPr/>
+        </p:nvPicPr>
+        <p:blipFill rotWithShape="1">
+          <a:blip r:embed="rId4">
+            <a:alphaModFix/>
+          </a:blip>
+          <a:srcRect/>
+          <a:stretch/>
+        </p:blipFill>
+        <p:spPr>
+          <a:xfrm>
+            <a:off x="4816016" y="2858253"/>
+            <a:ext cx="2298700" cy="2286000"/>
+          </a:xfrm>
+          <a:prstGeom prst="rect">
+            <a:avLst/>
+          </a:prstGeom>
+          <a:noFill/>
+          <a:ln>
+            <a:noFill/>
+          </a:ln>
+        </p:spPr>
+      </p:pic>
+      <p:pic>
+        <p:nvPicPr>
+          <p:cNvPr id="144" name="Google Shape;144;p8" descr="A map of the state of california  Description automatically generated"/>
+          <p:cNvPicPr preferRelativeResize="0"/>
+          <p:nvPr/>
+        </p:nvPicPr>
+        <p:blipFill rotWithShape="1">
+          <a:blip r:embed="rId5">
+            <a:alphaModFix/>
+          </a:blip>
+          <a:srcRect/>
+          <a:stretch/>
+        </p:blipFill>
+        <p:spPr>
+          <a:xfrm>
+            <a:off x="8412998" y="285371"/>
+            <a:ext cx="2872623" cy="2856752"/>
+          </a:xfrm>
+          <a:prstGeom prst="rect">
+            <a:avLst/>
+          </a:prstGeom>
+          <a:noFill/>
+          <a:ln>
+            <a:noFill/>
+          </a:ln>
+        </p:spPr>
+      </p:pic>
+      <p:sp>
+        <p:nvSpPr>
+          <p:cNvPr id="145" name="Google Shape;145;p8"/>
+          <p:cNvSpPr/>
+          <p:nvPr/>
+        </p:nvSpPr>
+        <p:spPr>
+          <a:xfrm>
+            <a:off x="9577135" y="3259618"/>
+            <a:ext cx="541421" cy="782053"/>
+          </a:xfrm>
+          <a:prstGeom prst="downArrow">
+            <a:avLst>
+              <a:gd name="adj1" fmla="val 50000"/>
+              <a:gd name="adj2" fmla="val 50000"/>
+            </a:avLst>
+          </a:prstGeom>
+          <a:solidFill>
+            <a:schemeClr val="accent1"/>
+          </a:solidFill>
+          <a:ln w="12700" cap="flat" cmpd="sng">
+            <a:solidFill>
+              <a:srgbClr val="1C3052"/>
+            </a:solidFill>
+            <a:prstDash val="solid"/>
+            <a:miter lim="800000"/>
+            <a:headEnd type="none" w="sm" len="sm"/>
+            <a:tailEnd type="none" w="sm" len="sm"/>
+          </a:ln>
+        </p:spPr>
+        <p:txBody>
+          <a:bodyPr spcFirstLastPara="1" wrap="square" lIns="91425" tIns="45700" rIns="91425" bIns="45700" anchor="ctr" anchorCtr="0">
+            <a:noAutofit/>
+          </a:bodyPr>
+          <a:lstStyle/>
+          <a:p>
+            <a:pPr marL="0" marR="0" lvl="0" indent="0" algn="ctr" rtl="0">
+              <a:spcBef>
+                <a:spcPts val="0"/>
+              </a:spcBef>
+              <a:spcAft>
+                <a:spcPts val="0"/>
+              </a:spcAft>
+              <a:buNone/>
+            </a:pPr>
+            <a:endParaRPr sz="1800">
+              <a:solidFill>
+                <a:schemeClr val="lt1"/>
+              </a:solidFill>
+              <a:latin typeface="Calibri"/>
+              <a:ea typeface="Calibri"/>
+              <a:cs typeface="Calibri"/>
+              <a:sym typeface="Calibri"/>
+            </a:endParaRPr>
+          </a:p>
+        </p:txBody>
+      </p:sp>
+      <p:pic>
+        <p:nvPicPr>
+          <p:cNvPr id="146" name="Google Shape;146;p8" descr="A map of the california state  Description automatically generated"/>
+          <p:cNvPicPr preferRelativeResize="0"/>
+          <p:nvPr/>
+        </p:nvPicPr>
+        <p:blipFill rotWithShape="1">
+          <a:blip r:embed="rId6">
+            <a:alphaModFix/>
+          </a:blip>
+          <a:srcRect/>
+          <a:stretch/>
+        </p:blipFill>
+        <p:spPr>
+          <a:xfrm>
+            <a:off x="8480723" y="4041671"/>
+            <a:ext cx="2734243" cy="2719137"/>
+          </a:xfrm>
+          <a:prstGeom prst="rect">
+            <a:avLst/>
+          </a:prstGeom>
+          <a:noFill/>
+          <a:ln>
+            <a:noFill/>
+          </a:ln>
+        </p:spPr>
+      </p:pic>
+      <p:sp>
+        <p:nvSpPr>
+          <p:cNvPr id="147" name="Google Shape;147;p8"/>
+          <p:cNvSpPr txBox="1"/>
+          <p:nvPr/>
+        </p:nvSpPr>
+        <p:spPr>
+          <a:xfrm>
+            <a:off x="4847264" y="664917"/>
+            <a:ext cx="2497472" cy="646331"/>
+          </a:xfrm>
+          <a:prstGeom prst="rect">
+            <a:avLst/>
+          </a:prstGeom>
+          <a:noFill/>
+          <a:ln>
+            <a:noFill/>
+          </a:ln>
+        </p:spPr>
+        <p:txBody>
+          <a:bodyPr spcFirstLastPara="1" wrap="square" lIns="91425" tIns="45700" rIns="91425" bIns="45700" anchor="t" anchorCtr="0">
+            <a:spAutoFit/>
+          </a:bodyPr>
+          <a:lstStyle/>
+          <a:p>
+            <a:pPr marL="0" marR="0" lvl="0" indent="0" algn="l" rtl="0">
+              <a:spcBef>
+                <a:spcPts val="0"/>
+              </a:spcBef>
+              <a:spcAft>
+                <a:spcPts val="0"/>
+              </a:spcAft>
+              <a:buNone/>
+            </a:pPr>
+            <a:r>
+              <a:rPr lang="en-US" sz="3600">
+                <a:solidFill>
+                  <a:schemeClr val="dk1"/>
+                </a:solidFill>
+                <a:latin typeface="Calibri"/>
+                <a:ea typeface="Calibri"/>
+                <a:cs typeface="Calibri"/>
+                <a:sym typeface="Calibri"/>
+              </a:rPr>
+              <a:t>Interpolate!</a:t>
+            </a:r>
+            <a:endParaRPr/>
+          </a:p>
+        </p:txBody>
+      </p:sp>
+      <p:sp>
+        <p:nvSpPr>
+          <p:cNvPr id="148" name="Google Shape;148;p8"/>
+          <p:cNvSpPr txBox="1"/>
+          <p:nvPr/>
+        </p:nvSpPr>
+        <p:spPr>
+          <a:xfrm>
+            <a:off x="10335126" y="3429000"/>
+            <a:ext cx="1118937" cy="523220"/>
+          </a:xfrm>
+          <a:prstGeom prst="rect">
+            <a:avLst/>
+          </a:prstGeom>
+          <a:noFill/>
+          <a:ln>
+            <a:noFill/>
+          </a:ln>
+        </p:spPr>
+        <p:txBody>
+          <a:bodyPr spcFirstLastPara="1" wrap="square" lIns="91425" tIns="45700" rIns="91425" bIns="45700" anchor="t" anchorCtr="0">
+            <a:spAutoFit/>
+          </a:bodyPr>
+          <a:lstStyle/>
+          <a:p>
+            <a:pPr marL="0" marR="0" lvl="0" indent="0" algn="l" rtl="0">
+              <a:spcBef>
+                <a:spcPts val="0"/>
+              </a:spcBef>
+              <a:spcAft>
+                <a:spcPts val="0"/>
+              </a:spcAft>
+              <a:buNone/>
+            </a:pPr>
+            <a:r>
+              <a:rPr lang="en-US" sz="2800">
+                <a:solidFill>
+                  <a:schemeClr val="dk1"/>
+                </a:solidFill>
+                <a:latin typeface="Calibri"/>
+                <a:ea typeface="Calibri"/>
+                <a:cs typeface="Calibri"/>
+                <a:sym typeface="Calibri"/>
+              </a:rPr>
+              <a:t>Raster</a:t>
+            </a:r>
+            <a:endParaRPr/>
+          </a:p>
+        </p:txBody>
+      </p:sp>
+      <p:sp>
+        <p:nvSpPr>
+          <p:cNvPr id="149" name="Google Shape;149;p8"/>
+          <p:cNvSpPr txBox="1"/>
+          <p:nvPr/>
+        </p:nvSpPr>
+        <p:spPr>
+          <a:xfrm>
+            <a:off x="374573" y="5468785"/>
+            <a:ext cx="7343783" cy="1200288"/>
+          </a:xfrm>
+          <a:prstGeom prst="rect">
+            <a:avLst/>
+          </a:prstGeom>
+          <a:noFill/>
+          <a:ln>
+            <a:noFill/>
+          </a:ln>
+        </p:spPr>
+        <p:txBody>
+          <a:bodyPr spcFirstLastPara="1" wrap="square" lIns="91425" tIns="45700" rIns="91425" bIns="45700" anchor="t" anchorCtr="0">
+            <a:spAutoFit/>
+          </a:bodyPr>
+          <a:lstStyle/>
+          <a:p>
+            <a:pPr marL="0" marR="0" lvl="0" indent="0" algn="l" rtl="0">
+              <a:spcBef>
+                <a:spcPts val="0"/>
+              </a:spcBef>
+              <a:spcAft>
+                <a:spcPts val="0"/>
+              </a:spcAft>
+              <a:buNone/>
+            </a:pPr>
+            <a:r>
+              <a:rPr lang="en-US" sz="3600" b="1" dirty="0">
+                <a:solidFill>
+                  <a:schemeClr val="accent2"/>
+                </a:solidFill>
+                <a:latin typeface="Calibri"/>
+                <a:ea typeface="Calibri"/>
+                <a:cs typeface="Calibri"/>
+                <a:sym typeface="Calibri"/>
+              </a:rPr>
+              <a:t>Example: Spatial Data Science – </a:t>
+            </a:r>
+          </a:p>
+          <a:p>
+            <a:pPr marL="0" marR="0" lvl="0" indent="0" algn="l" rtl="0">
+              <a:spcBef>
+                <a:spcPts val="0"/>
+              </a:spcBef>
+              <a:spcAft>
+                <a:spcPts val="0"/>
+              </a:spcAft>
+              <a:buNone/>
+            </a:pPr>
+            <a:r>
+              <a:rPr lang="en-US" sz="3600" b="1" dirty="0">
+                <a:solidFill>
+                  <a:schemeClr val="accent2"/>
+                </a:solidFill>
+                <a:latin typeface="Calibri"/>
+                <a:ea typeface="Calibri"/>
+                <a:cs typeface="Calibri"/>
+                <a:sym typeface="Calibri"/>
+              </a:rPr>
+              <a:t>Plotting California </a:t>
+            </a:r>
+            <a:r>
+              <a:rPr lang="en-US" sz="3600" b="1" dirty="0" err="1">
+                <a:solidFill>
+                  <a:schemeClr val="accent2"/>
+                </a:solidFill>
+                <a:latin typeface="Calibri"/>
+                <a:ea typeface="Calibri"/>
+                <a:cs typeface="Calibri"/>
+                <a:sym typeface="Calibri"/>
+              </a:rPr>
+              <a:t>Drecipitation</a:t>
+            </a:r>
+            <a:r>
+              <a:rPr lang="en-US" sz="3600" b="1" dirty="0">
+                <a:solidFill>
+                  <a:schemeClr val="accent2"/>
+                </a:solidFill>
+                <a:latin typeface="Calibri"/>
+                <a:ea typeface="Calibri"/>
+                <a:cs typeface="Calibri"/>
+                <a:sym typeface="Calibri"/>
+              </a:rPr>
+              <a:t> data</a:t>
+            </a:r>
+            <a:endParaRPr dirty="0"/>
+          </a:p>
+        </p:txBody>
+      </p:sp>
+      <p:sp>
+        <p:nvSpPr>
+          <p:cNvPr id="150" name="Google Shape;150;p8"/>
+          <p:cNvSpPr txBox="1"/>
+          <p:nvPr/>
+        </p:nvSpPr>
+        <p:spPr>
+          <a:xfrm>
+            <a:off x="168442" y="0"/>
+            <a:ext cx="3272590" cy="369332"/>
+          </a:xfrm>
+          <a:prstGeom prst="rect">
+            <a:avLst/>
+          </a:prstGeom>
+          <a:noFill/>
+          <a:ln>
+            <a:noFill/>
+          </a:ln>
+        </p:spPr>
+        <p:txBody>
+          <a:bodyPr spcFirstLastPara="1" wrap="square" lIns="91425" tIns="45700" rIns="91425" bIns="45700" anchor="t" anchorCtr="0">
+            <a:spAutoFit/>
+          </a:bodyPr>
+          <a:lstStyle/>
+          <a:p>
+            <a:pPr marL="0" marR="0" lvl="0" indent="0" algn="l" rtl="0">
+              <a:spcBef>
+                <a:spcPts val="0"/>
+              </a:spcBef>
+              <a:spcAft>
+                <a:spcPts val="0"/>
+              </a:spcAft>
+              <a:buNone/>
+            </a:pPr>
+            <a:r>
+              <a:rPr lang="en-US" sz="1800">
+                <a:solidFill>
+                  <a:schemeClr val="dk1"/>
+                </a:solidFill>
+                <a:latin typeface="Calibri"/>
+                <a:ea typeface="Calibri"/>
+                <a:cs typeface="Calibri"/>
+                <a:sym typeface="Calibri"/>
+              </a:rPr>
+              <a:t>https://rspatial.org/index.html</a:t>
+            </a:r>
+            <a:endParaRPr sz="1800">
+              <a:solidFill>
+                <a:schemeClr val="dk1"/>
+              </a:solidFill>
+              <a:latin typeface="Calibri"/>
+              <a:ea typeface="Calibri"/>
+              <a:cs typeface="Calibri"/>
+              <a:sym typeface="Calibri"/>
+            </a:endParaRPr>
+          </a:p>
+        </p:txBody>
+      </p:sp>
+    </p:spTree>
+  </p:cSld>
+  <p:clrMapOvr>
+    <a:masterClrMapping/>
+  </p:clrMapOvr>
+</p:sld>
+</file>
+
+<file path=ppt/slides/slide11.xml><?xml version="1.0" encoding="utf-8"?>
+<p:sld xmlns:a="http://schemas.openxmlformats.org/drawingml/2006/main" xmlns:r="http://schemas.openxmlformats.org/officeDocument/2006/relationships" xmlns:p="http://schemas.openxmlformats.org/presentationml/2006/main">
+  <p:cSld>
+    <p:spTree>
+      <p:nvGrpSpPr>
+        <p:cNvPr id="1" name="Shape 154"/>
+        <p:cNvGrpSpPr/>
+        <p:nvPr/>
+      </p:nvGrpSpPr>
+      <p:grpSpPr>
+        <a:xfrm>
+          <a:off x="0" y="0"/>
+          <a:ext cx="0" cy="0"/>
+          <a:chOff x="0" y="0"/>
+          <a:chExt cx="0" cy="0"/>
+        </a:xfrm>
+      </p:grpSpPr>
+      <p:pic>
+        <p:nvPicPr>
+          <p:cNvPr id="155" name="Google Shape;155;p9" descr="A map of the world  Description automatically generated"/>
+          <p:cNvPicPr preferRelativeResize="0"/>
+          <p:nvPr/>
+        </p:nvPicPr>
+        <p:blipFill rotWithShape="1">
+          <a:blip r:embed="rId3">
+            <a:alphaModFix/>
+          </a:blip>
+          <a:srcRect/>
+          <a:stretch/>
+        </p:blipFill>
+        <p:spPr>
+          <a:xfrm>
+            <a:off x="111126" y="1725723"/>
+            <a:ext cx="3425479" cy="3406554"/>
+          </a:xfrm>
+          <a:prstGeom prst="rect">
+            <a:avLst/>
+          </a:prstGeom>
+          <a:noFill/>
+          <a:ln>
+            <a:noFill/>
+          </a:ln>
+        </p:spPr>
+      </p:pic>
+      <p:pic>
+        <p:nvPicPr>
+          <p:cNvPr id="156" name="Google Shape;156;p9" descr="A map of the south and south america  Description automatically generated"/>
+          <p:cNvPicPr preferRelativeResize="0"/>
+          <p:nvPr/>
+        </p:nvPicPr>
+        <p:blipFill rotWithShape="1">
+          <a:blip r:embed="rId4">
+            <a:alphaModFix/>
+          </a:blip>
+          <a:srcRect/>
+          <a:stretch/>
+        </p:blipFill>
+        <p:spPr>
+          <a:xfrm>
+            <a:off x="4383260" y="1725723"/>
+            <a:ext cx="3425479" cy="3406554"/>
+          </a:xfrm>
+          <a:prstGeom prst="rect">
+            <a:avLst/>
+          </a:prstGeom>
+          <a:noFill/>
+          <a:ln>
+            <a:noFill/>
+          </a:ln>
+        </p:spPr>
+      </p:pic>
+      <p:sp>
+        <p:nvSpPr>
+          <p:cNvPr id="157" name="Google Shape;157;p9"/>
+          <p:cNvSpPr txBox="1"/>
+          <p:nvPr/>
+        </p:nvSpPr>
+        <p:spPr>
+          <a:xfrm>
+            <a:off x="639506" y="5829301"/>
+            <a:ext cx="2368717" cy="369332"/>
+          </a:xfrm>
+          <a:prstGeom prst="rect">
+            <a:avLst/>
+          </a:prstGeom>
+          <a:noFill/>
+          <a:ln>
+            <a:noFill/>
+          </a:ln>
+        </p:spPr>
+        <p:txBody>
+          <a:bodyPr spcFirstLastPara="1" wrap="square" lIns="91425" tIns="45700" rIns="91425" bIns="45700" anchor="t" anchorCtr="0">
+            <a:spAutoFit/>
+          </a:bodyPr>
+          <a:lstStyle/>
+          <a:p>
+            <a:pPr marL="0" marR="0" lvl="0" indent="0" algn="ctr" rtl="0">
+              <a:spcBef>
+                <a:spcPts val="0"/>
+              </a:spcBef>
+              <a:spcAft>
+                <a:spcPts val="0"/>
+              </a:spcAft>
+              <a:buNone/>
+            </a:pPr>
+            <a:r>
+              <a:rPr lang="en-US" sz="1800">
+                <a:solidFill>
+                  <a:schemeClr val="dk1"/>
+                </a:solidFill>
+                <a:latin typeface="Calibri"/>
+                <a:ea typeface="Calibri"/>
+                <a:cs typeface="Calibri"/>
+                <a:sym typeface="Calibri"/>
+              </a:rPr>
+              <a:t>Wild potatoes!</a:t>
+            </a:r>
+            <a:endParaRPr/>
+          </a:p>
+        </p:txBody>
+      </p:sp>
+      <p:sp>
+        <p:nvSpPr>
+          <p:cNvPr id="158" name="Google Shape;158;p9"/>
+          <p:cNvSpPr txBox="1"/>
+          <p:nvPr/>
+        </p:nvSpPr>
+        <p:spPr>
+          <a:xfrm>
+            <a:off x="4383260" y="5829301"/>
+            <a:ext cx="2828925" cy="369291"/>
+          </a:xfrm>
+          <a:prstGeom prst="rect">
+            <a:avLst/>
+          </a:prstGeom>
+          <a:noFill/>
+          <a:ln>
+            <a:noFill/>
+          </a:ln>
+        </p:spPr>
+        <p:txBody>
+          <a:bodyPr spcFirstLastPara="1" wrap="square" lIns="91425" tIns="45700" rIns="91425" bIns="45700" anchor="t" anchorCtr="0">
+            <a:spAutoFit/>
+          </a:bodyPr>
+          <a:lstStyle/>
+          <a:p>
+            <a:pPr marL="0" marR="0" lvl="0" indent="0" algn="ctr" rtl="0">
+              <a:spcBef>
+                <a:spcPts val="0"/>
+              </a:spcBef>
+              <a:spcAft>
+                <a:spcPts val="0"/>
+              </a:spcAft>
+              <a:buNone/>
+            </a:pPr>
+            <a:r>
+              <a:rPr lang="en-US" sz="1800" dirty="0">
+                <a:solidFill>
+                  <a:schemeClr val="dk1"/>
+                </a:solidFill>
+                <a:latin typeface="Calibri"/>
+                <a:ea typeface="Calibri"/>
+                <a:cs typeface="Calibri"/>
+                <a:sym typeface="Calibri"/>
+              </a:rPr>
+              <a:t>Species richness by country</a:t>
+            </a:r>
+            <a:endParaRPr dirty="0"/>
+          </a:p>
+        </p:txBody>
+      </p:sp>
+      <p:sp>
+        <p:nvSpPr>
+          <p:cNvPr id="159" name="Google Shape;159;p9"/>
+          <p:cNvSpPr txBox="1"/>
+          <p:nvPr/>
+        </p:nvSpPr>
+        <p:spPr>
+          <a:xfrm>
+            <a:off x="9038642" y="5829301"/>
+            <a:ext cx="2658979" cy="369332"/>
+          </a:xfrm>
+          <a:prstGeom prst="rect">
+            <a:avLst/>
+          </a:prstGeom>
+          <a:noFill/>
+          <a:ln>
+            <a:noFill/>
+          </a:ln>
+        </p:spPr>
+        <p:txBody>
+          <a:bodyPr spcFirstLastPara="1" wrap="square" lIns="91425" tIns="45700" rIns="91425" bIns="45700" anchor="t" anchorCtr="0">
+            <a:spAutoFit/>
+          </a:bodyPr>
+          <a:lstStyle/>
+          <a:p>
+            <a:pPr marL="0" marR="0" lvl="0" indent="0" algn="l" rtl="0">
+              <a:spcBef>
+                <a:spcPts val="0"/>
+              </a:spcBef>
+              <a:spcAft>
+                <a:spcPts val="0"/>
+              </a:spcAft>
+              <a:buNone/>
+            </a:pPr>
+            <a:r>
+              <a:rPr lang="en-US" sz="1800" dirty="0">
+                <a:solidFill>
+                  <a:schemeClr val="dk1"/>
+                </a:solidFill>
+                <a:latin typeface="Calibri"/>
+                <a:ea typeface="Calibri"/>
+                <a:cs typeface="Calibri"/>
+                <a:sym typeface="Calibri"/>
+              </a:rPr>
+              <a:t>Species richness in raster</a:t>
+            </a:r>
+            <a:endParaRPr dirty="0"/>
+          </a:p>
+        </p:txBody>
+      </p:sp>
+      <p:sp>
+        <p:nvSpPr>
+          <p:cNvPr id="160" name="Google Shape;160;p9"/>
+          <p:cNvSpPr/>
+          <p:nvPr/>
+        </p:nvSpPr>
+        <p:spPr>
+          <a:xfrm>
+            <a:off x="3536605" y="3200400"/>
+            <a:ext cx="846655" cy="589547"/>
+          </a:xfrm>
+          <a:prstGeom prst="rightArrow">
+            <a:avLst>
+              <a:gd name="adj1" fmla="val 50000"/>
+              <a:gd name="adj2" fmla="val 50000"/>
+            </a:avLst>
+          </a:prstGeom>
+          <a:solidFill>
+            <a:schemeClr val="accent1"/>
+          </a:solidFill>
+          <a:ln w="12700" cap="flat" cmpd="sng">
+            <a:solidFill>
+              <a:srgbClr val="1C3052"/>
+            </a:solidFill>
+            <a:prstDash val="solid"/>
+            <a:miter lim="800000"/>
+            <a:headEnd type="none" w="sm" len="sm"/>
+            <a:tailEnd type="none" w="sm" len="sm"/>
+          </a:ln>
+        </p:spPr>
+        <p:txBody>
+          <a:bodyPr spcFirstLastPara="1" wrap="square" lIns="91425" tIns="45700" rIns="91425" bIns="45700" anchor="ctr" anchorCtr="0">
+            <a:noAutofit/>
+          </a:bodyPr>
+          <a:lstStyle/>
+          <a:p>
+            <a:pPr marL="0" marR="0" lvl="0" indent="0" algn="ctr" rtl="0">
+              <a:spcBef>
+                <a:spcPts val="0"/>
+              </a:spcBef>
+              <a:spcAft>
+                <a:spcPts val="0"/>
+              </a:spcAft>
+              <a:buNone/>
+            </a:pPr>
+            <a:endParaRPr sz="1800">
+              <a:solidFill>
+                <a:schemeClr val="lt1"/>
+              </a:solidFill>
+              <a:latin typeface="Calibri"/>
+              <a:ea typeface="Calibri"/>
+              <a:cs typeface="Calibri"/>
+              <a:sym typeface="Calibri"/>
+            </a:endParaRPr>
+          </a:p>
+        </p:txBody>
+      </p:sp>
+      <p:sp>
+        <p:nvSpPr>
+          <p:cNvPr id="161" name="Google Shape;161;p9"/>
+          <p:cNvSpPr/>
+          <p:nvPr/>
+        </p:nvSpPr>
+        <p:spPr>
+          <a:xfrm>
+            <a:off x="7808739" y="3116179"/>
+            <a:ext cx="846656" cy="673768"/>
+          </a:xfrm>
+          <a:prstGeom prst="rightArrow">
+            <a:avLst>
+              <a:gd name="adj1" fmla="val 50000"/>
+              <a:gd name="adj2" fmla="val 50000"/>
+            </a:avLst>
+          </a:prstGeom>
+          <a:solidFill>
+            <a:schemeClr val="accent1"/>
+          </a:solidFill>
+          <a:ln w="12700" cap="flat" cmpd="sng">
+            <a:solidFill>
+              <a:srgbClr val="1C3052"/>
+            </a:solidFill>
+            <a:prstDash val="solid"/>
+            <a:miter lim="800000"/>
+            <a:headEnd type="none" w="sm" len="sm"/>
+            <a:tailEnd type="none" w="sm" len="sm"/>
+          </a:ln>
+        </p:spPr>
+        <p:txBody>
+          <a:bodyPr spcFirstLastPara="1" wrap="square" lIns="91425" tIns="45700" rIns="91425" bIns="45700" anchor="ctr" anchorCtr="0">
+            <a:noAutofit/>
+          </a:bodyPr>
+          <a:lstStyle/>
+          <a:p>
+            <a:pPr marL="0" marR="0" lvl="0" indent="0" algn="ctr" rtl="0">
+              <a:spcBef>
+                <a:spcPts val="0"/>
+              </a:spcBef>
+              <a:spcAft>
+                <a:spcPts val="0"/>
+              </a:spcAft>
+              <a:buNone/>
+            </a:pPr>
+            <a:endParaRPr sz="1800">
+              <a:solidFill>
+                <a:schemeClr val="lt1"/>
+              </a:solidFill>
+              <a:latin typeface="Calibri"/>
+              <a:ea typeface="Calibri"/>
+              <a:cs typeface="Calibri"/>
+              <a:sym typeface="Calibri"/>
+            </a:endParaRPr>
+          </a:p>
+        </p:txBody>
+      </p:sp>
+      <p:sp>
+        <p:nvSpPr>
+          <p:cNvPr id="162" name="Google Shape;162;p9"/>
+          <p:cNvSpPr txBox="1"/>
+          <p:nvPr/>
+        </p:nvSpPr>
+        <p:spPr>
+          <a:xfrm>
+            <a:off x="411480" y="240632"/>
+            <a:ext cx="9839425" cy="1077178"/>
+          </a:xfrm>
+          <a:prstGeom prst="rect">
+            <a:avLst/>
+          </a:prstGeom>
+          <a:noFill/>
+          <a:ln>
+            <a:noFill/>
+          </a:ln>
+        </p:spPr>
+        <p:txBody>
+          <a:bodyPr spcFirstLastPara="1" wrap="square" lIns="91425" tIns="45700" rIns="91425" bIns="45700" anchor="t" anchorCtr="0">
+            <a:spAutoFit/>
+          </a:bodyPr>
+          <a:lstStyle/>
+          <a:p>
+            <a:pPr marL="0" marR="0" lvl="0" indent="0" algn="l" rtl="0">
+              <a:spcBef>
+                <a:spcPts val="0"/>
+              </a:spcBef>
+              <a:spcAft>
+                <a:spcPts val="0"/>
+              </a:spcAft>
+              <a:buNone/>
+            </a:pPr>
+            <a:r>
+              <a:rPr lang="en-US" sz="3200" dirty="0">
+                <a:solidFill>
+                  <a:schemeClr val="dk1"/>
+                </a:solidFill>
+                <a:latin typeface="Calibri"/>
+                <a:ea typeface="Calibri"/>
+                <a:cs typeface="Calibri"/>
+                <a:sym typeface="Calibri"/>
+              </a:rPr>
+              <a:t>Example: Plot the number of species (species richness) of wild potato across the Americas</a:t>
+            </a:r>
+          </a:p>
+        </p:txBody>
+      </p:sp>
+      <p:sp>
+        <p:nvSpPr>
+          <p:cNvPr id="163" name="Google Shape;163;p9"/>
+          <p:cNvSpPr txBox="1"/>
+          <p:nvPr/>
+        </p:nvSpPr>
+        <p:spPr>
+          <a:xfrm>
+            <a:off x="8655395" y="6488668"/>
+            <a:ext cx="3425479" cy="369332"/>
+          </a:xfrm>
+          <a:prstGeom prst="rect">
+            <a:avLst/>
+          </a:prstGeom>
+          <a:noFill/>
+          <a:ln>
+            <a:noFill/>
+          </a:ln>
+        </p:spPr>
+        <p:txBody>
+          <a:bodyPr spcFirstLastPara="1" wrap="square" lIns="91425" tIns="45700" rIns="91425" bIns="45700" anchor="t" anchorCtr="0">
+            <a:spAutoFit/>
+          </a:bodyPr>
+          <a:lstStyle/>
+          <a:p>
+            <a:pPr marL="0" marR="0" lvl="0" indent="0" algn="l" rtl="0">
+              <a:spcBef>
+                <a:spcPts val="0"/>
+              </a:spcBef>
+              <a:spcAft>
+                <a:spcPts val="0"/>
+              </a:spcAft>
+              <a:buNone/>
+            </a:pPr>
+            <a:r>
+              <a:rPr lang="en-US" sz="1800">
+                <a:solidFill>
+                  <a:schemeClr val="dk1"/>
+                </a:solidFill>
+                <a:latin typeface="Calibri"/>
+                <a:ea typeface="Calibri"/>
+                <a:cs typeface="Calibri"/>
+                <a:sym typeface="Calibri"/>
+              </a:rPr>
+              <a:t>https://rspatial.org/index.html</a:t>
+            </a:r>
+            <a:endParaRPr sz="1800">
+              <a:solidFill>
+                <a:schemeClr val="dk1"/>
+              </a:solidFill>
+              <a:latin typeface="Calibri"/>
+              <a:ea typeface="Calibri"/>
+              <a:cs typeface="Calibri"/>
+              <a:sym typeface="Calibri"/>
+            </a:endParaRPr>
+          </a:p>
+        </p:txBody>
+      </p:sp>
+      <p:pic>
+        <p:nvPicPr>
+          <p:cNvPr id="164" name="Google Shape;164;p9" descr="A map of the world  Description automatically generated"/>
+          <p:cNvPicPr preferRelativeResize="0"/>
+          <p:nvPr/>
+        </p:nvPicPr>
+        <p:blipFill rotWithShape="1">
+          <a:blip r:embed="rId5">
+            <a:alphaModFix/>
+          </a:blip>
+          <a:srcRect/>
+          <a:stretch/>
+        </p:blipFill>
+        <p:spPr>
+          <a:xfrm>
+            <a:off x="8655393" y="1725723"/>
+            <a:ext cx="3425479" cy="3406554"/>
+          </a:xfrm>
+          <a:prstGeom prst="rect">
+            <a:avLst/>
+          </a:prstGeom>
+          <a:noFill/>
+          <a:ln>
+            <a:noFill/>
+          </a:ln>
+        </p:spPr>
+      </p:pic>
+      <p:sp>
+        <p:nvSpPr>
+          <p:cNvPr id="2" name="TextBox 1">
+            <a:extLst>
+              <a:ext uri="{FF2B5EF4-FFF2-40B4-BE49-F238E27FC236}">
+                <a16:creationId xmlns:a16="http://schemas.microsoft.com/office/drawing/2014/main" id="{1DD69EFB-385B-A354-EFC9-E8F93A745D26}"/>
+              </a:ext>
+            </a:extLst>
+          </p:cNvPr>
+          <p:cNvSpPr txBox="1"/>
+          <p:nvPr/>
+        </p:nvSpPr>
+        <p:spPr>
+          <a:xfrm>
+            <a:off x="502920" y="1485900"/>
+            <a:ext cx="7766870" cy="307777"/>
+          </a:xfrm>
+          <a:prstGeom prst="rect">
+            <a:avLst/>
+          </a:prstGeom>
+          <a:noFill/>
+        </p:spPr>
+        <p:txBody>
+          <a:bodyPr wrap="none" rtlCol="0">
+            <a:spAutoFit/>
+          </a:bodyPr>
+          <a:lstStyle/>
+          <a:p>
+            <a:r>
+              <a:rPr lang="en-US" dirty="0">
+                <a:solidFill>
+                  <a:schemeClr val="dk1"/>
+                </a:solidFill>
+                <a:latin typeface="Calibri"/>
+                <a:ea typeface="Calibri"/>
+                <a:cs typeface="Calibri"/>
+                <a:sym typeface="Calibri"/>
+              </a:rPr>
+              <a:t>A </a:t>
+            </a:r>
+            <a:r>
+              <a:rPr lang="en-US" b="1" u="sng" dirty="0" err="1">
+                <a:solidFill>
+                  <a:schemeClr val="dk1"/>
+                </a:solidFill>
+                <a:latin typeface="Calibri"/>
+                <a:ea typeface="Calibri"/>
+                <a:cs typeface="Calibri"/>
+                <a:sym typeface="Calibri"/>
+              </a:rPr>
+              <a:t>dataframe</a:t>
+            </a:r>
+            <a:r>
+              <a:rPr lang="en-US" dirty="0">
+                <a:solidFill>
+                  <a:schemeClr val="dk1"/>
+                </a:solidFill>
+                <a:latin typeface="Calibri"/>
+                <a:ea typeface="Calibri"/>
+                <a:cs typeface="Calibri"/>
+                <a:sym typeface="Calibri"/>
+              </a:rPr>
+              <a:t> contains information on wild potatoes with the observation locality and number of species</a:t>
+            </a:r>
+            <a:endParaRPr lang="en-US" dirty="0"/>
+          </a:p>
+        </p:txBody>
+      </p:sp>
+    </p:spTree>
+  </p:cSld>
+  <p:clrMapOvr>
+    <a:masterClrMapping/>
+  </p:clrMapOvr>
+</p:sld>
+</file>
+
+<file path=ppt/slides/slide12.xml><?xml version="1.0" encoding="utf-8"?>
+<p:sld xmlns:a="http://schemas.openxmlformats.org/drawingml/2006/main" xmlns:r="http://schemas.openxmlformats.org/officeDocument/2006/relationships" xmlns:p="http://schemas.openxmlformats.org/presentationml/2006/main">
+  <p:cSld>
+    <p:spTree>
+      <p:nvGrpSpPr>
         <p:cNvPr id="1" name="Shape 168"/>
         <p:cNvGrpSpPr/>
         <p:nvPr/>
@@ -13129,14 +14212,26 @@
               <a:buNone/>
             </a:pPr>
             <a:r>
-              <a:rPr lang="en-US" i="1"/>
-              <a:t>Morpho menelaus </a:t>
+              <a:rPr lang="en-US" dirty="0"/>
+              <a:t>Example: </a:t>
             </a:r>
             <a:r>
-              <a:rPr lang="en-US"/>
-              <a:t>- </a:t>
+              <a:rPr lang="en-US" i="1" dirty="0"/>
+              <a:t>Morpho </a:t>
             </a:r>
-            <a:endParaRPr/>
+            <a:r>
+              <a:rPr lang="en-US" i="1" dirty="0" err="1"/>
+              <a:t>menelaus</a:t>
+            </a:r>
+            <a:r>
+              <a:rPr lang="en-US" i="1" dirty="0"/>
+              <a:t> </a:t>
+            </a:r>
+            <a:r>
+              <a:rPr lang="en-US" dirty="0"/>
+              <a:t>– blue morpho butterfly</a:t>
+            </a:r>
+            <a:endParaRPr dirty="0"/>
           </a:p>
         </p:txBody>
       </p:sp>
@@ -13252,7 +14347,7 @@
               <a:buNone/>
             </a:pPr>
             <a:r>
-              <a:rPr lang="en-US" sz="1800">
+              <a:rPr lang="en-US" sz="1800" dirty="0">
                 <a:solidFill>
                   <a:schemeClr val="dk1"/>
                 </a:solidFill>
@@ -13263,7 +14358,7 @@
               </a:rPr>
               <a:t>Range from Mexico to South America</a:t>
             </a:r>
-            <a:endParaRPr/>
+            <a:endParaRPr dirty="0"/>
           </a:p>
           <a:p>
             <a:pPr marL="0" marR="0" lvl="0" indent="0" algn="l" rtl="0">
@@ -13275,7 +14370,7 @@
               </a:spcAft>
               <a:buNone/>
             </a:pPr>
-            <a:endParaRPr sz="1800">
+            <a:endParaRPr sz="1800" dirty="0">
               <a:solidFill>
                 <a:schemeClr val="dk1"/>
               </a:solidFill>
@@ -13296,7 +14391,7 @@
               <a:buNone/>
             </a:pPr>
             <a:r>
-              <a:rPr lang="en-US" sz="1800">
+              <a:rPr lang="en-US" sz="1800" dirty="0">
                 <a:solidFill>
                   <a:schemeClr val="dk1"/>
                 </a:solidFill>
@@ -13307,7 +14402,7 @@
               </a:rPr>
               <a:t>Like old growth forests with canopies</a:t>
             </a:r>
-            <a:endParaRPr/>
+            <a:endParaRPr dirty="0"/>
           </a:p>
           <a:p>
             <a:pPr marL="0" marR="0" lvl="0" indent="0" algn="l" rtl="0">
@@ -13319,7 +14414,7 @@
               </a:spcAft>
               <a:buNone/>
             </a:pPr>
-            <a:endParaRPr sz="1800">
+            <a:endParaRPr sz="1800" dirty="0">
               <a:solidFill>
                 <a:schemeClr val="dk1"/>
               </a:solidFill>
@@ -13340,7 +14435,7 @@
               <a:buNone/>
             </a:pPr>
             <a:r>
-              <a:rPr lang="en-US" sz="1800">
+              <a:rPr lang="en-US" sz="1800" dirty="0" err="1">
                 <a:solidFill>
                   <a:schemeClr val="dk1"/>
                 </a:solidFill>
@@ -13349,9 +14444,21 @@
                 <a:cs typeface="Calibri"/>
                 <a:sym typeface="Calibri"/>
               </a:rPr>
-              <a:t>Hydorphobic wings</a:t>
+              <a:t>Hydorphobic</a:t>
             </a:r>
-            <a:endParaRPr/>
+            <a:r>
+              <a:rPr lang="en-US" sz="1800" dirty="0">
+                <a:solidFill>
+                  <a:schemeClr val="dk1"/>
+                </a:solidFill>
+                <a:latin typeface="Calibri"/>
+                <a:ea typeface="Calibri"/>
+                <a:cs typeface="Calibri"/>
+                <a:sym typeface="Calibri"/>
+              </a:rPr>
+              <a:t> wings</a:t>
+            </a:r>
+            <a:endParaRPr dirty="0"/>
           </a:p>
           <a:p>
             <a:pPr marL="0" marR="0" lvl="0" indent="0" algn="l" rtl="0">
@@ -13363,7 +14470,7 @@
               </a:spcAft>
               <a:buNone/>
             </a:pPr>
-            <a:endParaRPr sz="1800">
+            <a:endParaRPr sz="1800" dirty="0">
               <a:solidFill>
                 <a:schemeClr val="dk1"/>
               </a:solidFill>
@@ -13384,7 +14491,7 @@
               <a:buNone/>
             </a:pPr>
             <a:r>
-              <a:rPr lang="en-US" sz="1800">
+              <a:rPr lang="en-US" sz="1800" dirty="0">
                 <a:solidFill>
                   <a:schemeClr val="dk1"/>
                 </a:solidFill>
@@ -13395,7 +14502,7 @@
               </a:rPr>
               <a:t>Not endangered</a:t>
             </a:r>
-            <a:endParaRPr/>
+            <a:endParaRPr dirty="0"/>
           </a:p>
           <a:p>
             <a:pPr marL="0" marR="0" lvl="0" indent="0" algn="l" rtl="0">
@@ -13407,7 +14514,7 @@
               </a:spcAft>
               <a:buNone/>
             </a:pPr>
-            <a:endParaRPr sz="1800">
+            <a:endParaRPr sz="1800" dirty="0">
               <a:solidFill>
                 <a:schemeClr val="dk1"/>
               </a:solidFill>
@@ -13428,7 +14535,7 @@
               <a:buNone/>
             </a:pPr>
             <a:r>
-              <a:rPr lang="en-US" sz="1800">
+              <a:rPr lang="en-US" sz="1800" dirty="0">
                 <a:solidFill>
                   <a:schemeClr val="dk1"/>
                 </a:solidFill>
@@ -13439,7 +14546,7 @@
               </a:rPr>
               <a:t>Highly prized by collectors</a:t>
             </a:r>
-            <a:endParaRPr/>
+            <a:endParaRPr dirty="0"/>
           </a:p>
           <a:p>
             <a:pPr marL="0" marR="0" lvl="0" indent="0" algn="l" rtl="0">
@@ -13451,7 +14558,7 @@
               </a:spcAft>
               <a:buNone/>
             </a:pPr>
-            <a:endParaRPr sz="1800">
+            <a:endParaRPr sz="1800" dirty="0">
               <a:solidFill>
                 <a:schemeClr val="dk1"/>
               </a:solidFill>
@@ -13471,7 +14578,7 @@
               </a:spcAft>
               <a:buNone/>
             </a:pPr>
-            <a:endParaRPr sz="1800">
+            <a:endParaRPr sz="1800" dirty="0">
               <a:solidFill>
                 <a:schemeClr val="dk1"/>
               </a:solidFill>
@@ -13480,6 +14587,62 @@
               <a:cs typeface="Calibri"/>
               <a:sym typeface="Calibri"/>
             </a:endParaRPr>
+          </a:p>
+        </p:txBody>
+      </p:sp>
+      <p:sp>
+        <p:nvSpPr>
+          <p:cNvPr id="2" name="TextBox 1">
+            <a:extLst>
+              <a:ext uri="{FF2B5EF4-FFF2-40B4-BE49-F238E27FC236}">
+                <a16:creationId xmlns:a16="http://schemas.microsoft.com/office/drawing/2014/main" id="{25561862-9310-FFF1-866B-F3210A4FBC78}"/>
+              </a:ext>
+            </a:extLst>
+          </p:cNvPr>
+          <p:cNvSpPr txBox="1"/>
+          <p:nvPr/>
+        </p:nvSpPr>
+        <p:spPr>
+          <a:xfrm>
+            <a:off x="6754008" y="4923215"/>
+            <a:ext cx="5051445" cy="1754326"/>
+          </a:xfrm>
+          <a:prstGeom prst="rect">
+            <a:avLst/>
+          </a:prstGeom>
+          <a:noFill/>
+        </p:spPr>
+        <p:txBody>
+          <a:bodyPr wrap="square" rtlCol="0">
+            <a:spAutoFit/>
+          </a:bodyPr>
+          <a:lstStyle/>
+          <a:p>
+            <a:r>
+              <a:rPr lang="en-US" sz="1800" dirty="0">
+                <a:solidFill>
+                  <a:srgbClr val="FF0000"/>
+                </a:solidFill>
+              </a:rPr>
+              <a:t>If I wanted to see one, where in Central or South America should I go? </a:t>
+            </a:r>
+          </a:p>
+          <a:p>
+            <a:endParaRPr lang="en-US" sz="1800" dirty="0">
+              <a:solidFill>
+                <a:srgbClr val="FF0000"/>
+              </a:solidFill>
+            </a:endParaRPr>
+          </a:p>
+          <a:p>
+            <a:r>
+              <a:rPr lang="en-US" sz="1800" dirty="0">
+                <a:solidFill>
+                  <a:srgbClr val="FF0000"/>
+                </a:solidFill>
+              </a:rPr>
+              <a:t>I can build a model that describes all the places on earth where habitats/environments/climate are most suitable for this species.</a:t>
+            </a:r>
           </a:p>
         </p:txBody>
       </p:sp>
@@ -13488,328 +14651,88 @@
   <p:clrMapOvr>
     <a:masterClrMapping/>
   </p:clrMapOvr>
-</p:sld>
-</file>
-
-<file path=ppt/slides/slide11.xml><?xml version="1.0" encoding="utf-8"?>
-<p:sld xmlns:a="http://schemas.openxmlformats.org/drawingml/2006/main" xmlns:r="http://schemas.openxmlformats.org/officeDocument/2006/relationships" xmlns:p="http://schemas.openxmlformats.org/presentationml/2006/main">
-  <p:cSld>
-    <p:spTree>
-      <p:nvGrpSpPr>
-        <p:cNvPr id="1" name="Shape 176"/>
-        <p:cNvGrpSpPr/>
-        <p:nvPr/>
-      </p:nvGrpSpPr>
-      <p:grpSpPr>
-        <a:xfrm>
-          <a:off x="0" y="0"/>
-          <a:ext cx="0" cy="0"/>
-          <a:chOff x="0" y="0"/>
-          <a:chExt cx="0" cy="0"/>
-        </a:xfrm>
-      </p:grpSpPr>
-      <p:sp>
-        <p:nvSpPr>
-          <p:cNvPr id="177" name="Google Shape;177;p11"/>
-          <p:cNvSpPr txBox="1">
-            <a:spLocks noGrp="1"/>
-          </p:cNvSpPr>
-          <p:nvPr>
-            <p:ph type="title"/>
-          </p:nvPr>
-        </p:nvSpPr>
-        <p:spPr>
-          <a:xfrm>
-            <a:off x="838200" y="365125"/>
-            <a:ext cx="10515600" cy="1325563"/>
-          </a:xfrm>
-          <a:prstGeom prst="rect">
-            <a:avLst/>
-          </a:prstGeom>
-          <a:noFill/>
-          <a:ln>
-            <a:noFill/>
-          </a:ln>
-        </p:spPr>
-        <p:txBody>
-          <a:bodyPr spcFirstLastPara="1" wrap="square" lIns="91425" tIns="45700" rIns="91425" bIns="45700" anchor="ctr" anchorCtr="0">
-            <a:normAutofit/>
-          </a:bodyPr>
-          <a:lstStyle/>
-          <a:p>
-            <a:pPr marL="0" lvl="0" indent="0" algn="l" rtl="0">
-              <a:lnSpc>
-                <a:spcPct val="90000"/>
-              </a:lnSpc>
-              <a:spcBef>
-                <a:spcPts val="0"/>
-              </a:spcBef>
-              <a:spcAft>
-                <a:spcPts val="0"/>
-              </a:spcAft>
-              <a:buClr>
-                <a:schemeClr val="dk1"/>
-              </a:buClr>
-              <a:buSzPts val="4400"/>
-              <a:buFont typeface="Calibri"/>
-              <a:buNone/>
-            </a:pPr>
-            <a:r>
-              <a:rPr lang="en-US"/>
-              <a:t>GBIF</a:t>
-            </a:r>
-            <a:endParaRPr/>
-          </a:p>
-        </p:txBody>
-      </p:sp>
-      <p:pic>
-        <p:nvPicPr>
-          <p:cNvPr id="178" name="Google Shape;178;p11" descr="A close up of a moth  Description automatically generated"/>
-          <p:cNvPicPr preferRelativeResize="0"/>
-          <p:nvPr/>
-        </p:nvPicPr>
-        <p:blipFill rotWithShape="1">
-          <a:blip r:embed="rId3">
-            <a:alphaModFix/>
-          </a:blip>
-          <a:srcRect/>
-          <a:stretch/>
-        </p:blipFill>
-        <p:spPr>
-          <a:xfrm>
-            <a:off x="338138" y="1983384"/>
-            <a:ext cx="11305940" cy="4509491"/>
-          </a:xfrm>
-          <a:prstGeom prst="rect">
-            <a:avLst/>
-          </a:prstGeom>
-          <a:noFill/>
-          <a:ln>
-            <a:noFill/>
-          </a:ln>
-        </p:spPr>
-      </p:pic>
-    </p:spTree>
-  </p:cSld>
-  <p:clrMapOvr>
-    <a:masterClrMapping/>
-  </p:clrMapOvr>
-</p:sld>
-</file>
-
-<file path=ppt/slides/slide12.xml><?xml version="1.0" encoding="utf-8"?>
-<p:sld xmlns:a="http://schemas.openxmlformats.org/drawingml/2006/main" xmlns:r="http://schemas.openxmlformats.org/officeDocument/2006/relationships" xmlns:p="http://schemas.openxmlformats.org/presentationml/2006/main">
-  <p:cSld>
-    <p:spTree>
-      <p:nvGrpSpPr>
-        <p:cNvPr id="1" name="Shape 182"/>
-        <p:cNvGrpSpPr/>
-        <p:nvPr/>
-      </p:nvGrpSpPr>
-      <p:grpSpPr>
-        <a:xfrm>
-          <a:off x="0" y="0"/>
-          <a:ext cx="0" cy="0"/>
-          <a:chOff x="0" y="0"/>
-          <a:chExt cx="0" cy="0"/>
-        </a:xfrm>
-      </p:grpSpPr>
-      <p:sp>
-        <p:nvSpPr>
-          <p:cNvPr id="183" name="Google Shape;183;p12"/>
-          <p:cNvSpPr txBox="1">
-            <a:spLocks noGrp="1"/>
-          </p:cNvSpPr>
-          <p:nvPr>
-            <p:ph type="title"/>
-          </p:nvPr>
-        </p:nvSpPr>
-        <p:spPr>
-          <a:xfrm>
-            <a:off x="838200" y="365125"/>
-            <a:ext cx="10515600" cy="1325563"/>
-          </a:xfrm>
-          <a:prstGeom prst="rect">
-            <a:avLst/>
-          </a:prstGeom>
-          <a:noFill/>
-          <a:ln>
-            <a:noFill/>
-          </a:ln>
-        </p:spPr>
-        <p:txBody>
-          <a:bodyPr spcFirstLastPara="1" wrap="square" lIns="91425" tIns="45700" rIns="91425" bIns="45700" anchor="ctr" anchorCtr="0">
-            <a:normAutofit/>
-          </a:bodyPr>
-          <a:lstStyle/>
-          <a:p>
-            <a:pPr marL="0" lvl="0" indent="0" algn="l" rtl="0">
-              <a:lnSpc>
-                <a:spcPct val="90000"/>
-              </a:lnSpc>
-              <a:spcBef>
-                <a:spcPts val="0"/>
-              </a:spcBef>
-              <a:spcAft>
-                <a:spcPts val="0"/>
-              </a:spcAft>
-              <a:buClr>
-                <a:schemeClr val="dk1"/>
-              </a:buClr>
-              <a:buSzPts val="4400"/>
-              <a:buFont typeface="Calibri"/>
-              <a:buNone/>
-            </a:pPr>
-            <a:r>
-              <a:rPr lang="en-US"/>
-              <a:t>Species Occurences – Human Observations</a:t>
-            </a:r>
-            <a:endParaRPr/>
-          </a:p>
-        </p:txBody>
-      </p:sp>
-      <p:pic>
-        <p:nvPicPr>
-          <p:cNvPr id="184" name="Google Shape;184;p12" descr="A screenshot of a computer  Description automatically generated"/>
-          <p:cNvPicPr preferRelativeResize="0"/>
-          <p:nvPr/>
-        </p:nvPicPr>
-        <p:blipFill rotWithShape="1">
-          <a:blip r:embed="rId3">
-            <a:alphaModFix/>
-          </a:blip>
-          <a:srcRect/>
-          <a:stretch/>
-        </p:blipFill>
-        <p:spPr>
-          <a:xfrm>
-            <a:off x="1313219" y="1843691"/>
-            <a:ext cx="9565562" cy="4649184"/>
-          </a:xfrm>
-          <a:prstGeom prst="rect">
-            <a:avLst/>
-          </a:prstGeom>
-          <a:noFill/>
-          <a:ln>
-            <a:noFill/>
-          </a:ln>
-        </p:spPr>
-      </p:pic>
-    </p:spTree>
-  </p:cSld>
-  <p:clrMapOvr>
-    <a:masterClrMapping/>
-  </p:clrMapOvr>
+  <p:timing>
+    <p:tnLst>
+      <p:par>
+        <p:cTn id="1" dur="indefinite" restart="never" nodeType="tmRoot">
+          <p:childTnLst>
+            <p:seq concurrent="1" nextAc="seek">
+              <p:cTn id="2" dur="indefinite" nodeType="mainSeq">
+                <p:childTnLst>
+                  <p:par>
+                    <p:cTn id="3" fill="hold">
+                      <p:stCondLst>
+                        <p:cond delay="indefinite"/>
+                      </p:stCondLst>
+                      <p:childTnLst>
+                        <p:par>
+                          <p:cTn id="4" fill="hold">
+                            <p:stCondLst>
+                              <p:cond delay="0"/>
+                            </p:stCondLst>
+                            <p:childTnLst>
+                              <p:par>
+                                <p:cTn id="5" presetID="1" presetClass="entr" presetSubtype="0" fill="hold" grpId="0" nodeType="clickEffect">
+                                  <p:stCondLst>
+                                    <p:cond delay="0"/>
+                                  </p:stCondLst>
+                                  <p:childTnLst>
+                                    <p:set>
+                                      <p:cBhvr>
+                                        <p:cTn id="6" dur="1" fill="hold">
+                                          <p:stCondLst>
+                                            <p:cond delay="0"/>
+                                          </p:stCondLst>
+                                        </p:cTn>
+                                        <p:tgtEl>
+                                          <p:spTgt spid="2"/>
+                                        </p:tgtEl>
+                                        <p:attrNameLst>
+                                          <p:attrName>style.visibility</p:attrName>
+                                        </p:attrNameLst>
+                                      </p:cBhvr>
+                                      <p:to>
+                                        <p:strVal val="visible"/>
+                                      </p:to>
+                                    </p:set>
+                                  </p:childTnLst>
+                                </p:cTn>
+                              </p:par>
+                            </p:childTnLst>
+                          </p:cTn>
+                        </p:par>
+                      </p:childTnLst>
+                    </p:cTn>
+                  </p:par>
+                </p:childTnLst>
+              </p:cTn>
+              <p:prevCondLst>
+                <p:cond evt="onPrev" delay="0">
+                  <p:tgtEl>
+                    <p:sldTgt/>
+                  </p:tgtEl>
+                </p:cond>
+              </p:prevCondLst>
+              <p:nextCondLst>
+                <p:cond evt="onNext" delay="0">
+                  <p:tgtEl>
+                    <p:sldTgt/>
+                  </p:tgtEl>
+                </p:cond>
+              </p:nextCondLst>
+            </p:seq>
+          </p:childTnLst>
+        </p:cTn>
+      </p:par>
+    </p:tnLst>
+    <p:bldLst>
+      <p:bldP spid="2" grpId="0"/>
+    </p:bldLst>
+  </p:timing>
 </p:sld>
 </file>
 
 <file path=ppt/slides/slide13.xml><?xml version="1.0" encoding="utf-8"?>
-<p:sld xmlns:a="http://schemas.openxmlformats.org/drawingml/2006/main" xmlns:r="http://schemas.openxmlformats.org/officeDocument/2006/relationships" xmlns:p="http://schemas.openxmlformats.org/presentationml/2006/main">
-  <p:cSld>
-    <p:spTree>
-      <p:nvGrpSpPr>
-        <p:cNvPr id="1" name="Shape 188"/>
-        <p:cNvGrpSpPr/>
-        <p:nvPr/>
-      </p:nvGrpSpPr>
-      <p:grpSpPr>
-        <a:xfrm>
-          <a:off x="0" y="0"/>
-          <a:ext cx="0" cy="0"/>
-          <a:chOff x="0" y="0"/>
-          <a:chExt cx="0" cy="0"/>
-        </a:xfrm>
-      </p:grpSpPr>
-      <p:sp>
-        <p:nvSpPr>
-          <p:cNvPr id="189" name="Google Shape;189;p13"/>
-          <p:cNvSpPr txBox="1">
-            <a:spLocks noGrp="1"/>
-          </p:cNvSpPr>
-          <p:nvPr>
-            <p:ph type="title"/>
-          </p:nvPr>
-        </p:nvSpPr>
-        <p:spPr>
-          <a:xfrm>
-            <a:off x="838200" y="365125"/>
-            <a:ext cx="10515600" cy="1325563"/>
-          </a:xfrm>
-          <a:prstGeom prst="rect">
-            <a:avLst/>
-          </a:prstGeom>
-          <a:noFill/>
-          <a:ln>
-            <a:noFill/>
-          </a:ln>
-        </p:spPr>
-        <p:txBody>
-          <a:bodyPr spcFirstLastPara="1" wrap="square" lIns="91425" tIns="45700" rIns="91425" bIns="45700" anchor="ctr" anchorCtr="0">
-            <a:normAutofit/>
-          </a:bodyPr>
-          <a:lstStyle/>
-          <a:p>
-            <a:pPr marL="0" lvl="0" indent="0" algn="l" rtl="0">
-              <a:lnSpc>
-                <a:spcPct val="90000"/>
-              </a:lnSpc>
-              <a:spcBef>
-                <a:spcPts val="0"/>
-              </a:spcBef>
-              <a:spcAft>
-                <a:spcPts val="0"/>
-              </a:spcAft>
-              <a:buClr>
-                <a:schemeClr val="dk1"/>
-              </a:buClr>
-              <a:buSzPts val="4400"/>
-              <a:buFont typeface="Calibri"/>
-              <a:buNone/>
-            </a:pPr>
-            <a:r>
-              <a:rPr lang="en-US"/>
-              <a:t>https://r.geocompx.org/</a:t>
-            </a:r>
-            <a:endParaRPr/>
-          </a:p>
-        </p:txBody>
-      </p:sp>
-      <p:pic>
-        <p:nvPicPr>
-          <p:cNvPr id="190" name="Google Shape;190;p13" descr="A screenshot of a book  Description automatically generated"/>
-          <p:cNvPicPr preferRelativeResize="0"/>
-          <p:nvPr/>
-        </p:nvPicPr>
-        <p:blipFill rotWithShape="1">
-          <a:blip r:embed="rId3">
-            <a:alphaModFix/>
-          </a:blip>
-          <a:srcRect/>
-          <a:stretch/>
-        </p:blipFill>
-        <p:spPr>
-          <a:xfrm>
-            <a:off x="1028700" y="1932245"/>
-            <a:ext cx="10134600" cy="4925755"/>
-          </a:xfrm>
-          <a:prstGeom prst="rect">
-            <a:avLst/>
-          </a:prstGeom>
-          <a:noFill/>
-          <a:ln>
-            <a:noFill/>
-          </a:ln>
-        </p:spPr>
-      </p:pic>
-    </p:spTree>
-  </p:cSld>
-  <p:clrMapOvr>
-    <a:masterClrMapping/>
-  </p:clrMapOvr>
-</p:sld>
-</file>
-
-<file path=ppt/slides/slide14.xml><?xml version="1.0" encoding="utf-8"?>
 <p:sld xmlns:a="http://schemas.openxmlformats.org/drawingml/2006/main" xmlns:r="http://schemas.openxmlformats.org/officeDocument/2006/relationships" xmlns:p="http://schemas.openxmlformats.org/presentationml/2006/main">
   <p:cSld>
     <p:spTree>
@@ -14115,7 +15038,7 @@
 </p:sld>
 </file>
 
-<file path=ppt/slides/slide15.xml><?xml version="1.0" encoding="utf-8"?>
+<file path=ppt/slides/slide14.xml><?xml version="1.0" encoding="utf-8"?>
 <p:sld xmlns:a="http://schemas.openxmlformats.org/drawingml/2006/main" xmlns:r="http://schemas.openxmlformats.org/officeDocument/2006/relationships" xmlns:p="http://schemas.openxmlformats.org/presentationml/2006/main">
   <p:cSld>
     <p:spTree>
@@ -14249,7 +15172,7 @@
         <p:spPr>
           <a:xfrm>
             <a:off x="4600575" y="5643563"/>
-            <a:ext cx="6753225" cy="369332"/>
+            <a:ext cx="6753225" cy="923289"/>
           </a:xfrm>
           <a:prstGeom prst="rect">
             <a:avLst/>
@@ -14275,7 +15198,7 @@
               <a:buNone/>
             </a:pPr>
             <a:r>
-              <a:rPr lang="en-US" sz="1800">
+              <a:rPr lang="en-US" sz="1800" dirty="0">
                 <a:solidFill>
                   <a:schemeClr val="dk1"/>
                 </a:solidFill>
@@ -14286,7 +15209,48 @@
               </a:rPr>
               <a:t>As you change x…… how does y respond?</a:t>
             </a:r>
-            <a:endParaRPr/>
+          </a:p>
+          <a:p>
+            <a:pPr marL="0" marR="0" lvl="0" indent="0" algn="l" rtl="0">
+              <a:spcBef>
+                <a:spcPts val="0"/>
+              </a:spcBef>
+              <a:spcAft>
+                <a:spcPts val="0"/>
+              </a:spcAft>
+              <a:buNone/>
+            </a:pPr>
+            <a:endParaRPr lang="en-US" sz="1800" dirty="0">
+              <a:solidFill>
+                <a:schemeClr val="dk1"/>
+              </a:solidFill>
+              <a:latin typeface="Calibri"/>
+              <a:cs typeface="Calibri"/>
+              <a:sym typeface="Calibri"/>
+            </a:endParaRPr>
+          </a:p>
+          <a:p>
+            <a:pPr marL="0" marR="0" lvl="0" indent="0" algn="l" rtl="0">
+              <a:spcBef>
+                <a:spcPts val="0"/>
+              </a:spcBef>
+              <a:spcAft>
+                <a:spcPts val="0"/>
+              </a:spcAft>
+              <a:buNone/>
+            </a:pPr>
+            <a:r>
+              <a:rPr lang="en-US" sz="1800" dirty="0">
+                <a:solidFill>
+                  <a:schemeClr val="dk1"/>
+                </a:solidFill>
+                <a:latin typeface="Calibri"/>
+                <a:cs typeface="Calibri"/>
+                <a:sym typeface="Calibri"/>
+              </a:rPr>
+              <a:t>What are x and y in our example?</a:t>
+            </a:r>
+            <a:endParaRPr dirty="0"/>
           </a:p>
         </p:txBody>
       </p:sp>
@@ -14395,89 +15359,141 @@
   <p:clrMapOvr>
     <a:masterClrMapping/>
   </p:clrMapOvr>
+  <p:timing>
+    <p:tnLst>
+      <p:par>
+        <p:cTn id="1" dur="indefinite" restart="never" nodeType="tmRoot">
+          <p:childTnLst>
+            <p:seq concurrent="1" nextAc="seek">
+              <p:cTn id="2" dur="indefinite" nodeType="mainSeq">
+                <p:childTnLst>
+                  <p:par>
+                    <p:cTn id="3" fill="hold">
+                      <p:stCondLst>
+                        <p:cond delay="indefinite"/>
+                      </p:stCondLst>
+                      <p:childTnLst>
+                        <p:par>
+                          <p:cTn id="4" fill="hold">
+                            <p:stCondLst>
+                              <p:cond delay="0"/>
+                            </p:stCondLst>
+                            <p:childTnLst>
+                              <p:par>
+                                <p:cTn id="5" presetID="1" presetClass="entr" presetSubtype="0" fill="hold" grpId="0" nodeType="clickEffect">
+                                  <p:stCondLst>
+                                    <p:cond delay="0"/>
+                                  </p:stCondLst>
+                                  <p:childTnLst>
+                                    <p:set>
+                                      <p:cBhvr>
+                                        <p:cTn id="6" dur="1" fill="hold">
+                                          <p:stCondLst>
+                                            <p:cond delay="0"/>
+                                          </p:stCondLst>
+                                        </p:cTn>
+                                        <p:tgtEl>
+                                          <p:spTgt spid="208">
+                                            <p:txEl>
+                                              <p:pRg st="0" end="0"/>
+                                            </p:txEl>
+                                          </p:spTgt>
+                                        </p:tgtEl>
+                                        <p:attrNameLst>
+                                          <p:attrName>style.visibility</p:attrName>
+                                        </p:attrNameLst>
+                                      </p:cBhvr>
+                                      <p:to>
+                                        <p:strVal val="visible"/>
+                                      </p:to>
+                                    </p:set>
+                                  </p:childTnLst>
+                                </p:cTn>
+                              </p:par>
+                            </p:childTnLst>
+                          </p:cTn>
+                        </p:par>
+                      </p:childTnLst>
+                    </p:cTn>
+                  </p:par>
+                  <p:par>
+                    <p:cTn id="7" fill="hold">
+                      <p:stCondLst>
+                        <p:cond delay="indefinite"/>
+                      </p:stCondLst>
+                      <p:childTnLst>
+                        <p:par>
+                          <p:cTn id="8" fill="hold">
+                            <p:stCondLst>
+                              <p:cond delay="0"/>
+                            </p:stCondLst>
+                            <p:childTnLst>
+                              <p:par>
+                                <p:cTn id="9" presetID="1" presetClass="entr" presetSubtype="0" fill="hold" grpId="0" nodeType="clickEffect">
+                                  <p:stCondLst>
+                                    <p:cond delay="0"/>
+                                  </p:stCondLst>
+                                  <p:childTnLst>
+                                    <p:set>
+                                      <p:cBhvr>
+                                        <p:cTn id="10" dur="1" fill="hold">
+                                          <p:stCondLst>
+                                            <p:cond delay="0"/>
+                                          </p:stCondLst>
+                                        </p:cTn>
+                                        <p:tgtEl>
+                                          <p:spTgt spid="208">
+                                            <p:txEl>
+                                              <p:pRg st="2" end="2"/>
+                                            </p:txEl>
+                                          </p:spTgt>
+                                        </p:tgtEl>
+                                        <p:attrNameLst>
+                                          <p:attrName>style.visibility</p:attrName>
+                                        </p:attrNameLst>
+                                      </p:cBhvr>
+                                      <p:to>
+                                        <p:strVal val="visible"/>
+                                      </p:to>
+                                    </p:set>
+                                  </p:childTnLst>
+                                </p:cTn>
+                              </p:par>
+                            </p:childTnLst>
+                          </p:cTn>
+                        </p:par>
+                      </p:childTnLst>
+                    </p:cTn>
+                  </p:par>
+                </p:childTnLst>
+              </p:cTn>
+              <p:prevCondLst>
+                <p:cond evt="onPrev" delay="0">
+                  <p:tgtEl>
+                    <p:sldTgt/>
+                  </p:tgtEl>
+                </p:cond>
+              </p:prevCondLst>
+              <p:nextCondLst>
+                <p:cond evt="onNext" delay="0">
+                  <p:tgtEl>
+                    <p:sldTgt/>
+                  </p:tgtEl>
+                </p:cond>
+              </p:nextCondLst>
+            </p:seq>
+          </p:childTnLst>
+        </p:cTn>
+      </p:par>
+    </p:tnLst>
+    <p:bldLst>
+      <p:bldP spid="208" grpId="0" build="p"/>
+    </p:bldLst>
+  </p:timing>
 </p:sld>
 </file>
 
-<file path=ppt/slides/slide16.xml><?xml version="1.0" encoding="utf-8"?>
-<p:sld xmlns:a="http://schemas.openxmlformats.org/drawingml/2006/main" xmlns:r="http://schemas.openxmlformats.org/officeDocument/2006/relationships" xmlns:p="http://schemas.openxmlformats.org/presentationml/2006/main">
-  <p:cSld>
-    <p:spTree>
-      <p:nvGrpSpPr>
-        <p:cNvPr id="1" name="Shape 214"/>
-        <p:cNvGrpSpPr/>
-        <p:nvPr/>
-      </p:nvGrpSpPr>
-      <p:grpSpPr>
-        <a:xfrm>
-          <a:off x="0" y="0"/>
-          <a:ext cx="0" cy="0"/>
-          <a:chOff x="0" y="0"/>
-          <a:chExt cx="0" cy="0"/>
-        </a:xfrm>
-      </p:grpSpPr>
-      <p:sp>
-        <p:nvSpPr>
-          <p:cNvPr id="215" name="Google Shape;215;p16"/>
-          <p:cNvSpPr txBox="1">
-            <a:spLocks noGrp="1"/>
-          </p:cNvSpPr>
-          <p:nvPr>
-            <p:ph type="title"/>
-          </p:nvPr>
-        </p:nvSpPr>
-        <p:spPr>
-          <a:xfrm>
-            <a:off x="838200" y="365125"/>
-            <a:ext cx="10515600" cy="1325563"/>
-          </a:xfrm>
-          <a:prstGeom prst="rect">
-            <a:avLst/>
-          </a:prstGeom>
-          <a:noFill/>
-          <a:ln>
-            <a:noFill/>
-          </a:ln>
-        </p:spPr>
-        <p:txBody>
-          <a:bodyPr spcFirstLastPara="1" wrap="square" lIns="91425" tIns="45700" rIns="91425" bIns="45700" anchor="ctr" anchorCtr="0">
-            <a:normAutofit/>
-          </a:bodyPr>
-          <a:lstStyle/>
-          <a:p>
-            <a:pPr marL="0" lvl="0" indent="0" algn="l" rtl="0">
-              <a:lnSpc>
-                <a:spcPct val="90000"/>
-              </a:lnSpc>
-              <a:spcBef>
-                <a:spcPts val="0"/>
-              </a:spcBef>
-              <a:spcAft>
-                <a:spcPts val="0"/>
-              </a:spcAft>
-              <a:buClr>
-                <a:schemeClr val="dk1"/>
-              </a:buClr>
-              <a:buSzPts val="4400"/>
-              <a:buFont typeface="Calibri"/>
-              <a:buNone/>
-            </a:pPr>
-            <a:r>
-              <a:rPr lang="en-US"/>
-              <a:t>Generalized Linear Model and Machine Learning</a:t>
-            </a:r>
-            <a:endParaRPr/>
-          </a:p>
-        </p:txBody>
-      </p:sp>
-    </p:spTree>
-  </p:cSld>
-  <p:clrMapOvr>
-    <a:masterClrMapping/>
-  </p:clrMapOvr>
-</p:sld>
-</file>
-
-<file path=ppt/slides/slide17.xml><?xml version="1.0" encoding="utf-8"?>
+<file path=ppt/slides/slide15.xml><?xml version="1.0" encoding="utf-8"?>
 <p:sld xmlns:a="http://schemas.openxmlformats.org/drawingml/2006/main" xmlns:r="http://schemas.openxmlformats.org/officeDocument/2006/relationships" xmlns:p="http://schemas.openxmlformats.org/presentationml/2006/main">
   <p:cSld>
     <p:spTree>
@@ -14506,8 +15522,8 @@
         </p:nvSpPr>
         <p:spPr>
           <a:xfrm>
-            <a:off x="838200" y="365125"/>
-            <a:ext cx="10515600" cy="1325563"/>
+            <a:off x="497711" y="365125"/>
+            <a:ext cx="10856089" cy="1325563"/>
           </a:xfrm>
           <a:prstGeom prst="rect">
             <a:avLst/>
@@ -14541,10 +15557,21 @@
               <a:buNone/>
             </a:pPr>
             <a:r>
-              <a:rPr lang="en-US"/>
-              <a:t>BioClimate data</a:t>
+              <a:rPr lang="en-US" dirty="0" err="1"/>
+              <a:t>BioClimate</a:t>
             </a:r>
-            <a:endParaRPr/>
+            <a:r>
+              <a:rPr lang="en-US" dirty="0"/>
+              <a:t> data</a:t>
+            </a:r>
+            <a:br>
+              <a:rPr lang="en-US" dirty="0"/>
+            </a:br>
+            <a:r>
+              <a:rPr lang="en-US" sz="3200" dirty="0"/>
+              <a:t>(i.e., the x, independent, or predictor variables)</a:t>
+            </a:r>
+            <a:endParaRPr sz="3200" dirty="0"/>
           </a:p>
         </p:txBody>
       </p:sp>
@@ -14610,6 +15637,218 @@
 </p:sld>
 </file>
 
+<file path=ppt/slides/slide16.xml><?xml version="1.0" encoding="utf-8"?>
+<p:sld xmlns:a="http://schemas.openxmlformats.org/drawingml/2006/main" xmlns:r="http://schemas.openxmlformats.org/officeDocument/2006/relationships" xmlns:p="http://schemas.openxmlformats.org/presentationml/2006/main">
+  <p:cSld>
+    <p:spTree>
+      <p:nvGrpSpPr>
+        <p:cNvPr id="1" name="Shape 176"/>
+        <p:cNvGrpSpPr/>
+        <p:nvPr/>
+      </p:nvGrpSpPr>
+      <p:grpSpPr>
+        <a:xfrm>
+          <a:off x="0" y="0"/>
+          <a:ext cx="0" cy="0"/>
+          <a:chOff x="0" y="0"/>
+          <a:chExt cx="0" cy="0"/>
+        </a:xfrm>
+      </p:grpSpPr>
+      <p:sp>
+        <p:nvSpPr>
+          <p:cNvPr id="177" name="Google Shape;177;p11"/>
+          <p:cNvSpPr txBox="1">
+            <a:spLocks noGrp="1"/>
+          </p:cNvSpPr>
+          <p:nvPr>
+            <p:ph type="title"/>
+          </p:nvPr>
+        </p:nvSpPr>
+        <p:spPr>
+          <a:xfrm>
+            <a:off x="838200" y="365125"/>
+            <a:ext cx="10515600" cy="1325563"/>
+          </a:xfrm>
+          <a:prstGeom prst="rect">
+            <a:avLst/>
+          </a:prstGeom>
+          <a:noFill/>
+          <a:ln>
+            <a:noFill/>
+          </a:ln>
+        </p:spPr>
+        <p:txBody>
+          <a:bodyPr spcFirstLastPara="1" wrap="square" lIns="91425" tIns="45700" rIns="91425" bIns="45700" anchor="ctr" anchorCtr="0">
+            <a:normAutofit/>
+          </a:bodyPr>
+          <a:lstStyle/>
+          <a:p>
+            <a:pPr lvl="0">
+              <a:buSzPts val="4400"/>
+            </a:pPr>
+            <a:r>
+              <a:rPr lang="en-US" dirty="0"/>
+              <a:t>GBIF: Global Biodiversity Information Facility</a:t>
+            </a:r>
+            <a:br>
+              <a:rPr lang="en-US" dirty="0"/>
+            </a:br>
+            <a:r>
+              <a:rPr lang="en-US" sz="3200" dirty="0"/>
+              <a:t>(i.e. the y or dependent variable)</a:t>
+            </a:r>
+            <a:endParaRPr sz="3200" dirty="0"/>
+          </a:p>
+        </p:txBody>
+      </p:sp>
+      <p:pic>
+        <p:nvPicPr>
+          <p:cNvPr id="178" name="Google Shape;178;p11" descr="A close up of a moth  Description automatically generated"/>
+          <p:cNvPicPr preferRelativeResize="0"/>
+          <p:nvPr/>
+        </p:nvPicPr>
+        <p:blipFill rotWithShape="1">
+          <a:blip r:embed="rId3">
+            <a:alphaModFix/>
+          </a:blip>
+          <a:srcRect/>
+          <a:stretch/>
+        </p:blipFill>
+        <p:spPr>
+          <a:xfrm>
+            <a:off x="338138" y="1983384"/>
+            <a:ext cx="11305940" cy="4509491"/>
+          </a:xfrm>
+          <a:prstGeom prst="rect">
+            <a:avLst/>
+          </a:prstGeom>
+          <a:noFill/>
+          <a:ln>
+            <a:noFill/>
+          </a:ln>
+        </p:spPr>
+      </p:pic>
+    </p:spTree>
+  </p:cSld>
+  <p:clrMapOvr>
+    <a:masterClrMapping/>
+  </p:clrMapOvr>
+</p:sld>
+</file>
+
+<file path=ppt/slides/slide17.xml><?xml version="1.0" encoding="utf-8"?>
+<p:sld xmlns:a="http://schemas.openxmlformats.org/drawingml/2006/main" xmlns:r="http://schemas.openxmlformats.org/officeDocument/2006/relationships" xmlns:p="http://schemas.openxmlformats.org/presentationml/2006/main">
+  <p:cSld>
+    <p:spTree>
+      <p:nvGrpSpPr>
+        <p:cNvPr id="1" name="Shape 182"/>
+        <p:cNvGrpSpPr/>
+        <p:nvPr/>
+      </p:nvGrpSpPr>
+      <p:grpSpPr>
+        <a:xfrm>
+          <a:off x="0" y="0"/>
+          <a:ext cx="0" cy="0"/>
+          <a:chOff x="0" y="0"/>
+          <a:chExt cx="0" cy="0"/>
+        </a:xfrm>
+      </p:grpSpPr>
+      <p:sp>
+        <p:nvSpPr>
+          <p:cNvPr id="183" name="Google Shape;183;p12"/>
+          <p:cNvSpPr txBox="1">
+            <a:spLocks noGrp="1"/>
+          </p:cNvSpPr>
+          <p:nvPr>
+            <p:ph type="title"/>
+          </p:nvPr>
+        </p:nvSpPr>
+        <p:spPr>
+          <a:xfrm>
+            <a:off x="838200" y="365125"/>
+            <a:ext cx="10515600" cy="1325563"/>
+          </a:xfrm>
+          <a:prstGeom prst="rect">
+            <a:avLst/>
+          </a:prstGeom>
+          <a:noFill/>
+          <a:ln>
+            <a:noFill/>
+          </a:ln>
+        </p:spPr>
+        <p:txBody>
+          <a:bodyPr spcFirstLastPara="1" wrap="square" lIns="91425" tIns="45700" rIns="91425" bIns="45700" anchor="ctr" anchorCtr="0">
+            <a:normAutofit/>
+          </a:bodyPr>
+          <a:lstStyle/>
+          <a:p>
+            <a:pPr marL="0" lvl="0" indent="0" algn="l" rtl="0">
+              <a:lnSpc>
+                <a:spcPct val="90000"/>
+              </a:lnSpc>
+              <a:spcBef>
+                <a:spcPts val="0"/>
+              </a:spcBef>
+              <a:spcAft>
+                <a:spcPts val="0"/>
+              </a:spcAft>
+              <a:buClr>
+                <a:schemeClr val="dk1"/>
+              </a:buClr>
+              <a:buSzPts val="4400"/>
+              <a:buFont typeface="Calibri"/>
+              <a:buNone/>
+            </a:pPr>
+            <a:r>
+              <a:rPr lang="en-US" dirty="0"/>
+              <a:t>Species Occurrences – Human Observations</a:t>
+            </a:r>
+            <a:br>
+              <a:rPr lang="en-US" dirty="0"/>
+            </a:br>
+            <a:r>
+              <a:rPr lang="en-US" sz="3200" dirty="0"/>
+              <a:t>(i.e. the y or dependent variable)</a:t>
+            </a:r>
+            <a:endParaRPr sz="3200" dirty="0"/>
+          </a:p>
+        </p:txBody>
+      </p:sp>
+      <p:pic>
+        <p:nvPicPr>
+          <p:cNvPr id="184" name="Google Shape;184;p12" descr="A screenshot of a computer  Description automatically generated"/>
+          <p:cNvPicPr preferRelativeResize="0"/>
+          <p:nvPr/>
+        </p:nvPicPr>
+        <p:blipFill rotWithShape="1">
+          <a:blip r:embed="rId3">
+            <a:alphaModFix/>
+          </a:blip>
+          <a:srcRect/>
+          <a:stretch/>
+        </p:blipFill>
+        <p:spPr>
+          <a:xfrm>
+            <a:off x="1313219" y="1843691"/>
+            <a:ext cx="9565562" cy="4649184"/>
+          </a:xfrm>
+          <a:prstGeom prst="rect">
+            <a:avLst/>
+          </a:prstGeom>
+          <a:noFill/>
+          <a:ln>
+            <a:noFill/>
+          </a:ln>
+        </p:spPr>
+      </p:pic>
+    </p:spTree>
+  </p:cSld>
+  <p:clrMapOvr>
+    <a:masterClrMapping/>
+  </p:clrMapOvr>
+</p:sld>
+</file>
+
 <file path=ppt/slides/slide18.xml><?xml version="1.0" encoding="utf-8"?>
 <p:sld xmlns:a="http://schemas.openxmlformats.org/drawingml/2006/main" xmlns:r="http://schemas.openxmlformats.org/officeDocument/2006/relationships" xmlns:p="http://schemas.openxmlformats.org/presentationml/2006/main">
   <p:cSld>
@@ -14674,10 +15913,10 @@
               <a:buNone/>
             </a:pPr>
             <a:r>
-              <a:rPr lang="en-US"/>
-              <a:t>Linear Model - Correlation</a:t>
+              <a:rPr lang="en-US" dirty="0"/>
+              <a:t>Generalized Linear Model – correlating occurrences with climate</a:t>
             </a:r>
-            <a:endParaRPr/>
+            <a:endParaRPr dirty="0"/>
           </a:p>
         </p:txBody>
       </p:sp>
@@ -14733,7 +15972,7 @@
       </p:sp>
       <p:pic>
         <p:nvPicPr>
-          <p:cNvPr id="229" name="Google Shape;229;p18" descr="A map of the world  Description automatically generated"/>
+          <p:cNvPr id="230" name="Google Shape;230;p18" descr="A map of a cloud  Description automatically generated with medium confidence"/>
           <p:cNvPicPr preferRelativeResize="0"/>
           <p:nvPr/>
         </p:nvPicPr>
@@ -14746,34 +15985,7 @@
         </p:blipFill>
         <p:spPr>
           <a:xfrm>
-            <a:off x="0" y="1690688"/>
-            <a:ext cx="5493572" cy="3562923"/>
-          </a:xfrm>
-          <a:prstGeom prst="rect">
-            <a:avLst/>
-          </a:prstGeom>
-          <a:noFill/>
-          <a:ln>
-            <a:noFill/>
-          </a:ln>
-        </p:spPr>
-      </p:pic>
-      <p:pic>
-        <p:nvPicPr>
-          <p:cNvPr id="230" name="Google Shape;230;p18" descr="A map of a cloud  Description automatically generated with medium confidence"/>
-          <p:cNvPicPr preferRelativeResize="0"/>
-          <p:nvPr/>
-        </p:nvPicPr>
-        <p:blipFill rotWithShape="1">
-          <a:blip r:embed="rId4">
-            <a:alphaModFix/>
-          </a:blip>
-          <a:srcRect/>
-          <a:stretch/>
-        </p:blipFill>
-        <p:spPr>
-          <a:xfrm>
-            <a:off x="6331772" y="1647538"/>
+            <a:off x="838200" y="1690688"/>
             <a:ext cx="5860228" cy="3800723"/>
           </a:xfrm>
           <a:prstGeom prst="rect">
@@ -14793,12 +16005,12 @@
 </p:sld>
 </file>
 
-<file path=ppt/slides/slide19.xml><?xml version="1.0" encoding="utf-8"?>
+<file path=ppt/slides/slide2.xml><?xml version="1.0" encoding="utf-8"?>
 <p:sld xmlns:a="http://schemas.openxmlformats.org/drawingml/2006/main" xmlns:r="http://schemas.openxmlformats.org/officeDocument/2006/relationships" xmlns:p="http://schemas.openxmlformats.org/presentationml/2006/main">
   <p:cSld>
     <p:spTree>
       <p:nvGrpSpPr>
-        <p:cNvPr id="1" name="Shape 234"/>
+        <p:cNvPr id="1" name=""/>
         <p:cNvGrpSpPr/>
         <p:nvPr/>
       </p:nvGrpSpPr>
@@ -14812,136 +16024,93 @@
       </p:grpSpPr>
       <p:sp>
         <p:nvSpPr>
-          <p:cNvPr id="235" name="Google Shape;235;p19"/>
-          <p:cNvSpPr txBox="1">
+          <p:cNvPr id="2" name="Title 1">
+            <a:extLst>
+              <a:ext uri="{FF2B5EF4-FFF2-40B4-BE49-F238E27FC236}">
+                <a16:creationId xmlns:a16="http://schemas.microsoft.com/office/drawing/2014/main" id="{BEA853D2-1FDA-0FE9-2A49-F693740DD0D0}"/>
+              </a:ext>
+            </a:extLst>
+          </p:cNvPr>
+          <p:cNvSpPr>
             <a:spLocks noGrp="1"/>
           </p:cNvSpPr>
           <p:nvPr>
             <p:ph type="title"/>
           </p:nvPr>
         </p:nvSpPr>
-        <p:spPr>
-          <a:xfrm>
-            <a:off x="838200" y="365125"/>
-            <a:ext cx="10515600" cy="1325563"/>
-          </a:xfrm>
-          <a:prstGeom prst="rect">
-            <a:avLst/>
-          </a:prstGeom>
-          <a:noFill/>
-          <a:ln>
-            <a:noFill/>
-          </a:ln>
-        </p:spPr>
+        <p:spPr/>
         <p:txBody>
-          <a:bodyPr spcFirstLastPara="1" wrap="square" lIns="91425" tIns="45700" rIns="91425" bIns="45700" anchor="ctr" anchorCtr="0">
-            <a:normAutofit/>
-          </a:bodyPr>
+          <a:bodyPr/>
           <a:lstStyle/>
           <a:p>
-            <a:pPr marL="0" lvl="0" indent="0" algn="l" rtl="0">
-              <a:lnSpc>
-                <a:spcPct val="90000"/>
-              </a:lnSpc>
-              <a:spcBef>
-                <a:spcPts val="0"/>
-              </a:spcBef>
-              <a:spcAft>
-                <a:spcPts val="0"/>
-              </a:spcAft>
-              <a:buClr>
-                <a:schemeClr val="dk1"/>
-              </a:buClr>
-              <a:buSzPts val="4400"/>
-              <a:buFont typeface="Calibri"/>
-              <a:buNone/>
-            </a:pPr>
             <a:r>
-              <a:rPr lang="en-US"/>
-              <a:t>Linear Model vs Machine Learning?</a:t>
+              <a:rPr lang="en-US" dirty="0"/>
+              <a:t>Overview</a:t>
             </a:r>
-            <a:endParaRPr/>
           </a:p>
         </p:txBody>
       </p:sp>
-      <p:pic>
-        <p:nvPicPr>
-          <p:cNvPr id="236" name="Google Shape;236;p19" descr="A map of the south america  Description automatically generated"/>
-          <p:cNvPicPr preferRelativeResize="0"/>
-          <p:nvPr/>
-        </p:nvPicPr>
-        <p:blipFill rotWithShape="1">
-          <a:blip r:embed="rId3">
-            <a:alphaModFix/>
-          </a:blip>
-          <a:srcRect/>
-          <a:stretch/>
-        </p:blipFill>
-        <p:spPr>
-          <a:xfrm>
-            <a:off x="473075" y="1933575"/>
-            <a:ext cx="7073900" cy="4775440"/>
-          </a:xfrm>
-          <a:prstGeom prst="rect">
-            <a:avLst/>
-          </a:prstGeom>
-          <a:noFill/>
-          <a:ln>
-            <a:noFill/>
-          </a:ln>
-        </p:spPr>
-      </p:pic>
       <p:sp>
         <p:nvSpPr>
-          <p:cNvPr id="237" name="Google Shape;237;p19"/>
-          <p:cNvSpPr txBox="1"/>
-          <p:nvPr/>
+          <p:cNvPr id="3" name="Text Placeholder 2">
+            <a:extLst>
+              <a:ext uri="{FF2B5EF4-FFF2-40B4-BE49-F238E27FC236}">
+                <a16:creationId xmlns:a16="http://schemas.microsoft.com/office/drawing/2014/main" id="{0089272E-7D3F-2286-DF19-BA0B993EC5F2}"/>
+              </a:ext>
+            </a:extLst>
+          </p:cNvPr>
+          <p:cNvSpPr>
+            <a:spLocks noGrp="1"/>
+          </p:cNvSpPr>
+          <p:nvPr>
+            <p:ph type="body" idx="1"/>
+          </p:nvPr>
         </p:nvSpPr>
-        <p:spPr>
-          <a:xfrm>
-            <a:off x="8658225" y="3171825"/>
-            <a:ext cx="2695575" cy="830997"/>
-          </a:xfrm>
-          <a:prstGeom prst="rect">
-            <a:avLst/>
-          </a:prstGeom>
-          <a:noFill/>
-          <a:ln>
-            <a:noFill/>
-          </a:ln>
-        </p:spPr>
+        <p:spPr/>
         <p:txBody>
-          <a:bodyPr spcFirstLastPara="1" wrap="square" lIns="91425" tIns="45700" rIns="91425" bIns="45700" anchor="t" anchorCtr="0">
-            <a:spAutoFit/>
-          </a:bodyPr>
+          <a:bodyPr/>
           <a:lstStyle/>
           <a:p>
-            <a:pPr marL="0" marR="0" lvl="0" indent="0" algn="ctr" rtl="0">
-              <a:spcBef>
-                <a:spcPts val="0"/>
-              </a:spcBef>
-              <a:spcAft>
-                <a:spcPts val="0"/>
-              </a:spcAft>
-              <a:buNone/>
-            </a:pPr>
             <a:r>
-              <a:rPr lang="en-US" sz="4800">
-                <a:solidFill>
-                  <a:schemeClr val="dk1"/>
-                </a:solidFill>
-                <a:latin typeface="Calibri"/>
-                <a:ea typeface="Calibri"/>
-                <a:cs typeface="Calibri"/>
-                <a:sym typeface="Calibri"/>
-              </a:rPr>
-              <a:t>ML?</a:t>
+              <a:rPr lang="en-US" dirty="0"/>
+              <a:t>About the R software</a:t>
             </a:r>
-            <a:endParaRPr/>
+          </a:p>
+          <a:p>
+            <a:r>
+              <a:rPr lang="en-US" dirty="0"/>
+              <a:t>About data</a:t>
+            </a:r>
+          </a:p>
+          <a:p>
+            <a:r>
+              <a:rPr lang="en-US" dirty="0"/>
+              <a:t>Spatial computation</a:t>
+            </a:r>
+          </a:p>
+          <a:p>
+            <a:r>
+              <a:rPr lang="en-US" dirty="0"/>
+              <a:t>Example: </a:t>
+            </a:r>
+            <a:r>
+              <a:rPr lang="en-US" i="1" dirty="0"/>
+              <a:t>Morpho </a:t>
+            </a:r>
+            <a:r>
+              <a:rPr lang="en-US" i="1" dirty="0" err="1"/>
+              <a:t>menelaus</a:t>
+            </a:r>
+            <a:endParaRPr lang="en-US" i="1" dirty="0"/>
           </a:p>
         </p:txBody>
       </p:sp>
     </p:spTree>
+    <p:extLst>
+      <p:ext uri="{BB962C8B-B14F-4D97-AF65-F5344CB8AC3E}">
+        <p14:creationId xmlns:p14="http://schemas.microsoft.com/office/powerpoint/2010/main" val="2488194110"/>
+      </p:ext>
+    </p:extLst>
   </p:cSld>
   <p:clrMapOvr>
     <a:masterClrMapping/>
@@ -14949,7 +16118,7 @@
 </p:sld>
 </file>
 
-<file path=ppt/slides/slide2.xml><?xml version="1.0" encoding="utf-8"?>
+<file path=ppt/slides/slide3.xml><?xml version="1.0" encoding="utf-8"?>
 <p:sld xmlns:a="http://schemas.openxmlformats.org/drawingml/2006/main" xmlns:r="http://schemas.openxmlformats.org/officeDocument/2006/relationships" xmlns:p="http://schemas.openxmlformats.org/presentationml/2006/main">
   <p:cSld>
     <p:spTree>
@@ -15013,10 +16182,10 @@
               <a:buNone/>
             </a:pPr>
             <a:r>
-              <a:rPr lang="en-US"/>
-              <a:t>What Can R software do?</a:t>
+              <a:rPr lang="en-US" dirty="0"/>
+              <a:t>What is the R software?</a:t>
             </a:r>
-            <a:endParaRPr/>
+            <a:endParaRPr dirty="0"/>
           </a:p>
         </p:txBody>
       </p:sp>
@@ -15066,10 +16235,10 @@
               <a:buChar char="•"/>
             </a:pPr>
             <a:r>
-              <a:rPr lang="en-US"/>
+              <a:rPr lang="en-US" dirty="0"/>
               <a:t>R is a computer language and computer environment used for:</a:t>
             </a:r>
-            <a:endParaRPr/>
+            <a:endParaRPr dirty="0"/>
           </a:p>
           <a:p>
             <a:pPr marL="685800" lvl="1" indent="-228600" algn="l" rtl="0">
@@ -15089,10 +16258,10 @@
               <a:buChar char="•"/>
             </a:pPr>
             <a:r>
-              <a:rPr lang="en-US"/>
+              <a:rPr lang="en-US" dirty="0"/>
               <a:t>Statistics</a:t>
             </a:r>
-            <a:endParaRPr/>
+            <a:endParaRPr dirty="0"/>
           </a:p>
           <a:p>
             <a:pPr marL="685800" lvl="1" indent="-228600" algn="l" rtl="0">
@@ -15112,10 +16281,10 @@
               <a:buChar char="•"/>
             </a:pPr>
             <a:r>
-              <a:rPr lang="en-US"/>
+              <a:rPr lang="en-US" dirty="0"/>
               <a:t>Data Analytics</a:t>
             </a:r>
-            <a:endParaRPr/>
+            <a:endParaRPr dirty="0"/>
           </a:p>
           <a:p>
             <a:pPr marL="685800" lvl="1" indent="-228600" algn="l" rtl="0">
@@ -15135,10 +16304,10 @@
               <a:buChar char="•"/>
             </a:pPr>
             <a:r>
-              <a:rPr lang="en-US"/>
+              <a:rPr lang="en-US" dirty="0"/>
               <a:t>Machine Learning</a:t>
             </a:r>
-            <a:endParaRPr/>
+            <a:endParaRPr dirty="0"/>
           </a:p>
           <a:p>
             <a:pPr marL="685800" lvl="1" indent="-228600" algn="l" rtl="0">
@@ -15158,10 +16327,10 @@
               <a:buChar char="•"/>
             </a:pPr>
             <a:r>
-              <a:rPr lang="en-US"/>
+              <a:rPr lang="en-US" dirty="0"/>
               <a:t>Mathematics</a:t>
             </a:r>
-            <a:endParaRPr/>
+            <a:endParaRPr dirty="0"/>
           </a:p>
           <a:p>
             <a:pPr marL="685800" lvl="1" indent="-228600" algn="l" rtl="0">
@@ -15181,10 +16350,44 @@
               <a:buChar char="•"/>
             </a:pPr>
             <a:r>
-              <a:rPr lang="en-US"/>
+              <a:rPr lang="en-US" dirty="0"/>
               <a:t>Modeling</a:t>
             </a:r>
-            <a:endParaRPr/>
+          </a:p>
+          <a:p>
+            <a:pPr marL="228600" indent="-228600">
+              <a:spcBef>
+                <a:spcPts val="500"/>
+              </a:spcBef>
+              <a:buSzPts val="2400"/>
+            </a:pPr>
+            <a:r>
+              <a:rPr lang="en-US" dirty="0"/>
+              <a:t>Benefits of learning R</a:t>
+            </a:r>
+            <a:endParaRPr dirty="0"/>
+          </a:p>
+          <a:p>
+            <a:pPr marL="692150" lvl="1" indent="-234950">
+              <a:buSzPts val="2400"/>
+            </a:pPr>
+            <a:r>
+              <a:rPr lang="en-US" dirty="0"/>
+              <a:t>Many schools expect that you will have some experience with R, python, or MATLAB. It is a huge education and career skill!</a:t>
+            </a:r>
+          </a:p>
+          <a:p>
+            <a:pPr marL="692150" lvl="1" indent="-234950">
+              <a:buSzPts val="2400"/>
+            </a:pPr>
+            <a:r>
+              <a:rPr lang="en-US" dirty="0" err="1"/>
+              <a:t>Rstudio</a:t>
+            </a:r>
+            <a:r>
+              <a:rPr lang="en-US" dirty="0"/>
+              <a:t> is an Integrated Development Environment that makes R easy to use.</a:t>
+            </a:r>
           </a:p>
           <a:p>
             <a:pPr marL="457200" lvl="1" indent="0" algn="l" rtl="0">
@@ -15203,72 +16406,7 @@
               <a:buSzPts val="2400"/>
               <a:buNone/>
             </a:pPr>
-            <a:endParaRPr/>
-          </a:p>
-          <a:p>
-            <a:pPr marL="457200" lvl="1" indent="0" algn="l" rtl="0">
-              <a:lnSpc>
-                <a:spcPct val="90000"/>
-              </a:lnSpc>
-              <a:spcBef>
-                <a:spcPts val="500"/>
-              </a:spcBef>
-              <a:spcAft>
-                <a:spcPts val="0"/>
-              </a:spcAft>
-              <a:buClr>
-                <a:schemeClr val="dk1"/>
-              </a:buClr>
-              <a:buSzPts val="2400"/>
-              <a:buNone/>
-            </a:pPr>
-            <a:r>
-              <a:rPr lang="en-US"/>
-              <a:t>Rstudio is an Integrated Development Environment that makes R easy to use.</a:t>
-            </a:r>
-            <a:endParaRPr/>
-          </a:p>
-          <a:p>
-            <a:pPr marL="457200" lvl="1" indent="0" algn="l" rtl="0">
-              <a:lnSpc>
-                <a:spcPct val="90000"/>
-              </a:lnSpc>
-              <a:spcBef>
-                <a:spcPts val="500"/>
-              </a:spcBef>
-              <a:spcAft>
-                <a:spcPts val="0"/>
-              </a:spcAft>
-              <a:buClr>
-                <a:schemeClr val="dk1"/>
-              </a:buClr>
-              <a:buSzPts val="2400"/>
-              <a:buNone/>
-            </a:pPr>
-            <a:endParaRPr/>
-          </a:p>
-          <a:p>
-            <a:pPr marL="457200" lvl="1" indent="0" algn="l" rtl="0">
-              <a:lnSpc>
-                <a:spcPct val="90000"/>
-              </a:lnSpc>
-              <a:spcBef>
-                <a:spcPts val="500"/>
-              </a:spcBef>
-              <a:spcAft>
-                <a:spcPts val="0"/>
-              </a:spcAft>
-              <a:buClr>
-                <a:schemeClr val="dk1"/>
-              </a:buClr>
-              <a:buSzPts val="2400"/>
-              <a:buNone/>
-            </a:pPr>
-            <a:r>
-              <a:rPr lang="en-US"/>
-              <a:t>Many schools expect that you will have some experience with R, python, or MATLAB. It is a huge education and career skill!</a:t>
-            </a:r>
-            <a:endParaRPr/>
+            <a:endParaRPr dirty="0"/>
           </a:p>
         </p:txBody>
       </p:sp>
@@ -15280,7 +16418,7 @@
 </p:sld>
 </file>
 
-<file path=ppt/slides/slide3.xml><?xml version="1.0" encoding="utf-8"?>
+<file path=ppt/slides/slide4.xml><?xml version="1.0" encoding="utf-8"?>
 <p:sld xmlns:a="http://schemas.openxmlformats.org/drawingml/2006/main" xmlns:r="http://schemas.openxmlformats.org/officeDocument/2006/relationships" xmlns:p="http://schemas.openxmlformats.org/presentationml/2006/main">
   <p:cSld>
     <p:spTree>
@@ -15397,10 +16535,10 @@
               <a:buChar char="•"/>
             </a:pPr>
             <a:r>
-              <a:rPr lang="en-US"/>
+              <a:rPr lang="en-US" dirty="0"/>
               <a:t>R has a syntax and learning the language is the first part of learning R.</a:t>
             </a:r>
-            <a:endParaRPr/>
+            <a:endParaRPr dirty="0"/>
           </a:p>
           <a:p>
             <a:pPr marL="228600" lvl="0" indent="-117475" algn="l" rtl="0">
@@ -15419,7 +16557,7 @@
               <a:buSzPct val="100000"/>
               <a:buNone/>
             </a:pPr>
-            <a:endParaRPr/>
+            <a:endParaRPr dirty="0"/>
           </a:p>
           <a:p>
             <a:pPr marL="228600" lvl="0" indent="-228600" algn="l" rtl="0">
@@ -15439,10 +16577,10 @@
               <a:buChar char="•"/>
             </a:pPr>
             <a:r>
-              <a:rPr lang="en-US"/>
-              <a:t>BUT R is very logical and pretty simple! </a:t>
+              <a:rPr lang="en-US" dirty="0"/>
+              <a:t>BUT…R is very logical and pretty simple! </a:t>
             </a:r>
-            <a:endParaRPr/>
+            <a:endParaRPr dirty="0"/>
           </a:p>
           <a:p>
             <a:pPr marL="228600" lvl="0" indent="-117475" algn="l" rtl="0">
@@ -15461,7 +16599,7 @@
               <a:buSzPct val="100000"/>
               <a:buNone/>
             </a:pPr>
-            <a:endParaRPr/>
+            <a:endParaRPr dirty="0"/>
           </a:p>
           <a:p>
             <a:pPr marL="228600" lvl="0" indent="-228600" algn="l" rtl="0">
@@ -15481,10 +16619,10 @@
               <a:buChar char="•"/>
             </a:pPr>
             <a:r>
-              <a:rPr lang="en-US"/>
+              <a:rPr lang="en-US" dirty="0"/>
               <a:t>It was made for statistics, which sounds dry but remember that statistics is a big part of daily life from sports to finance to science!</a:t>
             </a:r>
-            <a:endParaRPr/>
+            <a:endParaRPr dirty="0"/>
           </a:p>
           <a:p>
             <a:pPr marL="228600" lvl="0" indent="-117475" algn="l" rtl="0">
@@ -15503,7 +16641,7 @@
               <a:buSzPct val="100000"/>
               <a:buNone/>
             </a:pPr>
-            <a:endParaRPr/>
+            <a:endParaRPr dirty="0"/>
           </a:p>
           <a:p>
             <a:pPr marL="228600" lvl="0" indent="-228600" algn="l" rtl="0">
@@ -15523,10 +16661,10 @@
               <a:buChar char="•"/>
             </a:pPr>
             <a:r>
-              <a:rPr lang="en-US"/>
+              <a:rPr lang="en-US" dirty="0"/>
               <a:t>We can start slowly and build from there, just like anything on the computer. Think of it as learning a new type of game. </a:t>
             </a:r>
-            <a:endParaRPr/>
+            <a:endParaRPr dirty="0"/>
           </a:p>
           <a:p>
             <a:pPr marL="228600" lvl="0" indent="-117475" algn="l" rtl="0">
@@ -15545,7 +16683,7 @@
               <a:buSzPct val="100000"/>
               <a:buNone/>
             </a:pPr>
-            <a:endParaRPr/>
+            <a:endParaRPr dirty="0"/>
           </a:p>
           <a:p>
             <a:pPr marL="228600" lvl="0" indent="-228600" algn="l" rtl="0">
@@ -15565,10 +16703,10 @@
               <a:buChar char="•"/>
             </a:pPr>
             <a:r>
-              <a:rPr lang="en-US"/>
+              <a:rPr lang="en-US" dirty="0"/>
               <a:t>The nice thing about R is, like games, it is very visual. You can check to see what is working and you can make nice graphics. </a:t>
             </a:r>
-            <a:endParaRPr/>
+            <a:endParaRPr dirty="0"/>
           </a:p>
           <a:p>
             <a:pPr marL="228600" lvl="0" indent="-117475" algn="l" rtl="0">
@@ -15587,7 +16725,7 @@
               <a:buSzPct val="100000"/>
               <a:buNone/>
             </a:pPr>
-            <a:endParaRPr/>
+            <a:endParaRPr dirty="0"/>
           </a:p>
           <a:p>
             <a:pPr marL="228600" lvl="0" indent="-228600" algn="l" rtl="0">
@@ -15607,10 +16745,10 @@
               <a:buChar char="•"/>
             </a:pPr>
             <a:r>
-              <a:rPr lang="en-US"/>
+              <a:rPr lang="en-US" dirty="0"/>
               <a:t>With not much time and effort, you will feel comfortable typing commands in R, the input, and looking at what it does… the output!</a:t>
             </a:r>
-            <a:endParaRPr/>
+            <a:endParaRPr dirty="0"/>
           </a:p>
         </p:txBody>
       </p:sp>
@@ -15622,7 +16760,7 @@
 </p:sld>
 </file>
 
-<file path=ppt/slides/slide4.xml><?xml version="1.0" encoding="utf-8"?>
+<file path=ppt/slides/slide5.xml><?xml version="1.0" encoding="utf-8"?>
 <p:sld xmlns:a="http://schemas.openxmlformats.org/drawingml/2006/main" xmlns:r="http://schemas.openxmlformats.org/officeDocument/2006/relationships" xmlns:p="http://schemas.openxmlformats.org/presentationml/2006/main">
   <p:cSld>
     <p:spTree>
@@ -15705,7 +16843,7 @@
         </p:nvSpPr>
         <p:spPr>
           <a:xfrm>
-            <a:off x="838200" y="1825625"/>
+            <a:off x="663906" y="1599406"/>
             <a:ext cx="5181600" cy="4351338"/>
           </a:xfrm>
           <a:prstGeom prst="rect">
@@ -15718,7 +16856,7 @@
         </p:spPr>
         <p:txBody>
           <a:bodyPr spcFirstLastPara="1" wrap="square" lIns="91425" tIns="45700" rIns="91425" bIns="45700" anchor="t" anchorCtr="0">
-            <a:normAutofit fontScale="55000" lnSpcReduction="20000"/>
+            <a:noAutofit/>
           </a:bodyPr>
           <a:lstStyle/>
           <a:p>
@@ -15739,10 +16877,10 @@
               <a:buChar char="•"/>
             </a:pPr>
             <a:r>
-              <a:rPr lang="en-US"/>
+              <a:rPr lang="en-US" sz="1600" dirty="0"/>
               <a:t>A piece of data is usually considered a piece of factual information.</a:t>
             </a:r>
-            <a:endParaRPr/>
+            <a:endParaRPr sz="1600" dirty="0"/>
           </a:p>
           <a:p>
             <a:pPr marL="228600" lvl="0" indent="-130810" algn="l" rtl="0">
@@ -15761,7 +16899,7 @@
               <a:buSzPct val="100000"/>
               <a:buNone/>
             </a:pPr>
-            <a:endParaRPr/>
+            <a:endParaRPr sz="1600" dirty="0"/>
           </a:p>
           <a:p>
             <a:pPr marL="228600" lvl="0" indent="-228600" algn="l" rtl="0">
@@ -15781,10 +16919,10 @@
               <a:buChar char="•"/>
             </a:pPr>
             <a:r>
-              <a:rPr lang="en-US"/>
+              <a:rPr lang="en-US" sz="1600" dirty="0"/>
               <a:t>It’s often a number, say “53”, but it may be a name or character too, like ”mammal” or “%”</a:t>
             </a:r>
-            <a:endParaRPr/>
+            <a:endParaRPr sz="1600" dirty="0"/>
           </a:p>
           <a:p>
             <a:pPr marL="228600" lvl="0" indent="-130810" algn="l" rtl="0">
@@ -15803,7 +16941,7 @@
               <a:buSzPct val="100000"/>
               <a:buNone/>
             </a:pPr>
-            <a:endParaRPr/>
+            <a:endParaRPr sz="1600" dirty="0"/>
           </a:p>
           <a:p>
             <a:pPr marL="228600" lvl="0" indent="-228600" algn="l" rtl="0">
@@ -15823,10 +16961,18 @@
               <a:buChar char="•"/>
             </a:pPr>
             <a:r>
-              <a:rPr lang="en-US"/>
-              <a:t>Putting multiple data together gives you a vector. Vectors can be used in matrix math for predicting changes over time.</a:t>
+              <a:rPr lang="en-US" sz="1600" dirty="0"/>
+              <a:t>Putting multiple data together gives you a </a:t>
             </a:r>
-            <a:endParaRPr/>
+            <a:r>
+              <a:rPr lang="en-US" sz="1600" b="1" u="sng" dirty="0"/>
+              <a:t>vector</a:t>
+            </a:r>
+            <a:r>
+              <a:rPr lang="en-US" sz="1600" dirty="0"/>
+              <a:t>. Vectors can be used in matrix math for predicting changes over time.</a:t>
+            </a:r>
+            <a:endParaRPr sz="1600" dirty="0"/>
           </a:p>
           <a:p>
             <a:pPr marL="228600" lvl="0" indent="-130810" algn="l" rtl="0">
@@ -15845,7 +16991,7 @@
               <a:buSzPct val="100000"/>
               <a:buNone/>
             </a:pPr>
-            <a:endParaRPr/>
+            <a:endParaRPr sz="1600" dirty="0"/>
           </a:p>
           <a:p>
             <a:pPr marL="228600" lvl="0" indent="-228600" algn="l" rtl="0">
@@ -15865,10 +17011,34 @@
               <a:buChar char="•"/>
             </a:pPr>
             <a:r>
-              <a:rPr lang="en-US"/>
-              <a:t>Vectors can be combined to make lists or dataframes. Dataframes are commonly used in science as rows and columns of many variables over different conditions (ie, Excel sheets).</a:t>
+              <a:rPr lang="en-US" sz="1600" dirty="0"/>
+              <a:t>Vectors can be combined to make lists or </a:t>
             </a:r>
-            <a:endParaRPr/>
+            <a:r>
+              <a:rPr lang="en-US" sz="1600" b="1" u="sng" dirty="0" err="1"/>
+              <a:t>dataframes</a:t>
+            </a:r>
+            <a:r>
+              <a:rPr lang="en-US" sz="1600" dirty="0"/>
+              <a:t>. </a:t>
+            </a:r>
+            <a:r>
+              <a:rPr lang="en-US" sz="1600" dirty="0" err="1"/>
+              <a:t>Dataframes</a:t>
+            </a:r>
+            <a:r>
+              <a:rPr lang="en-US" sz="1600" dirty="0"/>
+              <a:t> are commonly used in science as rows and columns of many variables over different conditions (</a:t>
+            </a:r>
+            <a:r>
+              <a:rPr lang="en-US" sz="1600" dirty="0" err="1"/>
+              <a:t>ie</a:t>
+            </a:r>
+            <a:r>
+              <a:rPr lang="en-US" sz="1600" dirty="0"/>
+              <a:t>, Excel sheets).</a:t>
+            </a:r>
+            <a:endParaRPr sz="1600" dirty="0"/>
           </a:p>
           <a:p>
             <a:pPr marL="228600" lvl="0" indent="-130810" algn="l" rtl="0">
@@ -15887,7 +17057,7 @@
               <a:buSzPct val="100000"/>
               <a:buNone/>
             </a:pPr>
-            <a:endParaRPr/>
+            <a:endParaRPr sz="1600" dirty="0"/>
           </a:p>
           <a:p>
             <a:pPr marL="228600" lvl="0" indent="-228600" algn="l" rtl="0">
@@ -15907,10 +17077,10 @@
               <a:buChar char="•"/>
             </a:pPr>
             <a:r>
-              <a:rPr lang="en-US"/>
+              <a:rPr lang="en-US" sz="1600" dirty="0"/>
               <a:t>Functions allow you to manipulate data or create new data!</a:t>
             </a:r>
-            <a:endParaRPr/>
+            <a:endParaRPr sz="1600" dirty="0"/>
           </a:p>
         </p:txBody>
       </p:sp>
@@ -16037,7 +17207,7 @@
         </p:blipFill>
         <p:spPr>
           <a:xfrm>
-            <a:off x="7385049" y="4190768"/>
+            <a:off x="7402834" y="4001302"/>
             <a:ext cx="3455404" cy="2420984"/>
           </a:xfrm>
           <a:prstGeom prst="rect">
@@ -16157,7 +17327,7 @@
         </p:nvSpPr>
         <p:spPr>
           <a:xfrm>
-            <a:off x="8254035" y="3821436"/>
+            <a:off x="8271820" y="3631970"/>
             <a:ext cx="1615993" cy="369332"/>
           </a:xfrm>
           <a:prstGeom prst="rect">
@@ -16184,7 +17354,7 @@
               <a:buNone/>
             </a:pPr>
             <a:r>
-              <a:rPr lang="en-US" sz="1800" b="0" i="0" u="none" strike="noStrike" cap="none">
+              <a:rPr lang="en-US" sz="1800" b="0" i="0" u="none" strike="noStrike" cap="none" dirty="0" err="1">
                 <a:solidFill>
                   <a:schemeClr val="dk1"/>
                 </a:solidFill>
@@ -16195,7 +17365,7 @@
               </a:rPr>
               <a:t>Dataframe</a:t>
             </a:r>
-            <a:endParaRPr sz="1800" b="0" i="0" u="none" strike="noStrike" cap="none">
+            <a:endParaRPr sz="1800" b="0" i="0" u="none" strike="noStrike" cap="none" dirty="0">
               <a:solidFill>
                 <a:schemeClr val="dk1"/>
               </a:solidFill>
@@ -16215,7 +17385,7 @@
         </p:nvSpPr>
         <p:spPr>
           <a:xfrm>
-            <a:off x="4049883" y="6315645"/>
+            <a:off x="9062032" y="6488668"/>
             <a:ext cx="3305423" cy="369332"/>
           </a:xfrm>
           <a:prstGeom prst="rect">
@@ -16242,7 +17412,7 @@
               <a:buNone/>
             </a:pPr>
             <a:r>
-              <a:rPr lang="en-US" sz="1800" b="0" i="0" u="none" strike="noStrike" cap="none">
+              <a:rPr lang="en-US" sz="1800" b="0" i="0" u="none" strike="noStrike" cap="none" dirty="0">
                 <a:solidFill>
                   <a:schemeClr val="dk1"/>
                 </a:solidFill>
@@ -16251,9 +17421,45 @@
                 <a:cs typeface="Calibri"/>
                 <a:sym typeface="Calibri"/>
               </a:rPr>
-              <a:t>https://rspatial.org/index.html</a:t>
+              <a:t>https://</a:t>
             </a:r>
-            <a:endParaRPr sz="1800">
+            <a:r>
+              <a:rPr lang="en-US" sz="1800" b="0" i="0" u="none" strike="noStrike" cap="none" dirty="0" err="1">
+                <a:solidFill>
+                  <a:schemeClr val="dk1"/>
+                </a:solidFill>
+                <a:latin typeface="Calibri"/>
+                <a:ea typeface="Calibri"/>
+                <a:cs typeface="Calibri"/>
+                <a:sym typeface="Calibri"/>
+              </a:rPr>
+              <a:t>rspatial.org</a:t>
+            </a:r>
+            <a:r>
+              <a:rPr lang="en-US" sz="1800" b="0" i="0" u="none" strike="noStrike" cap="none" dirty="0">
+                <a:solidFill>
+                  <a:schemeClr val="dk1"/>
+                </a:solidFill>
+                <a:latin typeface="Calibri"/>
+                <a:ea typeface="Calibri"/>
+                <a:cs typeface="Calibri"/>
+                <a:sym typeface="Calibri"/>
+              </a:rPr>
+              <a:t>/</a:t>
+            </a:r>
+            <a:r>
+              <a:rPr lang="en-US" sz="1800" b="0" i="0" u="none" strike="noStrike" cap="none" dirty="0" err="1">
+                <a:solidFill>
+                  <a:schemeClr val="dk1"/>
+                </a:solidFill>
+                <a:latin typeface="Calibri"/>
+                <a:ea typeface="Calibri"/>
+                <a:cs typeface="Calibri"/>
+                <a:sym typeface="Calibri"/>
+              </a:rPr>
+              <a:t>index.html</a:t>
+            </a:r>
+            <a:endParaRPr sz="1800" dirty="0">
               <a:solidFill>
                 <a:schemeClr val="dk1"/>
               </a:solidFill>
@@ -16273,7 +17479,7 @@
 </p:sld>
 </file>
 
-<file path=ppt/slides/slide5.xml><?xml version="1.0" encoding="utf-8"?>
+<file path=ppt/slides/slide6.xml><?xml version="1.0" encoding="utf-8"?>
 <p:sld xmlns:a="http://schemas.openxmlformats.org/drawingml/2006/main" xmlns:r="http://schemas.openxmlformats.org/officeDocument/2006/relationships" xmlns:p="http://schemas.openxmlformats.org/presentationml/2006/main">
   <p:cSld>
     <p:spTree>
@@ -16337,10 +17543,10 @@
               <a:buNone/>
             </a:pPr>
             <a:r>
-              <a:rPr lang="en-US"/>
+              <a:rPr lang="en-US" dirty="0"/>
               <a:t>Raw data can be analyzed statistically for useful information!</a:t>
             </a:r>
-            <a:endParaRPr/>
+            <a:endParaRPr dirty="0"/>
           </a:p>
         </p:txBody>
       </p:sp>
@@ -16352,8 +17558,8 @@
         </p:nvSpPr>
         <p:spPr>
           <a:xfrm>
-            <a:off x="300036" y="2245558"/>
-            <a:ext cx="7400925" cy="4247317"/>
+            <a:off x="300036" y="1682215"/>
+            <a:ext cx="7400925" cy="4801274"/>
           </a:xfrm>
           <a:prstGeom prst="rect">
             <a:avLst/>
@@ -16379,7 +17585,50 @@
               <a:buNone/>
             </a:pPr>
             <a:r>
-              <a:rPr lang="en-US" sz="1800">
+              <a:rPr lang="en-US" sz="1800" dirty="0">
+                <a:solidFill>
+                  <a:schemeClr val="dk1"/>
+                </a:solidFill>
+                <a:latin typeface="Calibri"/>
+                <a:ea typeface="Calibri"/>
+                <a:cs typeface="Calibri"/>
+                <a:sym typeface="Calibri"/>
+              </a:rPr>
+              <a:t>Example: raw data</a:t>
+            </a:r>
+          </a:p>
+          <a:p>
+            <a:pPr marL="0" marR="0" lvl="0" indent="0" algn="l" rtl="0">
+              <a:spcBef>
+                <a:spcPts val="0"/>
+              </a:spcBef>
+              <a:spcAft>
+                <a:spcPts val="0"/>
+              </a:spcAft>
+              <a:buNone/>
+            </a:pPr>
+            <a:endParaRPr lang="en-US" sz="1800" dirty="0">
+              <a:solidFill>
+                <a:schemeClr val="dk1"/>
+              </a:solidFill>
+              <a:latin typeface="Calibri"/>
+              <a:ea typeface="Calibri"/>
+              <a:cs typeface="Calibri"/>
+              <a:sym typeface="Calibri"/>
+            </a:endParaRPr>
+          </a:p>
+          <a:p>
+            <a:pPr marL="0" marR="0" lvl="0" indent="0" algn="l" rtl="0">
+              <a:spcBef>
+                <a:spcPts val="0"/>
+              </a:spcBef>
+              <a:spcAft>
+                <a:spcPts val="0"/>
+              </a:spcAft>
+              <a:buNone/>
+            </a:pPr>
+            <a:r>
+              <a:rPr lang="en-US" sz="1800" dirty="0">
                 <a:solidFill>
                   <a:schemeClr val="dk1"/>
                 </a:solidFill>
@@ -16390,7 +17639,7 @@
               </a:rPr>
               <a:t>Data = c(24,13,56,23,34,78,45,34,23,5,9,32,17,65,54,12,4,89,56,33,76,67,19)</a:t>
             </a:r>
-            <a:endParaRPr/>
+            <a:endParaRPr dirty="0"/>
           </a:p>
           <a:p>
             <a:pPr marL="0" marR="0" lvl="0" indent="0" algn="l" rtl="0">
@@ -16402,7 +17651,7 @@
               </a:spcAft>
               <a:buNone/>
             </a:pPr>
-            <a:endParaRPr sz="1800">
+            <a:endParaRPr lang="en-US" sz="1800" dirty="0">
               <a:solidFill>
                 <a:schemeClr val="dk1"/>
               </a:solidFill>
@@ -16423,7 +17672,40 @@
               <a:buNone/>
             </a:pPr>
             <a:r>
-              <a:rPr lang="en-US" sz="1800">
+              <a:rPr lang="en-US" sz="1800" dirty="0">
+                <a:solidFill>
+                  <a:schemeClr val="dk1"/>
+                </a:solidFill>
+                <a:latin typeface="Calibri"/>
+                <a:ea typeface="Calibri"/>
+                <a:cs typeface="Calibri"/>
+                <a:sym typeface="Calibri"/>
+              </a:rPr>
+              <a:t>Information about the raw data:</a:t>
+            </a:r>
+            <a:endParaRPr sz="1800" dirty="0">
+              <a:solidFill>
+                <a:schemeClr val="dk1"/>
+              </a:solidFill>
+              <a:latin typeface="Calibri"/>
+              <a:ea typeface="Calibri"/>
+              <a:cs typeface="Calibri"/>
+              <a:sym typeface="Calibri"/>
+            </a:endParaRPr>
+          </a:p>
+          <a:p>
+            <a:pPr marL="285750" marR="0" lvl="0" indent="-285750" algn="l" rtl="0">
+              <a:spcBef>
+                <a:spcPts val="0"/>
+              </a:spcBef>
+              <a:spcAft>
+                <a:spcPts val="0"/>
+              </a:spcAft>
+              <a:buFont typeface="Arial" panose="020B0604020202020204" pitchFamily="34" charset="0"/>
+              <a:buChar char="•"/>
+            </a:pPr>
+            <a:r>
+              <a:rPr lang="en-US" sz="1800" dirty="0">
                 <a:solidFill>
                   <a:schemeClr val="dk1"/>
                 </a:solidFill>
@@ -16434,19 +17716,20 @@
               </a:rPr>
               <a:t>N = 23</a:t>
             </a:r>
-            <a:endParaRPr/>
-          </a:p>
-          <a:p>
-            <a:pPr marL="0" marR="0" lvl="0" indent="0" algn="l" rtl="0">
-              <a:spcBef>
-                <a:spcPts val="0"/>
-              </a:spcBef>
-              <a:spcAft>
-                <a:spcPts val="0"/>
-              </a:spcAft>
-              <a:buNone/>
+            <a:endParaRPr dirty="0"/>
+          </a:p>
+          <a:p>
+            <a:pPr marL="285750" marR="0" lvl="0" indent="-285750" algn="l" rtl="0">
+              <a:spcBef>
+                <a:spcPts val="0"/>
+              </a:spcBef>
+              <a:spcAft>
+                <a:spcPts val="0"/>
+              </a:spcAft>
+              <a:buFont typeface="Arial" panose="020B0604020202020204" pitchFamily="34" charset="0"/>
+              <a:buChar char="•"/>
             </a:pPr>
-            <a:endParaRPr sz="1800">
+            <a:endParaRPr sz="1800" dirty="0">
               <a:solidFill>
                 <a:schemeClr val="dk1"/>
               </a:solidFill>
@@ -16457,17 +17740,18 @@
             </a:endParaRPr>
           </a:p>
           <a:p>
-            <a:pPr marL="0" marR="0" lvl="0" indent="0" algn="l" rtl="0">
-              <a:spcBef>
-                <a:spcPts val="0"/>
-              </a:spcBef>
-              <a:spcAft>
-                <a:spcPts val="0"/>
-              </a:spcAft>
-              <a:buNone/>
+            <a:pPr marL="285750" marR="0" lvl="0" indent="-285750" algn="l" rtl="0">
+              <a:spcBef>
+                <a:spcPts val="0"/>
+              </a:spcBef>
+              <a:spcAft>
+                <a:spcPts val="0"/>
+              </a:spcAft>
+              <a:buFont typeface="Arial" panose="020B0604020202020204" pitchFamily="34" charset="0"/>
+              <a:buChar char="•"/>
             </a:pPr>
             <a:r>
-              <a:rPr lang="en-US" sz="1800">
+              <a:rPr lang="en-US" sz="1800" dirty="0">
                 <a:solidFill>
                   <a:schemeClr val="dk1"/>
                 </a:solidFill>
@@ -16478,19 +17762,20 @@
               </a:rPr>
               <a:t>Mean(Data) = sum(Data)/N = 37.73913</a:t>
             </a:r>
-            <a:endParaRPr/>
-          </a:p>
-          <a:p>
-            <a:pPr marL="0" marR="0" lvl="0" indent="0" algn="l" rtl="0">
-              <a:spcBef>
-                <a:spcPts val="0"/>
-              </a:spcBef>
-              <a:spcAft>
-                <a:spcPts val="0"/>
-              </a:spcAft>
-              <a:buNone/>
+            <a:endParaRPr dirty="0"/>
+          </a:p>
+          <a:p>
+            <a:pPr marL="285750" marR="0" lvl="0" indent="-285750" algn="l" rtl="0">
+              <a:spcBef>
+                <a:spcPts val="0"/>
+              </a:spcBef>
+              <a:spcAft>
+                <a:spcPts val="0"/>
+              </a:spcAft>
+              <a:buFont typeface="Arial" panose="020B0604020202020204" pitchFamily="34" charset="0"/>
+              <a:buChar char="•"/>
             </a:pPr>
-            <a:endParaRPr sz="1800">
+            <a:endParaRPr sz="1800" dirty="0">
               <a:solidFill>
                 <a:schemeClr val="dk1"/>
               </a:solidFill>
@@ -16501,17 +17786,18 @@
             </a:endParaRPr>
           </a:p>
           <a:p>
-            <a:pPr marL="0" marR="0" lvl="0" indent="0" algn="l" rtl="0">
-              <a:spcBef>
-                <a:spcPts val="0"/>
-              </a:spcBef>
-              <a:spcAft>
-                <a:spcPts val="0"/>
-              </a:spcAft>
-              <a:buNone/>
+            <a:pPr marL="285750" marR="0" lvl="0" indent="-285750" algn="l" rtl="0">
+              <a:spcBef>
+                <a:spcPts val="0"/>
+              </a:spcBef>
+              <a:spcAft>
+                <a:spcPts val="0"/>
+              </a:spcAft>
+              <a:buFont typeface="Arial" panose="020B0604020202020204" pitchFamily="34" charset="0"/>
+              <a:buChar char="•"/>
             </a:pPr>
             <a:r>
-              <a:rPr lang="en-US" sz="1800">
+              <a:rPr lang="en-US" sz="1800" dirty="0">
                 <a:solidFill>
                   <a:schemeClr val="dk1"/>
                 </a:solidFill>
@@ -16522,19 +17808,20 @@
               </a:rPr>
               <a:t>Median = median(Data) = 33</a:t>
             </a:r>
-            <a:endParaRPr/>
-          </a:p>
-          <a:p>
-            <a:pPr marL="0" marR="0" lvl="0" indent="0" algn="l" rtl="0">
-              <a:spcBef>
-                <a:spcPts val="0"/>
-              </a:spcBef>
-              <a:spcAft>
-                <a:spcPts val="0"/>
-              </a:spcAft>
-              <a:buNone/>
+            <a:endParaRPr dirty="0"/>
+          </a:p>
+          <a:p>
+            <a:pPr marL="285750" marR="0" lvl="0" indent="-285750" algn="l" rtl="0">
+              <a:spcBef>
+                <a:spcPts val="0"/>
+              </a:spcBef>
+              <a:spcAft>
+                <a:spcPts val="0"/>
+              </a:spcAft>
+              <a:buFont typeface="Arial" panose="020B0604020202020204" pitchFamily="34" charset="0"/>
+              <a:buChar char="•"/>
             </a:pPr>
-            <a:endParaRPr sz="1800">
+            <a:endParaRPr sz="1800" dirty="0">
               <a:solidFill>
                 <a:schemeClr val="dk1"/>
               </a:solidFill>
@@ -16545,17 +17832,18 @@
             </a:endParaRPr>
           </a:p>
           <a:p>
-            <a:pPr marL="0" marR="0" lvl="0" indent="0" algn="l" rtl="0">
-              <a:spcBef>
-                <a:spcPts val="0"/>
-              </a:spcBef>
-              <a:spcAft>
-                <a:spcPts val="0"/>
-              </a:spcAft>
-              <a:buNone/>
+            <a:pPr marL="285750" marR="0" lvl="0" indent="-285750" algn="l" rtl="0">
+              <a:spcBef>
+                <a:spcPts val="0"/>
+              </a:spcBef>
+              <a:spcAft>
+                <a:spcPts val="0"/>
+              </a:spcAft>
+              <a:buFont typeface="Arial" panose="020B0604020202020204" pitchFamily="34" charset="0"/>
+              <a:buChar char="•"/>
             </a:pPr>
             <a:r>
-              <a:rPr lang="en-US" sz="1800">
+              <a:rPr lang="en-US" sz="1800" dirty="0">
                 <a:solidFill>
                   <a:schemeClr val="dk1"/>
                 </a:solidFill>
@@ -16566,19 +17854,20 @@
               </a:rPr>
               <a:t>Mode = mode(Data) = 23, 34, 56</a:t>
             </a:r>
-            <a:endParaRPr/>
-          </a:p>
-          <a:p>
-            <a:pPr marL="0" marR="0" lvl="0" indent="0" algn="l" rtl="0">
-              <a:spcBef>
-                <a:spcPts val="0"/>
-              </a:spcBef>
-              <a:spcAft>
-                <a:spcPts val="0"/>
-              </a:spcAft>
-              <a:buNone/>
+            <a:endParaRPr dirty="0"/>
+          </a:p>
+          <a:p>
+            <a:pPr marL="285750" marR="0" lvl="0" indent="-285750" algn="l" rtl="0">
+              <a:spcBef>
+                <a:spcPts val="0"/>
+              </a:spcBef>
+              <a:spcAft>
+                <a:spcPts val="0"/>
+              </a:spcAft>
+              <a:buFont typeface="Arial" panose="020B0604020202020204" pitchFamily="34" charset="0"/>
+              <a:buChar char="•"/>
             </a:pPr>
-            <a:endParaRPr sz="1800">
+            <a:endParaRPr sz="1800" dirty="0">
               <a:solidFill>
                 <a:schemeClr val="dk1"/>
               </a:solidFill>
@@ -16589,17 +17878,18 @@
             </a:endParaRPr>
           </a:p>
           <a:p>
-            <a:pPr marL="0" marR="0" lvl="0" indent="0" algn="l" rtl="0">
-              <a:spcBef>
-                <a:spcPts val="0"/>
-              </a:spcBef>
-              <a:spcAft>
-                <a:spcPts val="0"/>
-              </a:spcAft>
-              <a:buNone/>
+            <a:pPr marL="285750" marR="0" lvl="0" indent="-285750" algn="l" rtl="0">
+              <a:spcBef>
+                <a:spcPts val="0"/>
+              </a:spcBef>
+              <a:spcAft>
+                <a:spcPts val="0"/>
+              </a:spcAft>
+              <a:buFont typeface="Arial" panose="020B0604020202020204" pitchFamily="34" charset="0"/>
+              <a:buChar char="•"/>
             </a:pPr>
             <a:r>
-              <a:rPr lang="en-US" sz="1800">
+              <a:rPr lang="en-US" sz="1800" dirty="0">
                 <a:solidFill>
                   <a:schemeClr val="dk1"/>
                 </a:solidFill>
@@ -16610,19 +17900,20 @@
               </a:rPr>
               <a:t>Variance = (Xi-Mean)^2 = 640.6561</a:t>
             </a:r>
-            <a:endParaRPr/>
-          </a:p>
-          <a:p>
-            <a:pPr marL="0" marR="0" lvl="0" indent="0" algn="l" rtl="0">
-              <a:spcBef>
-                <a:spcPts val="0"/>
-              </a:spcBef>
-              <a:spcAft>
-                <a:spcPts val="0"/>
-              </a:spcAft>
-              <a:buNone/>
+            <a:endParaRPr dirty="0"/>
+          </a:p>
+          <a:p>
+            <a:pPr marL="285750" marR="0" lvl="0" indent="-285750" algn="l" rtl="0">
+              <a:spcBef>
+                <a:spcPts val="0"/>
+              </a:spcBef>
+              <a:spcAft>
+                <a:spcPts val="0"/>
+              </a:spcAft>
+              <a:buFont typeface="Arial" panose="020B0604020202020204" pitchFamily="34" charset="0"/>
+              <a:buChar char="•"/>
             </a:pPr>
-            <a:endParaRPr sz="1800">
+            <a:endParaRPr sz="1800" dirty="0">
               <a:solidFill>
                 <a:schemeClr val="dk1"/>
               </a:solidFill>
@@ -16633,17 +17924,18 @@
             </a:endParaRPr>
           </a:p>
           <a:p>
-            <a:pPr marL="0" marR="0" lvl="0" indent="0" algn="l" rtl="0">
-              <a:spcBef>
-                <a:spcPts val="0"/>
-              </a:spcBef>
-              <a:spcAft>
-                <a:spcPts val="0"/>
-              </a:spcAft>
-              <a:buNone/>
+            <a:pPr marL="285750" marR="0" lvl="0" indent="-285750" algn="l" rtl="0">
+              <a:spcBef>
+                <a:spcPts val="0"/>
+              </a:spcBef>
+              <a:spcAft>
+                <a:spcPts val="0"/>
+              </a:spcAft>
+              <a:buFont typeface="Arial" panose="020B0604020202020204" pitchFamily="34" charset="0"/>
+              <a:buChar char="•"/>
             </a:pPr>
             <a:r>
-              <a:rPr lang="en-US" sz="1800">
+              <a:rPr lang="en-US" sz="1800" dirty="0">
                 <a:solidFill>
                   <a:schemeClr val="dk1"/>
                 </a:solidFill>
@@ -16654,7 +17946,7 @@
               </a:rPr>
               <a:t>SD = sqrt(var) = 25.31119</a:t>
             </a:r>
-            <a:endParaRPr/>
+            <a:endParaRPr dirty="0"/>
           </a:p>
           <a:p>
             <a:pPr marL="0" marR="0" lvl="0" indent="0" algn="l" rtl="0">
@@ -16666,27 +17958,7 @@
               </a:spcAft>
               <a:buNone/>
             </a:pPr>
-            <a:endParaRPr sz="1800">
-              <a:solidFill>
-                <a:schemeClr val="dk1"/>
-              </a:solidFill>
-              <a:latin typeface="Calibri"/>
-              <a:ea typeface="Calibri"/>
-              <a:cs typeface="Calibri"/>
-              <a:sym typeface="Calibri"/>
-            </a:endParaRPr>
-          </a:p>
-          <a:p>
-            <a:pPr marL="0" marR="0" lvl="0" indent="0" algn="l" rtl="0">
-              <a:spcBef>
-                <a:spcPts val="0"/>
-              </a:spcBef>
-              <a:spcAft>
-                <a:spcPts val="0"/>
-              </a:spcAft>
-              <a:buNone/>
-            </a:pPr>
-            <a:endParaRPr sz="1800">
+            <a:endParaRPr sz="1800" dirty="0">
               <a:solidFill>
                 <a:schemeClr val="dk1"/>
               </a:solidFill>
@@ -16760,7 +18032,7 @@
         </p:nvSpPr>
         <p:spPr>
           <a:xfrm>
-            <a:off x="8715375" y="4729163"/>
+            <a:off x="8542721" y="4486586"/>
             <a:ext cx="3057525" cy="2031325"/>
           </a:xfrm>
           <a:prstGeom prst="rect">
@@ -16787,7 +18059,7 @@
               <a:buNone/>
             </a:pPr>
             <a:r>
-              <a:rPr lang="en-US" sz="1800" b="1">
+              <a:rPr lang="en-US" sz="1800" b="1" dirty="0">
                 <a:solidFill>
                   <a:srgbClr val="C00000"/>
                 </a:solidFill>
@@ -16798,7 +18070,7 @@
               </a:rPr>
               <a:t>Data is often a sample from a population.</a:t>
             </a:r>
-            <a:endParaRPr/>
+            <a:endParaRPr dirty="0"/>
           </a:p>
           <a:p>
             <a:pPr marL="0" marR="0" lvl="0" indent="0" algn="l" rtl="0">
@@ -16810,7 +18082,7 @@
               </a:spcAft>
               <a:buNone/>
             </a:pPr>
-            <a:endParaRPr sz="1800" b="1">
+            <a:endParaRPr sz="1800" b="1" dirty="0">
               <a:solidFill>
                 <a:srgbClr val="C00000"/>
               </a:solidFill>
@@ -16831,7 +18103,7 @@
               <a:buNone/>
             </a:pPr>
             <a:r>
-              <a:rPr lang="en-US" sz="1800" b="1">
+              <a:rPr lang="en-US" sz="1800" b="1" dirty="0">
                 <a:solidFill>
                   <a:srgbClr val="C00000"/>
                 </a:solidFill>
@@ -16842,7 +18114,7 @@
               </a:rPr>
               <a:t>Using statistics, you can make confident inferences about the population from the small sample that you have!</a:t>
             </a:r>
-            <a:endParaRPr/>
+            <a:endParaRPr dirty="0"/>
           </a:p>
         </p:txBody>
       </p:sp>
@@ -16854,7 +18126,7 @@
 </p:sld>
 </file>
 
-<file path=ppt/slides/slide6.xml><?xml version="1.0" encoding="utf-8"?>
+<file path=ppt/slides/slide7.xml><?xml version="1.0" encoding="utf-8"?>
 <p:sld xmlns:a="http://schemas.openxmlformats.org/drawingml/2006/main" xmlns:r="http://schemas.openxmlformats.org/officeDocument/2006/relationships" xmlns:p="http://schemas.openxmlformats.org/presentationml/2006/main">
   <p:cSld>
     <p:spTree>
@@ -16900,28 +18172,18 @@
           </a:bodyPr>
           <a:lstStyle/>
           <a:p>
-            <a:pPr marL="0" lvl="0" indent="0" algn="l" rtl="0">
-              <a:lnSpc>
-                <a:spcPct val="90000"/>
-              </a:lnSpc>
-              <a:spcBef>
-                <a:spcPts val="0"/>
-              </a:spcBef>
-              <a:spcAft>
-                <a:spcPts val="0"/>
-              </a:spcAft>
-              <a:buClr>
-                <a:schemeClr val="dk1"/>
-              </a:buClr>
+            <a:pPr lvl="0">
               <a:buSzPts val="4400"/>
-              <a:buFont typeface="Calibri"/>
-              <a:buNone/>
             </a:pPr>
             <a:r>
-              <a:rPr lang="en-US"/>
-              <a:t>Latitude and Longitude - Geocomputation</a:t>
+              <a:rPr lang="en-US" dirty="0" err="1"/>
+              <a:t>Geocomputation</a:t>
             </a:r>
-            <a:endParaRPr/>
+            <a:r>
+              <a:rPr lang="en-US" dirty="0"/>
+              <a:t>: examining attributes across space (e.g., by latitude and longitude) </a:t>
+            </a:r>
+            <a:endParaRPr dirty="0"/>
           </a:p>
         </p:txBody>
       </p:sp>
@@ -16940,7 +18202,7 @@
         </p:blipFill>
         <p:spPr>
           <a:xfrm>
-            <a:off x="534989" y="4125474"/>
+            <a:off x="662310" y="4195371"/>
             <a:ext cx="4581524" cy="2624831"/>
           </a:xfrm>
           <a:prstGeom prst="rect">
@@ -16960,8 +18222,8 @@
         </p:nvSpPr>
         <p:spPr>
           <a:xfrm>
-            <a:off x="6858000" y="5957888"/>
-            <a:ext cx="4229100" cy="369332"/>
+            <a:off x="7788228" y="6308209"/>
+            <a:ext cx="3055804" cy="369332"/>
           </a:xfrm>
           <a:prstGeom prst="rect">
             <a:avLst/>
@@ -16987,7 +18249,7 @@
               <a:buNone/>
             </a:pPr>
             <a:r>
-              <a:rPr lang="en-US" sz="1800">
+              <a:rPr lang="en-US" sz="1800" dirty="0">
                 <a:solidFill>
                   <a:schemeClr val="dk1"/>
                 </a:solidFill>
@@ -16996,9 +18258,33 @@
                 <a:cs typeface="Calibri"/>
                 <a:sym typeface="Calibri"/>
               </a:rPr>
-              <a:t>https://r.geocompx.org/</a:t>
+              <a:t>https://</a:t>
             </a:r>
-            <a:endParaRPr/>
+            <a:r>
+              <a:rPr lang="en-US" sz="1800" dirty="0" err="1">
+                <a:solidFill>
+                  <a:schemeClr val="dk1"/>
+                </a:solidFill>
+                <a:latin typeface="Calibri"/>
+                <a:ea typeface="Calibri"/>
+                <a:cs typeface="Calibri"/>
+                <a:sym typeface="Calibri"/>
+              </a:rPr>
+              <a:t>r.geocompx.org</a:t>
+            </a:r>
+            <a:r>
+              <a:rPr lang="en-US" sz="1800" dirty="0">
+                <a:solidFill>
+                  <a:schemeClr val="dk1"/>
+                </a:solidFill>
+                <a:latin typeface="Calibri"/>
+                <a:ea typeface="Calibri"/>
+                <a:cs typeface="Calibri"/>
+                <a:sym typeface="Calibri"/>
+              </a:rPr>
+              <a:t>/</a:t>
+            </a:r>
+            <a:endParaRPr dirty="0"/>
           </a:p>
         </p:txBody>
       </p:sp>
@@ -17010,8 +18296,8 @@
         </p:nvSpPr>
         <p:spPr>
           <a:xfrm>
-            <a:off x="838200" y="1817150"/>
-            <a:ext cx="4349261" cy="2308324"/>
+            <a:off x="819945" y="1817190"/>
+            <a:ext cx="4581524" cy="2308284"/>
           </a:xfrm>
           <a:prstGeom prst="rect">
             <a:avLst/>
@@ -17037,7 +18323,7 @@
               <a:buNone/>
             </a:pPr>
             <a:r>
-              <a:rPr lang="en-US" sz="1800">
+              <a:rPr lang="en-US" sz="1800" dirty="0">
                 <a:solidFill>
                   <a:schemeClr val="accent1"/>
                 </a:solidFill>
@@ -17048,7 +18334,7 @@
               </a:rPr>
               <a:t>Data science, ecology, and geography go hand in hand</a:t>
             </a:r>
-            <a:endParaRPr/>
+            <a:endParaRPr sz="1800" dirty="0"/>
           </a:p>
           <a:p>
             <a:pPr marL="0" marR="0" lvl="0" indent="0" algn="l" rtl="0">
@@ -17060,7 +18346,7 @@
               </a:spcAft>
               <a:buNone/>
             </a:pPr>
-            <a:endParaRPr sz="1800">
+            <a:endParaRPr sz="1800" dirty="0">
               <a:solidFill>
                 <a:schemeClr val="accent1"/>
               </a:solidFill>
@@ -17081,7 +18367,7 @@
               <a:buNone/>
             </a:pPr>
             <a:r>
-              <a:rPr lang="en-US" sz="1800">
+              <a:rPr lang="en-US" sz="1800" dirty="0">
                 <a:solidFill>
                   <a:schemeClr val="accent1"/>
                 </a:solidFill>
@@ -17092,7 +18378,7 @@
               </a:rPr>
               <a:t>Climate change is driving the integration of these fields to solve important problems</a:t>
             </a:r>
-            <a:endParaRPr/>
+            <a:endParaRPr sz="1800" dirty="0"/>
           </a:p>
           <a:p>
             <a:pPr marL="0" marR="0" lvl="0" indent="0" algn="l" rtl="0">
@@ -17104,7 +18390,7 @@
               </a:spcAft>
               <a:buNone/>
             </a:pPr>
-            <a:endParaRPr sz="1800">
+            <a:endParaRPr sz="1800" dirty="0">
               <a:solidFill>
                 <a:schemeClr val="accent1"/>
               </a:solidFill>
@@ -17125,7 +18411,7 @@
               <a:buNone/>
             </a:pPr>
             <a:r>
-              <a:rPr lang="en-US" sz="1800">
+              <a:rPr lang="en-US" sz="1800" dirty="0">
                 <a:solidFill>
                   <a:schemeClr val="accent1"/>
                 </a:solidFill>
@@ -17136,7 +18422,7 @@
               </a:rPr>
               <a:t>Understanding all of this is important not just for science but business and society!</a:t>
             </a:r>
-            <a:endParaRPr/>
+            <a:endParaRPr sz="1800" dirty="0"/>
           </a:p>
         </p:txBody>
       </p:sp>
@@ -17155,7 +18441,7 @@
         </p:blipFill>
         <p:spPr>
           <a:xfrm>
-            <a:off x="5686424" y="1651727"/>
+            <a:off x="5686424" y="1817190"/>
             <a:ext cx="5970587" cy="3871887"/>
           </a:xfrm>
           <a:prstGeom prst="rect">
@@ -17175,7 +18461,121 @@
 </p:sld>
 </file>
 
-<file path=ppt/slides/slide7.xml><?xml version="1.0" encoding="utf-8"?>
+<file path=ppt/slides/slide8.xml><?xml version="1.0" encoding="utf-8"?>
+<p:sld xmlns:a="http://schemas.openxmlformats.org/drawingml/2006/main" xmlns:r="http://schemas.openxmlformats.org/officeDocument/2006/relationships" xmlns:p="http://schemas.openxmlformats.org/presentationml/2006/main">
+  <p:cSld>
+    <p:spTree>
+      <p:nvGrpSpPr>
+        <p:cNvPr id="1" name="Shape 188"/>
+        <p:cNvGrpSpPr/>
+        <p:nvPr/>
+      </p:nvGrpSpPr>
+      <p:grpSpPr>
+        <a:xfrm>
+          <a:off x="0" y="0"/>
+          <a:ext cx="0" cy="0"/>
+          <a:chOff x="0" y="0"/>
+          <a:chExt cx="0" cy="0"/>
+        </a:xfrm>
+      </p:grpSpPr>
+      <p:sp>
+        <p:nvSpPr>
+          <p:cNvPr id="189" name="Google Shape;189;p13"/>
+          <p:cNvSpPr txBox="1">
+            <a:spLocks noGrp="1"/>
+          </p:cNvSpPr>
+          <p:nvPr>
+            <p:ph type="title"/>
+          </p:nvPr>
+        </p:nvSpPr>
+        <p:spPr>
+          <a:xfrm>
+            <a:off x="838200" y="365125"/>
+            <a:ext cx="10515600" cy="1325563"/>
+          </a:xfrm>
+          <a:prstGeom prst="rect">
+            <a:avLst/>
+          </a:prstGeom>
+          <a:noFill/>
+          <a:ln>
+            <a:noFill/>
+          </a:ln>
+        </p:spPr>
+        <p:txBody>
+          <a:bodyPr spcFirstLastPara="1" wrap="square" lIns="91425" tIns="45700" rIns="91425" bIns="45700" anchor="ctr" anchorCtr="0">
+            <a:normAutofit/>
+          </a:bodyPr>
+          <a:lstStyle/>
+          <a:p>
+            <a:pPr marL="0" lvl="0" indent="0" algn="l" rtl="0">
+              <a:lnSpc>
+                <a:spcPct val="90000"/>
+              </a:lnSpc>
+              <a:spcBef>
+                <a:spcPts val="0"/>
+              </a:spcBef>
+              <a:spcAft>
+                <a:spcPts val="0"/>
+              </a:spcAft>
+              <a:buClr>
+                <a:schemeClr val="dk1"/>
+              </a:buClr>
+              <a:buSzPts val="4400"/>
+              <a:buFont typeface="Calibri"/>
+              <a:buNone/>
+            </a:pPr>
+            <a:r>
+              <a:rPr lang="en-US" dirty="0"/>
+              <a:t>https://</a:t>
+            </a:r>
+            <a:r>
+              <a:rPr lang="en-US" dirty="0" err="1"/>
+              <a:t>r.geocompx.org</a:t>
+            </a:r>
+            <a:r>
+              <a:rPr lang="en-US" dirty="0"/>
+              <a:t>/</a:t>
+            </a:r>
+            <a:endParaRPr dirty="0"/>
+          </a:p>
+        </p:txBody>
+      </p:sp>
+      <p:pic>
+        <p:nvPicPr>
+          <p:cNvPr id="190" name="Google Shape;190;p13" descr="A screenshot of a book  Description automatically generated"/>
+          <p:cNvPicPr preferRelativeResize="0"/>
+          <p:nvPr/>
+        </p:nvPicPr>
+        <p:blipFill rotWithShape="1">
+          <a:blip r:embed="rId3">
+            <a:alphaModFix/>
+          </a:blip>
+          <a:srcRect/>
+          <a:stretch/>
+        </p:blipFill>
+        <p:spPr>
+          <a:xfrm>
+            <a:off x="1028700" y="1932245"/>
+            <a:ext cx="10134600" cy="4925755"/>
+          </a:xfrm>
+          <a:prstGeom prst="rect">
+            <a:avLst/>
+          </a:prstGeom>
+          <a:noFill/>
+          <a:ln>
+            <a:noFill/>
+          </a:ln>
+        </p:spPr>
+      </p:pic>
+    </p:spTree>
+  </p:cSld>
+  <p:clrMapOvr>
+    <a:masterClrMapping/>
+  </p:clrMapOvr>
+</p:sld>
+</file>
+
+<file path=ppt/slides/slide9.xml><?xml version="1.0" encoding="utf-8"?>
 <p:sld xmlns:a="http://schemas.openxmlformats.org/drawingml/2006/main" xmlns:r="http://schemas.openxmlformats.org/officeDocument/2006/relationships" xmlns:p="http://schemas.openxmlformats.org/presentationml/2006/main">
   <p:cSld>
     <p:spTree>
@@ -17228,7 +18628,7 @@
         <p:spPr>
           <a:xfrm>
             <a:off x="721895" y="589547"/>
-            <a:ext cx="5847347" cy="3139321"/>
+            <a:ext cx="6257639" cy="3139281"/>
           </a:xfrm>
           <a:prstGeom prst="rect">
             <a:avLst/>
@@ -17254,18 +18654,22 @@
               <a:buNone/>
             </a:pPr>
             <a:r>
-              <a:rPr lang="en-US" sz="3600" b="1">
+              <a:rPr lang="en-US" sz="3600" dirty="0">
                 <a:solidFill>
-                  <a:srgbClr val="FF0000"/>
+                  <a:schemeClr val="tx1"/>
                 </a:solidFill>
                 <a:latin typeface="Calibri"/>
                 <a:ea typeface="Calibri"/>
                 <a:cs typeface="Calibri"/>
                 <a:sym typeface="Calibri"/>
               </a:rPr>
-              <a:t>Elevation in Germany</a:t>
+              <a:t>Example: Elevation in Germany</a:t>
             </a:r>
-            <a:endParaRPr/>
+            <a:endParaRPr dirty="0">
+              <a:solidFill>
+                <a:schemeClr val="tx1"/>
+              </a:solidFill>
+            </a:endParaRPr>
           </a:p>
           <a:p>
             <a:pPr marL="0" marR="0" lvl="0" indent="0" algn="l" rtl="0">
@@ -17277,7 +18681,7 @@
               </a:spcAft>
               <a:buNone/>
             </a:pPr>
-            <a:endParaRPr sz="1800">
+            <a:endParaRPr sz="1800" dirty="0">
               <a:solidFill>
                 <a:schemeClr val="dk1"/>
               </a:solidFill>
@@ -17297,7 +18701,7 @@
               </a:spcAft>
               <a:buNone/>
             </a:pPr>
-            <a:endParaRPr sz="1800">
+            <a:endParaRPr sz="1800" dirty="0">
               <a:solidFill>
                 <a:schemeClr val="dk1"/>
               </a:solidFill>
@@ -17318,7 +18722,7 @@
               <a:buNone/>
             </a:pPr>
             <a:r>
-              <a:rPr lang="en-US" sz="1800">
+              <a:rPr lang="en-US" sz="1800" dirty="0">
                 <a:solidFill>
                   <a:schemeClr val="dk1"/>
                 </a:solidFill>
@@ -17329,7 +18733,7 @@
               </a:rPr>
               <a:t>Many thousands of points!</a:t>
             </a:r>
-            <a:endParaRPr/>
+            <a:endParaRPr dirty="0"/>
           </a:p>
           <a:p>
             <a:pPr marL="0" marR="0" lvl="0" indent="0" algn="l" rtl="0">
@@ -17341,7 +18745,7 @@
               </a:spcAft>
               <a:buNone/>
             </a:pPr>
-            <a:endParaRPr sz="1800">
+            <a:endParaRPr sz="1800" dirty="0">
               <a:solidFill>
                 <a:schemeClr val="dk1"/>
               </a:solidFill>
@@ -17361,7 +18765,7 @@
               </a:spcAft>
               <a:buNone/>
             </a:pPr>
-            <a:endParaRPr sz="1800">
+            <a:endParaRPr sz="1800" dirty="0">
               <a:solidFill>
                 <a:schemeClr val="dk1"/>
               </a:solidFill>
@@ -17382,7 +18786,7 @@
               <a:buNone/>
             </a:pPr>
             <a:r>
-              <a:rPr lang="en-US" sz="1800">
+              <a:rPr lang="en-US" sz="1800" dirty="0">
                 <a:solidFill>
                   <a:schemeClr val="dk1"/>
                 </a:solidFill>
@@ -17391,9 +18795,33 @@
                 <a:cs typeface="Calibri"/>
                 <a:sym typeface="Calibri"/>
               </a:rPr>
-              <a:t>A raster makes small cells, or pixels, of the map and gives the average of each square.</a:t>
+              <a:t>A </a:t>
             </a:r>
-            <a:endParaRPr/>
+            <a:r>
+              <a:rPr lang="en-US" sz="1800" b="1" u="sng" dirty="0">
+                <a:solidFill>
+                  <a:schemeClr val="dk1"/>
+                </a:solidFill>
+                <a:latin typeface="Calibri"/>
+                <a:ea typeface="Calibri"/>
+                <a:cs typeface="Calibri"/>
+                <a:sym typeface="Calibri"/>
+              </a:rPr>
+              <a:t>raster</a:t>
+            </a:r>
+            <a:r>
+              <a:rPr lang="en-US" sz="1800" dirty="0">
+                <a:solidFill>
+                  <a:schemeClr val="dk1"/>
+                </a:solidFill>
+                <a:latin typeface="Calibri"/>
+                <a:ea typeface="Calibri"/>
+                <a:cs typeface="Calibri"/>
+                <a:sym typeface="Calibri"/>
+              </a:rPr>
+              <a:t> makes small cells, or pixels, of the map and gives the average of each square.</a:t>
+            </a:r>
+            <a:endParaRPr dirty="0"/>
           </a:p>
           <a:p>
             <a:pPr marL="0" marR="0" lvl="0" indent="0" algn="l" rtl="0">
@@ -17405,7 +18833,7 @@
               </a:spcAft>
               <a:buNone/>
             </a:pPr>
-            <a:endParaRPr sz="1800">
+            <a:endParaRPr sz="1800" dirty="0">
               <a:solidFill>
                 <a:schemeClr val="dk1"/>
               </a:solidFill>
@@ -17426,7 +18854,7 @@
               <a:buNone/>
             </a:pPr>
             <a:r>
-              <a:rPr lang="en-US" sz="1800">
+              <a:rPr lang="en-US" sz="1800" dirty="0">
                 <a:solidFill>
                   <a:schemeClr val="dk1"/>
                 </a:solidFill>
@@ -17437,943 +18865,10 @@
               </a:rPr>
               <a:t>Much less data to work with!</a:t>
             </a:r>
-            <a:endParaRPr/>
+            <a:endParaRPr dirty="0"/>
           </a:p>
         </p:txBody>
       </p:sp>
-    </p:spTree>
-  </p:cSld>
-  <p:clrMapOvr>
-    <a:masterClrMapping/>
-  </p:clrMapOvr>
-</p:sld>
-</file>
-
-<file path=ppt/slides/slide8.xml><?xml version="1.0" encoding="utf-8"?>
-<p:sld xmlns:a="http://schemas.openxmlformats.org/drawingml/2006/main" xmlns:r="http://schemas.openxmlformats.org/officeDocument/2006/relationships" xmlns:p="http://schemas.openxmlformats.org/presentationml/2006/main">
-  <p:cSld>
-    <p:spTree>
-      <p:nvGrpSpPr>
-        <p:cNvPr id="1" name="Shape 140"/>
-        <p:cNvGrpSpPr/>
-        <p:nvPr/>
-      </p:nvGrpSpPr>
-      <p:grpSpPr>
-        <a:xfrm>
-          <a:off x="0" y="0"/>
-          <a:ext cx="0" cy="0"/>
-          <a:chOff x="0" y="0"/>
-          <a:chExt cx="0" cy="0"/>
-        </a:xfrm>
-      </p:grpSpPr>
-      <p:pic>
-        <p:nvPicPr>
-          <p:cNvPr id="141" name="Google Shape;141;p8" descr="A map of the state with different colored dots  Description automatically generated"/>
-          <p:cNvPicPr preferRelativeResize="0"/>
-          <p:nvPr/>
-        </p:nvPicPr>
-        <p:blipFill rotWithShape="1">
-          <a:blip r:embed="rId3">
-            <a:alphaModFix/>
-          </a:blip>
-          <a:srcRect/>
-          <a:stretch/>
-        </p:blipFill>
-        <p:spPr>
-          <a:xfrm>
-            <a:off x="0" y="591385"/>
-            <a:ext cx="4254500" cy="4216400"/>
-          </a:xfrm>
-          <a:prstGeom prst="rect">
-            <a:avLst/>
-          </a:prstGeom>
-          <a:noFill/>
-          <a:ln>
-            <a:noFill/>
-          </a:ln>
-        </p:spPr>
-      </p:pic>
-      <p:sp>
-        <p:nvSpPr>
-          <p:cNvPr id="142" name="Google Shape;142;p8"/>
-          <p:cNvSpPr/>
-          <p:nvPr/>
-        </p:nvSpPr>
-        <p:spPr>
-          <a:xfrm>
-            <a:off x="4617244" y="1713747"/>
-            <a:ext cx="2957512" cy="985838"/>
-          </a:xfrm>
-          <a:prstGeom prst="rightArrow">
-            <a:avLst>
-              <a:gd name="adj1" fmla="val 50000"/>
-              <a:gd name="adj2" fmla="val 50000"/>
-            </a:avLst>
-          </a:prstGeom>
-          <a:solidFill>
-            <a:schemeClr val="accent1"/>
-          </a:solidFill>
-          <a:ln w="12700" cap="flat" cmpd="sng">
-            <a:solidFill>
-              <a:srgbClr val="1C3052"/>
-            </a:solidFill>
-            <a:prstDash val="solid"/>
-            <a:miter lim="800000"/>
-            <a:headEnd type="none" w="sm" len="sm"/>
-            <a:tailEnd type="none" w="sm" len="sm"/>
-          </a:ln>
-        </p:spPr>
-        <p:txBody>
-          <a:bodyPr spcFirstLastPara="1" wrap="square" lIns="91425" tIns="45700" rIns="91425" bIns="45700" anchor="ctr" anchorCtr="0">
-            <a:noAutofit/>
-          </a:bodyPr>
-          <a:lstStyle/>
-          <a:p>
-            <a:pPr marL="0" marR="0" lvl="0" indent="0" algn="ctr" rtl="0">
-              <a:spcBef>
-                <a:spcPts val="0"/>
-              </a:spcBef>
-              <a:spcAft>
-                <a:spcPts val="0"/>
-              </a:spcAft>
-              <a:buNone/>
-            </a:pPr>
-            <a:endParaRPr sz="1800">
-              <a:solidFill>
-                <a:schemeClr val="lt1"/>
-              </a:solidFill>
-              <a:latin typeface="Calibri"/>
-              <a:ea typeface="Calibri"/>
-              <a:cs typeface="Calibri"/>
-              <a:sym typeface="Calibri"/>
-            </a:endParaRPr>
-          </a:p>
-        </p:txBody>
-      </p:sp>
-      <p:pic>
-        <p:nvPicPr>
-          <p:cNvPr id="143" name="Google Shape;143;p8" descr="A graph of a spider web  Description automatically generated with medium confidence"/>
-          <p:cNvPicPr preferRelativeResize="0"/>
-          <p:nvPr/>
-        </p:nvPicPr>
-        <p:blipFill rotWithShape="1">
-          <a:blip r:embed="rId4">
-            <a:alphaModFix/>
-          </a:blip>
-          <a:srcRect/>
-          <a:stretch/>
-        </p:blipFill>
-        <p:spPr>
-          <a:xfrm>
-            <a:off x="4816016" y="2858253"/>
-            <a:ext cx="2298700" cy="2286000"/>
-          </a:xfrm>
-          <a:prstGeom prst="rect">
-            <a:avLst/>
-          </a:prstGeom>
-          <a:noFill/>
-          <a:ln>
-            <a:noFill/>
-          </a:ln>
-        </p:spPr>
-      </p:pic>
-      <p:pic>
-        <p:nvPicPr>
-          <p:cNvPr id="144" name="Google Shape;144;p8" descr="A map of the state of california  Description automatically generated"/>
-          <p:cNvPicPr preferRelativeResize="0"/>
-          <p:nvPr/>
-        </p:nvPicPr>
-        <p:blipFill rotWithShape="1">
-          <a:blip r:embed="rId5">
-            <a:alphaModFix/>
-          </a:blip>
-          <a:srcRect/>
-          <a:stretch/>
-        </p:blipFill>
-        <p:spPr>
-          <a:xfrm>
-            <a:off x="8412998" y="285371"/>
-            <a:ext cx="2872623" cy="2856752"/>
-          </a:xfrm>
-          <a:prstGeom prst="rect">
-            <a:avLst/>
-          </a:prstGeom>
-          <a:noFill/>
-          <a:ln>
-            <a:noFill/>
-          </a:ln>
-        </p:spPr>
-      </p:pic>
-      <p:sp>
-        <p:nvSpPr>
-          <p:cNvPr id="145" name="Google Shape;145;p8"/>
-          <p:cNvSpPr/>
-          <p:nvPr/>
-        </p:nvSpPr>
-        <p:spPr>
-          <a:xfrm>
-            <a:off x="9577135" y="3259618"/>
-            <a:ext cx="541421" cy="782053"/>
-          </a:xfrm>
-          <a:prstGeom prst="downArrow">
-            <a:avLst>
-              <a:gd name="adj1" fmla="val 50000"/>
-              <a:gd name="adj2" fmla="val 50000"/>
-            </a:avLst>
-          </a:prstGeom>
-          <a:solidFill>
-            <a:schemeClr val="accent1"/>
-          </a:solidFill>
-          <a:ln w="12700" cap="flat" cmpd="sng">
-            <a:solidFill>
-              <a:srgbClr val="1C3052"/>
-            </a:solidFill>
-            <a:prstDash val="solid"/>
-            <a:miter lim="800000"/>
-            <a:headEnd type="none" w="sm" len="sm"/>
-            <a:tailEnd type="none" w="sm" len="sm"/>
-          </a:ln>
-        </p:spPr>
-        <p:txBody>
-          <a:bodyPr spcFirstLastPara="1" wrap="square" lIns="91425" tIns="45700" rIns="91425" bIns="45700" anchor="ctr" anchorCtr="0">
-            <a:noAutofit/>
-          </a:bodyPr>
-          <a:lstStyle/>
-          <a:p>
-            <a:pPr marL="0" marR="0" lvl="0" indent="0" algn="ctr" rtl="0">
-              <a:spcBef>
-                <a:spcPts val="0"/>
-              </a:spcBef>
-              <a:spcAft>
-                <a:spcPts val="0"/>
-              </a:spcAft>
-              <a:buNone/>
-            </a:pPr>
-            <a:endParaRPr sz="1800">
-              <a:solidFill>
-                <a:schemeClr val="lt1"/>
-              </a:solidFill>
-              <a:latin typeface="Calibri"/>
-              <a:ea typeface="Calibri"/>
-              <a:cs typeface="Calibri"/>
-              <a:sym typeface="Calibri"/>
-            </a:endParaRPr>
-          </a:p>
-        </p:txBody>
-      </p:sp>
-      <p:pic>
-        <p:nvPicPr>
-          <p:cNvPr id="146" name="Google Shape;146;p8" descr="A map of the california state  Description automatically generated"/>
-          <p:cNvPicPr preferRelativeResize="0"/>
-          <p:nvPr/>
-        </p:nvPicPr>
-        <p:blipFill rotWithShape="1">
-          <a:blip r:embed="rId6">
-            <a:alphaModFix/>
-          </a:blip>
-          <a:srcRect/>
-          <a:stretch/>
-        </p:blipFill>
-        <p:spPr>
-          <a:xfrm>
-            <a:off x="8480723" y="4041671"/>
-            <a:ext cx="2734243" cy="2719137"/>
-          </a:xfrm>
-          <a:prstGeom prst="rect">
-            <a:avLst/>
-          </a:prstGeom>
-          <a:noFill/>
-          <a:ln>
-            <a:noFill/>
-          </a:ln>
-        </p:spPr>
-      </p:pic>
-      <p:sp>
-        <p:nvSpPr>
-          <p:cNvPr id="147" name="Google Shape;147;p8"/>
-          <p:cNvSpPr txBox="1"/>
-          <p:nvPr/>
-        </p:nvSpPr>
-        <p:spPr>
-          <a:xfrm>
-            <a:off x="4847264" y="664917"/>
-            <a:ext cx="2497472" cy="646331"/>
-          </a:xfrm>
-          <a:prstGeom prst="rect">
-            <a:avLst/>
-          </a:prstGeom>
-          <a:noFill/>
-          <a:ln>
-            <a:noFill/>
-          </a:ln>
-        </p:spPr>
-        <p:txBody>
-          <a:bodyPr spcFirstLastPara="1" wrap="square" lIns="91425" tIns="45700" rIns="91425" bIns="45700" anchor="t" anchorCtr="0">
-            <a:spAutoFit/>
-          </a:bodyPr>
-          <a:lstStyle/>
-          <a:p>
-            <a:pPr marL="0" marR="0" lvl="0" indent="0" algn="l" rtl="0">
-              <a:spcBef>
-                <a:spcPts val="0"/>
-              </a:spcBef>
-              <a:spcAft>
-                <a:spcPts val="0"/>
-              </a:spcAft>
-              <a:buNone/>
-            </a:pPr>
-            <a:r>
-              <a:rPr lang="en-US" sz="3600">
-                <a:solidFill>
-                  <a:schemeClr val="dk1"/>
-                </a:solidFill>
-                <a:latin typeface="Calibri"/>
-                <a:ea typeface="Calibri"/>
-                <a:cs typeface="Calibri"/>
-                <a:sym typeface="Calibri"/>
-              </a:rPr>
-              <a:t>Interpolate!</a:t>
-            </a:r>
-            <a:endParaRPr/>
-          </a:p>
-        </p:txBody>
-      </p:sp>
-      <p:sp>
-        <p:nvSpPr>
-          <p:cNvPr id="148" name="Google Shape;148;p8"/>
-          <p:cNvSpPr txBox="1"/>
-          <p:nvPr/>
-        </p:nvSpPr>
-        <p:spPr>
-          <a:xfrm>
-            <a:off x="10335126" y="3429000"/>
-            <a:ext cx="1118937" cy="523220"/>
-          </a:xfrm>
-          <a:prstGeom prst="rect">
-            <a:avLst/>
-          </a:prstGeom>
-          <a:noFill/>
-          <a:ln>
-            <a:noFill/>
-          </a:ln>
-        </p:spPr>
-        <p:txBody>
-          <a:bodyPr spcFirstLastPara="1" wrap="square" lIns="91425" tIns="45700" rIns="91425" bIns="45700" anchor="t" anchorCtr="0">
-            <a:spAutoFit/>
-          </a:bodyPr>
-          <a:lstStyle/>
-          <a:p>
-            <a:pPr marL="0" marR="0" lvl="0" indent="0" algn="l" rtl="0">
-              <a:spcBef>
-                <a:spcPts val="0"/>
-              </a:spcBef>
-              <a:spcAft>
-                <a:spcPts val="0"/>
-              </a:spcAft>
-              <a:buNone/>
-            </a:pPr>
-            <a:r>
-              <a:rPr lang="en-US" sz="2800">
-                <a:solidFill>
-                  <a:schemeClr val="dk1"/>
-                </a:solidFill>
-                <a:latin typeface="Calibri"/>
-                <a:ea typeface="Calibri"/>
-                <a:cs typeface="Calibri"/>
-                <a:sym typeface="Calibri"/>
-              </a:rPr>
-              <a:t>Raster</a:t>
-            </a:r>
-            <a:endParaRPr/>
-          </a:p>
-        </p:txBody>
-      </p:sp>
-      <p:sp>
-        <p:nvSpPr>
-          <p:cNvPr id="149" name="Google Shape;149;p8"/>
-          <p:cNvSpPr txBox="1"/>
-          <p:nvPr/>
-        </p:nvSpPr>
-        <p:spPr>
-          <a:xfrm>
-            <a:off x="790643" y="5468785"/>
-            <a:ext cx="6927713" cy="1200329"/>
-          </a:xfrm>
-          <a:prstGeom prst="rect">
-            <a:avLst/>
-          </a:prstGeom>
-          <a:noFill/>
-          <a:ln>
-            <a:noFill/>
-          </a:ln>
-        </p:spPr>
-        <p:txBody>
-          <a:bodyPr spcFirstLastPara="1" wrap="square" lIns="91425" tIns="45700" rIns="91425" bIns="45700" anchor="t" anchorCtr="0">
-            <a:spAutoFit/>
-          </a:bodyPr>
-          <a:lstStyle/>
-          <a:p>
-            <a:pPr marL="0" marR="0" lvl="0" indent="0" algn="l" rtl="0">
-              <a:spcBef>
-                <a:spcPts val="0"/>
-              </a:spcBef>
-              <a:spcAft>
-                <a:spcPts val="0"/>
-              </a:spcAft>
-              <a:buNone/>
-            </a:pPr>
-            <a:r>
-              <a:rPr lang="en-US" sz="3600" b="1">
-                <a:solidFill>
-                  <a:schemeClr val="accent2"/>
-                </a:solidFill>
-                <a:latin typeface="Calibri"/>
-                <a:ea typeface="Calibri"/>
-                <a:cs typeface="Calibri"/>
-                <a:sym typeface="Calibri"/>
-              </a:rPr>
-              <a:t>Spatial Data Science – Precipitation in California</a:t>
-            </a:r>
-            <a:endParaRPr/>
-          </a:p>
-        </p:txBody>
-      </p:sp>
-      <p:sp>
-        <p:nvSpPr>
-          <p:cNvPr id="150" name="Google Shape;150;p8"/>
-          <p:cNvSpPr txBox="1"/>
-          <p:nvPr/>
-        </p:nvSpPr>
-        <p:spPr>
-          <a:xfrm>
-            <a:off x="168442" y="0"/>
-            <a:ext cx="3272590" cy="369332"/>
-          </a:xfrm>
-          <a:prstGeom prst="rect">
-            <a:avLst/>
-          </a:prstGeom>
-          <a:noFill/>
-          <a:ln>
-            <a:noFill/>
-          </a:ln>
-        </p:spPr>
-        <p:txBody>
-          <a:bodyPr spcFirstLastPara="1" wrap="square" lIns="91425" tIns="45700" rIns="91425" bIns="45700" anchor="t" anchorCtr="0">
-            <a:spAutoFit/>
-          </a:bodyPr>
-          <a:lstStyle/>
-          <a:p>
-            <a:pPr marL="0" marR="0" lvl="0" indent="0" algn="l" rtl="0">
-              <a:spcBef>
-                <a:spcPts val="0"/>
-              </a:spcBef>
-              <a:spcAft>
-                <a:spcPts val="0"/>
-              </a:spcAft>
-              <a:buNone/>
-            </a:pPr>
-            <a:r>
-              <a:rPr lang="en-US" sz="1800">
-                <a:solidFill>
-                  <a:schemeClr val="dk1"/>
-                </a:solidFill>
-                <a:latin typeface="Calibri"/>
-                <a:ea typeface="Calibri"/>
-                <a:cs typeface="Calibri"/>
-                <a:sym typeface="Calibri"/>
-              </a:rPr>
-              <a:t>https://rspatial.org/index.html</a:t>
-            </a:r>
-            <a:endParaRPr sz="1800">
-              <a:solidFill>
-                <a:schemeClr val="dk1"/>
-              </a:solidFill>
-              <a:latin typeface="Calibri"/>
-              <a:ea typeface="Calibri"/>
-              <a:cs typeface="Calibri"/>
-              <a:sym typeface="Calibri"/>
-            </a:endParaRPr>
-          </a:p>
-        </p:txBody>
-      </p:sp>
-    </p:spTree>
-  </p:cSld>
-  <p:clrMapOvr>
-    <a:masterClrMapping/>
-  </p:clrMapOvr>
-</p:sld>
-</file>
-
-<file path=ppt/slides/slide9.xml><?xml version="1.0" encoding="utf-8"?>
-<p:sld xmlns:a="http://schemas.openxmlformats.org/drawingml/2006/main" xmlns:r="http://schemas.openxmlformats.org/officeDocument/2006/relationships" xmlns:p="http://schemas.openxmlformats.org/presentationml/2006/main">
-  <p:cSld>
-    <p:spTree>
-      <p:nvGrpSpPr>
-        <p:cNvPr id="1" name="Shape 154"/>
-        <p:cNvGrpSpPr/>
-        <p:nvPr/>
-      </p:nvGrpSpPr>
-      <p:grpSpPr>
-        <a:xfrm>
-          <a:off x="0" y="0"/>
-          <a:ext cx="0" cy="0"/>
-          <a:chOff x="0" y="0"/>
-          <a:chExt cx="0" cy="0"/>
-        </a:xfrm>
-      </p:grpSpPr>
-      <p:pic>
-        <p:nvPicPr>
-          <p:cNvPr id="155" name="Google Shape;155;p9" descr="A map of the world  Description automatically generated"/>
-          <p:cNvPicPr preferRelativeResize="0"/>
-          <p:nvPr/>
-        </p:nvPicPr>
-        <p:blipFill rotWithShape="1">
-          <a:blip r:embed="rId3">
-            <a:alphaModFix/>
-          </a:blip>
-          <a:srcRect/>
-          <a:stretch/>
-        </p:blipFill>
-        <p:spPr>
-          <a:xfrm>
-            <a:off x="111126" y="1725723"/>
-            <a:ext cx="3425479" cy="3406554"/>
-          </a:xfrm>
-          <a:prstGeom prst="rect">
-            <a:avLst/>
-          </a:prstGeom>
-          <a:noFill/>
-          <a:ln>
-            <a:noFill/>
-          </a:ln>
-        </p:spPr>
-      </p:pic>
-      <p:pic>
-        <p:nvPicPr>
-          <p:cNvPr id="156" name="Google Shape;156;p9" descr="A map of the south and south america  Description automatically generated"/>
-          <p:cNvPicPr preferRelativeResize="0"/>
-          <p:nvPr/>
-        </p:nvPicPr>
-        <p:blipFill rotWithShape="1">
-          <a:blip r:embed="rId4">
-            <a:alphaModFix/>
-          </a:blip>
-          <a:srcRect/>
-          <a:stretch/>
-        </p:blipFill>
-        <p:spPr>
-          <a:xfrm>
-            <a:off x="4383260" y="1725723"/>
-            <a:ext cx="3425479" cy="3406554"/>
-          </a:xfrm>
-          <a:prstGeom prst="rect">
-            <a:avLst/>
-          </a:prstGeom>
-          <a:noFill/>
-          <a:ln>
-            <a:noFill/>
-          </a:ln>
-        </p:spPr>
-      </p:pic>
-      <p:sp>
-        <p:nvSpPr>
-          <p:cNvPr id="157" name="Google Shape;157;p9"/>
-          <p:cNvSpPr txBox="1"/>
-          <p:nvPr/>
-        </p:nvSpPr>
-        <p:spPr>
-          <a:xfrm>
-            <a:off x="639506" y="5829301"/>
-            <a:ext cx="2368717" cy="369332"/>
-          </a:xfrm>
-          <a:prstGeom prst="rect">
-            <a:avLst/>
-          </a:prstGeom>
-          <a:noFill/>
-          <a:ln>
-            <a:noFill/>
-          </a:ln>
-        </p:spPr>
-        <p:txBody>
-          <a:bodyPr spcFirstLastPara="1" wrap="square" lIns="91425" tIns="45700" rIns="91425" bIns="45700" anchor="t" anchorCtr="0">
-            <a:spAutoFit/>
-          </a:bodyPr>
-          <a:lstStyle/>
-          <a:p>
-            <a:pPr marL="0" marR="0" lvl="0" indent="0" algn="ctr" rtl="0">
-              <a:spcBef>
-                <a:spcPts val="0"/>
-              </a:spcBef>
-              <a:spcAft>
-                <a:spcPts val="0"/>
-              </a:spcAft>
-              <a:buNone/>
-            </a:pPr>
-            <a:r>
-              <a:rPr lang="en-US" sz="1800">
-                <a:solidFill>
-                  <a:schemeClr val="dk1"/>
-                </a:solidFill>
-                <a:latin typeface="Calibri"/>
-                <a:ea typeface="Calibri"/>
-                <a:cs typeface="Calibri"/>
-                <a:sym typeface="Calibri"/>
-              </a:rPr>
-              <a:t>Wild potatoes!</a:t>
-            </a:r>
-            <a:endParaRPr/>
-          </a:p>
-        </p:txBody>
-      </p:sp>
-      <p:sp>
-        <p:nvSpPr>
-          <p:cNvPr id="158" name="Google Shape;158;p9"/>
-          <p:cNvSpPr txBox="1"/>
-          <p:nvPr/>
-        </p:nvSpPr>
-        <p:spPr>
-          <a:xfrm>
-            <a:off x="4383260" y="5690801"/>
-            <a:ext cx="2828925" cy="646331"/>
-          </a:xfrm>
-          <a:prstGeom prst="rect">
-            <a:avLst/>
-          </a:prstGeom>
-          <a:noFill/>
-          <a:ln>
-            <a:noFill/>
-          </a:ln>
-        </p:spPr>
-        <p:txBody>
-          <a:bodyPr spcFirstLastPara="1" wrap="square" lIns="91425" tIns="45700" rIns="91425" bIns="45700" anchor="t" anchorCtr="0">
-            <a:spAutoFit/>
-          </a:bodyPr>
-          <a:lstStyle/>
-          <a:p>
-            <a:pPr marL="0" marR="0" lvl="0" indent="0" algn="ctr" rtl="0">
-              <a:spcBef>
-                <a:spcPts val="0"/>
-              </a:spcBef>
-              <a:spcAft>
-                <a:spcPts val="0"/>
-              </a:spcAft>
-              <a:buNone/>
-            </a:pPr>
-            <a:r>
-              <a:rPr lang="en-US" sz="1800">
-                <a:solidFill>
-                  <a:schemeClr val="dk1"/>
-                </a:solidFill>
-                <a:latin typeface="Calibri"/>
-                <a:ea typeface="Calibri"/>
-                <a:cs typeface="Calibri"/>
-                <a:sym typeface="Calibri"/>
-              </a:rPr>
-              <a:t>Number of species by country</a:t>
-            </a:r>
-            <a:endParaRPr/>
-          </a:p>
-        </p:txBody>
-      </p:sp>
-      <p:sp>
-        <p:nvSpPr>
-          <p:cNvPr id="159" name="Google Shape;159;p9"/>
-          <p:cNvSpPr txBox="1"/>
-          <p:nvPr/>
-        </p:nvSpPr>
-        <p:spPr>
-          <a:xfrm>
-            <a:off x="9107905" y="5690801"/>
-            <a:ext cx="2658979" cy="369332"/>
-          </a:xfrm>
-          <a:prstGeom prst="rect">
-            <a:avLst/>
-          </a:prstGeom>
-          <a:noFill/>
-          <a:ln>
-            <a:noFill/>
-          </a:ln>
-        </p:spPr>
-        <p:txBody>
-          <a:bodyPr spcFirstLastPara="1" wrap="square" lIns="91425" tIns="45700" rIns="91425" bIns="45700" anchor="t" anchorCtr="0">
-            <a:spAutoFit/>
-          </a:bodyPr>
-          <a:lstStyle/>
-          <a:p>
-            <a:pPr marL="0" marR="0" lvl="0" indent="0" algn="l" rtl="0">
-              <a:spcBef>
-                <a:spcPts val="0"/>
-              </a:spcBef>
-              <a:spcAft>
-                <a:spcPts val="0"/>
-              </a:spcAft>
-              <a:buNone/>
-            </a:pPr>
-            <a:r>
-              <a:rPr lang="en-US" sz="1800">
-                <a:solidFill>
-                  <a:schemeClr val="dk1"/>
-                </a:solidFill>
-                <a:latin typeface="Calibri"/>
-                <a:ea typeface="Calibri"/>
-                <a:cs typeface="Calibri"/>
-                <a:sym typeface="Calibri"/>
-              </a:rPr>
-              <a:t>Species richness in raster</a:t>
-            </a:r>
-            <a:endParaRPr/>
-          </a:p>
-        </p:txBody>
-      </p:sp>
-      <p:sp>
-        <p:nvSpPr>
-          <p:cNvPr id="160" name="Google Shape;160;p9"/>
-          <p:cNvSpPr/>
-          <p:nvPr/>
-        </p:nvSpPr>
-        <p:spPr>
-          <a:xfrm>
-            <a:off x="3536605" y="3200400"/>
-            <a:ext cx="846655" cy="589547"/>
-          </a:xfrm>
-          <a:prstGeom prst="rightArrow">
-            <a:avLst>
-              <a:gd name="adj1" fmla="val 50000"/>
-              <a:gd name="adj2" fmla="val 50000"/>
-            </a:avLst>
-          </a:prstGeom>
-          <a:solidFill>
-            <a:schemeClr val="accent1"/>
-          </a:solidFill>
-          <a:ln w="12700" cap="flat" cmpd="sng">
-            <a:solidFill>
-              <a:srgbClr val="1C3052"/>
-            </a:solidFill>
-            <a:prstDash val="solid"/>
-            <a:miter lim="800000"/>
-            <a:headEnd type="none" w="sm" len="sm"/>
-            <a:tailEnd type="none" w="sm" len="sm"/>
-          </a:ln>
-        </p:spPr>
-        <p:txBody>
-          <a:bodyPr spcFirstLastPara="1" wrap="square" lIns="91425" tIns="45700" rIns="91425" bIns="45700" anchor="ctr" anchorCtr="0">
-            <a:noAutofit/>
-          </a:bodyPr>
-          <a:lstStyle/>
-          <a:p>
-            <a:pPr marL="0" marR="0" lvl="0" indent="0" algn="ctr" rtl="0">
-              <a:spcBef>
-                <a:spcPts val="0"/>
-              </a:spcBef>
-              <a:spcAft>
-                <a:spcPts val="0"/>
-              </a:spcAft>
-              <a:buNone/>
-            </a:pPr>
-            <a:endParaRPr sz="1800">
-              <a:solidFill>
-                <a:schemeClr val="lt1"/>
-              </a:solidFill>
-              <a:latin typeface="Calibri"/>
-              <a:ea typeface="Calibri"/>
-              <a:cs typeface="Calibri"/>
-              <a:sym typeface="Calibri"/>
-            </a:endParaRPr>
-          </a:p>
-        </p:txBody>
-      </p:sp>
-      <p:sp>
-        <p:nvSpPr>
-          <p:cNvPr id="161" name="Google Shape;161;p9"/>
-          <p:cNvSpPr/>
-          <p:nvPr/>
-        </p:nvSpPr>
-        <p:spPr>
-          <a:xfrm>
-            <a:off x="7808739" y="3116179"/>
-            <a:ext cx="846656" cy="673768"/>
-          </a:xfrm>
-          <a:prstGeom prst="rightArrow">
-            <a:avLst>
-              <a:gd name="adj1" fmla="val 50000"/>
-              <a:gd name="adj2" fmla="val 50000"/>
-            </a:avLst>
-          </a:prstGeom>
-          <a:solidFill>
-            <a:schemeClr val="accent1"/>
-          </a:solidFill>
-          <a:ln w="12700" cap="flat" cmpd="sng">
-            <a:solidFill>
-              <a:srgbClr val="1C3052"/>
-            </a:solidFill>
-            <a:prstDash val="solid"/>
-            <a:miter lim="800000"/>
-            <a:headEnd type="none" w="sm" len="sm"/>
-            <a:tailEnd type="none" w="sm" len="sm"/>
-          </a:ln>
-        </p:spPr>
-        <p:txBody>
-          <a:bodyPr spcFirstLastPara="1" wrap="square" lIns="91425" tIns="45700" rIns="91425" bIns="45700" anchor="ctr" anchorCtr="0">
-            <a:noAutofit/>
-          </a:bodyPr>
-          <a:lstStyle/>
-          <a:p>
-            <a:pPr marL="0" marR="0" lvl="0" indent="0" algn="ctr" rtl="0">
-              <a:spcBef>
-                <a:spcPts val="0"/>
-              </a:spcBef>
-              <a:spcAft>
-                <a:spcPts val="0"/>
-              </a:spcAft>
-              <a:buNone/>
-            </a:pPr>
-            <a:endParaRPr sz="1800">
-              <a:solidFill>
-                <a:schemeClr val="lt1"/>
-              </a:solidFill>
-              <a:latin typeface="Calibri"/>
-              <a:ea typeface="Calibri"/>
-              <a:cs typeface="Calibri"/>
-              <a:sym typeface="Calibri"/>
-            </a:endParaRPr>
-          </a:p>
-        </p:txBody>
-      </p:sp>
-      <p:sp>
-        <p:nvSpPr>
-          <p:cNvPr id="162" name="Google Shape;162;p9"/>
-          <p:cNvSpPr txBox="1"/>
-          <p:nvPr/>
-        </p:nvSpPr>
-        <p:spPr>
-          <a:xfrm>
-            <a:off x="1636295" y="240632"/>
-            <a:ext cx="8614610" cy="1077218"/>
-          </a:xfrm>
-          <a:prstGeom prst="rect">
-            <a:avLst/>
-          </a:prstGeom>
-          <a:noFill/>
-          <a:ln>
-            <a:noFill/>
-          </a:ln>
-        </p:spPr>
-        <p:txBody>
-          <a:bodyPr spcFirstLastPara="1" wrap="square" lIns="91425" tIns="45700" rIns="91425" bIns="45700" anchor="t" anchorCtr="0">
-            <a:spAutoFit/>
-          </a:bodyPr>
-          <a:lstStyle/>
-          <a:p>
-            <a:pPr marL="0" marR="0" lvl="0" indent="0" algn="l" rtl="0">
-              <a:spcBef>
-                <a:spcPts val="0"/>
-              </a:spcBef>
-              <a:spcAft>
-                <a:spcPts val="0"/>
-              </a:spcAft>
-              <a:buNone/>
-            </a:pPr>
-            <a:r>
-              <a:rPr lang="en-US" sz="3200">
-                <a:solidFill>
-                  <a:schemeClr val="dk1"/>
-                </a:solidFill>
-                <a:latin typeface="Calibri"/>
-                <a:ea typeface="Calibri"/>
-                <a:cs typeface="Calibri"/>
-                <a:sym typeface="Calibri"/>
-              </a:rPr>
-              <a:t>A dataframe has wild potatoes with observation and species abundance</a:t>
-            </a:r>
-            <a:endParaRPr/>
-          </a:p>
-        </p:txBody>
-      </p:sp>
-      <p:sp>
-        <p:nvSpPr>
-          <p:cNvPr id="163" name="Google Shape;163;p9"/>
-          <p:cNvSpPr txBox="1"/>
-          <p:nvPr/>
-        </p:nvSpPr>
-        <p:spPr>
-          <a:xfrm>
-            <a:off x="8655395" y="6488668"/>
-            <a:ext cx="3425479" cy="369332"/>
-          </a:xfrm>
-          <a:prstGeom prst="rect">
-            <a:avLst/>
-          </a:prstGeom>
-          <a:noFill/>
-          <a:ln>
-            <a:noFill/>
-          </a:ln>
-        </p:spPr>
-        <p:txBody>
-          <a:bodyPr spcFirstLastPara="1" wrap="square" lIns="91425" tIns="45700" rIns="91425" bIns="45700" anchor="t" anchorCtr="0">
-            <a:spAutoFit/>
-          </a:bodyPr>
-          <a:lstStyle/>
-          <a:p>
-            <a:pPr marL="0" marR="0" lvl="0" indent="0" algn="l" rtl="0">
-              <a:spcBef>
-                <a:spcPts val="0"/>
-              </a:spcBef>
-              <a:spcAft>
-                <a:spcPts val="0"/>
-              </a:spcAft>
-              <a:buNone/>
-            </a:pPr>
-            <a:r>
-              <a:rPr lang="en-US" sz="1800">
-                <a:solidFill>
-                  <a:schemeClr val="dk1"/>
-                </a:solidFill>
-                <a:latin typeface="Calibri"/>
-                <a:ea typeface="Calibri"/>
-                <a:cs typeface="Calibri"/>
-                <a:sym typeface="Calibri"/>
-              </a:rPr>
-              <a:t>https://rspatial.org/index.html</a:t>
-            </a:r>
-            <a:endParaRPr sz="1800">
-              <a:solidFill>
-                <a:schemeClr val="dk1"/>
-              </a:solidFill>
-              <a:latin typeface="Calibri"/>
-              <a:ea typeface="Calibri"/>
-              <a:cs typeface="Calibri"/>
-              <a:sym typeface="Calibri"/>
-            </a:endParaRPr>
-          </a:p>
-        </p:txBody>
-      </p:sp>
-      <p:pic>
-        <p:nvPicPr>
-          <p:cNvPr id="164" name="Google Shape;164;p9" descr="A map of the world  Description automatically generated"/>
-          <p:cNvPicPr preferRelativeResize="0"/>
-          <p:nvPr/>
-        </p:nvPicPr>
-        <p:blipFill rotWithShape="1">
-          <a:blip r:embed="rId5">
-            <a:alphaModFix/>
-          </a:blip>
-          <a:srcRect/>
-          <a:stretch/>
-        </p:blipFill>
-        <p:spPr>
-          <a:xfrm>
-            <a:off x="8655393" y="1725723"/>
-            <a:ext cx="3425479" cy="3406554"/>
-          </a:xfrm>
-          <a:prstGeom prst="rect">
-            <a:avLst/>
-          </a:prstGeom>
-          <a:noFill/>
-          <a:ln>
-            <a:noFill/>
-          </a:ln>
-        </p:spPr>
-      </p:pic>
     </p:spTree>
   </p:cSld>
   <p:clrMapOvr>
